--- a/books/refactoring_improve_the_design_of_existing_code/Refactoring.pptx
+++ b/books/refactoring_improve_the_design_of_existing_code/Refactoring.pptx
@@ -116,6 +116,11 @@
       </a:defRPr>
     </a:lvl9pPr>
   </p:defaultTextStyle>
+  <p:extLst>
+    <p:ext uri="{EFAFB233-063F-42B5-8137-9DF3F51BA10A}">
+      <p15:sldGuideLst xmlns:p15="http://schemas.microsoft.com/office/powerpoint/2012/main"/>
+    </p:ext>
+  </p:extLst>
 </p:presentation>
 </file>
 
@@ -7654,7 +7659,11 @@
             </a:pPr>
             <a:r>
               <a:rPr lang="zh-CN" altLang="en-US" sz="1600" dirty="0"/>
-              <a:t>  不能</a:t>
+              <a:t>  </a:t>
+            </a:r>
+            <a:r>
+              <a:rPr lang="zh-CN" altLang="en-US" sz="1600"/>
+              <a:t>不能</a:t>
             </a:r>
             <a:endParaRPr lang="en-US" altLang="zh-CN" sz="1600" dirty="0"/>
           </a:p>

--- a/books/refactoring_improve_the_design_of_existing_code/Refactoring.pptx
+++ b/books/refactoring_improve_the_design_of_existing_code/Refactoring.pptx
@@ -5,19 +5,26 @@
     <p:sldMasterId id="2147483648" r:id="rId1"/>
   </p:sldMasterIdLst>
   <p:notesMasterIdLst>
-    <p:notesMasterId r:id="rId12"/>
+    <p:notesMasterId r:id="rId19"/>
   </p:notesMasterIdLst>
   <p:sldIdLst>
     <p:sldId id="256" r:id="rId2"/>
     <p:sldId id="257" r:id="rId3"/>
     <p:sldId id="258" r:id="rId4"/>
     <p:sldId id="262" r:id="rId5"/>
-    <p:sldId id="264" r:id="rId6"/>
+    <p:sldId id="274" r:id="rId6"/>
     <p:sldId id="263" r:id="rId7"/>
-    <p:sldId id="261" r:id="rId8"/>
-    <p:sldId id="259" r:id="rId9"/>
-    <p:sldId id="265" r:id="rId10"/>
-    <p:sldId id="260" r:id="rId11"/>
+    <p:sldId id="266" r:id="rId8"/>
+    <p:sldId id="267" r:id="rId9"/>
+    <p:sldId id="268" r:id="rId10"/>
+    <p:sldId id="275" r:id="rId11"/>
+    <p:sldId id="276" r:id="rId12"/>
+    <p:sldId id="269" r:id="rId13"/>
+    <p:sldId id="270" r:id="rId14"/>
+    <p:sldId id="271" r:id="rId15"/>
+    <p:sldId id="272" r:id="rId16"/>
+    <p:sldId id="265" r:id="rId17"/>
+    <p:sldId id="260" r:id="rId18"/>
   </p:sldIdLst>
   <p:sldSz cx="12192000" cy="6858000"/>
   <p:notesSz cx="6858000" cy="9144000"/>
@@ -472,214 +479,6 @@
     </a:lvl9pPr>
   </p:notesStyle>
 </p:notesMaster>
-</file>
-
-<file path=ppt/notesSlides/notesSlide1.xml><?xml version="1.0" encoding="utf-8"?>
-<p:notes xmlns:a="http://schemas.openxmlformats.org/drawingml/2006/main" xmlns:r="http://schemas.openxmlformats.org/officeDocument/2006/relationships" xmlns:p="http://schemas.openxmlformats.org/presentationml/2006/main">
-  <p:cSld>
-    <p:spTree>
-      <p:nvGrpSpPr>
-        <p:cNvPr id="1" name=""/>
-        <p:cNvGrpSpPr/>
-        <p:nvPr/>
-      </p:nvGrpSpPr>
-      <p:grpSpPr>
-        <a:xfrm>
-          <a:off x="0" y="0"/>
-          <a:ext cx="0" cy="0"/>
-          <a:chOff x="0" y="0"/>
-          <a:chExt cx="0" cy="0"/>
-        </a:xfrm>
-      </p:grpSpPr>
-      <p:sp>
-        <p:nvSpPr>
-          <p:cNvPr id="2" name="Slide Image Placeholder 1"/>
-          <p:cNvSpPr>
-            <a:spLocks noGrp="1" noRot="1" noChangeAspect="1"/>
-          </p:cNvSpPr>
-          <p:nvPr>
-            <p:ph type="sldImg"/>
-          </p:nvPr>
-        </p:nvSpPr>
-        <p:spPr/>
-      </p:sp>
-      <p:sp>
-        <p:nvSpPr>
-          <p:cNvPr id="3" name="Notes Placeholder 2"/>
-          <p:cNvSpPr>
-            <a:spLocks noGrp="1"/>
-          </p:cNvSpPr>
-          <p:nvPr>
-            <p:ph type="body" idx="1"/>
-          </p:nvPr>
-        </p:nvSpPr>
-        <p:spPr/>
-        <p:txBody>
-          <a:bodyPr/>
-          <a:lstStyle/>
-          <a:p>
-            <a:r>
-              <a:rPr lang="en-CN" dirty="0"/>
-              <a:t>写unit</a:t>
-            </a:r>
-            <a:r>
-              <a:rPr lang="zh-CN" altLang="en-US" dirty="0"/>
-              <a:t> </a:t>
-            </a:r>
-            <a:r>
-              <a:rPr lang="en-US" altLang="zh-CN" dirty="0"/>
-              <a:t>test</a:t>
-            </a:r>
-            <a:r>
-              <a:rPr lang="zh-CN" altLang="en-US" dirty="0"/>
-              <a:t> 暴漏</a:t>
-            </a:r>
-            <a:r>
-              <a:rPr lang="en-US" altLang="zh-CN" dirty="0"/>
-              <a:t>bug</a:t>
-            </a:r>
-            <a:endParaRPr lang="en-CN" dirty="0"/>
-          </a:p>
-        </p:txBody>
-      </p:sp>
-      <p:sp>
-        <p:nvSpPr>
-          <p:cNvPr id="4" name="Slide Number Placeholder 3"/>
-          <p:cNvSpPr>
-            <a:spLocks noGrp="1"/>
-          </p:cNvSpPr>
-          <p:nvPr>
-            <p:ph type="sldNum" sz="quarter" idx="5"/>
-          </p:nvPr>
-        </p:nvSpPr>
-        <p:spPr/>
-        <p:txBody>
-          <a:bodyPr/>
-          <a:lstStyle/>
-          <a:p>
-            <a:fld id="{BC577713-C50F-0A49-B6B5-BF3553DE71B6}" type="slidenum">
-              <a:rPr lang="en-CN" smtClean="0"/>
-              <a:t>7</a:t>
-            </a:fld>
-            <a:endParaRPr lang="en-CN"/>
-          </a:p>
-        </p:txBody>
-      </p:sp>
-    </p:spTree>
-    <p:extLst>
-      <p:ext uri="{BB962C8B-B14F-4D97-AF65-F5344CB8AC3E}">
-        <p14:creationId xmlns:p14="http://schemas.microsoft.com/office/powerpoint/2010/main" val="4035330989"/>
-      </p:ext>
-    </p:extLst>
-  </p:cSld>
-  <p:clrMapOvr>
-    <a:masterClrMapping/>
-  </p:clrMapOvr>
-</p:notes>
-</file>
-
-<file path=ppt/notesSlides/notesSlide2.xml><?xml version="1.0" encoding="utf-8"?>
-<p:notes xmlns:a="http://schemas.openxmlformats.org/drawingml/2006/main" xmlns:r="http://schemas.openxmlformats.org/officeDocument/2006/relationships" xmlns:p="http://schemas.openxmlformats.org/presentationml/2006/main">
-  <p:cSld>
-    <p:spTree>
-      <p:nvGrpSpPr>
-        <p:cNvPr id="1" name=""/>
-        <p:cNvGrpSpPr/>
-        <p:nvPr/>
-      </p:nvGrpSpPr>
-      <p:grpSpPr>
-        <a:xfrm>
-          <a:off x="0" y="0"/>
-          <a:ext cx="0" cy="0"/>
-          <a:chOff x="0" y="0"/>
-          <a:chExt cx="0" cy="0"/>
-        </a:xfrm>
-      </p:grpSpPr>
-      <p:sp>
-        <p:nvSpPr>
-          <p:cNvPr id="2" name="Slide Image Placeholder 1"/>
-          <p:cNvSpPr>
-            <a:spLocks noGrp="1" noRot="1" noChangeAspect="1"/>
-          </p:cNvSpPr>
-          <p:nvPr>
-            <p:ph type="sldImg"/>
-          </p:nvPr>
-        </p:nvSpPr>
-        <p:spPr/>
-      </p:sp>
-      <p:sp>
-        <p:nvSpPr>
-          <p:cNvPr id="3" name="Notes Placeholder 2"/>
-          <p:cNvSpPr>
-            <a:spLocks noGrp="1"/>
-          </p:cNvSpPr>
-          <p:nvPr>
-            <p:ph type="body" idx="1"/>
-          </p:nvPr>
-        </p:nvSpPr>
-        <p:spPr/>
-        <p:txBody>
-          <a:bodyPr/>
-          <a:lstStyle/>
-          <a:p>
-            <a:r>
-              <a:rPr lang="en-CN" dirty="0"/>
-              <a:t>写unit</a:t>
-            </a:r>
-            <a:r>
-              <a:rPr lang="zh-CN" altLang="en-US" dirty="0"/>
-              <a:t> </a:t>
-            </a:r>
-            <a:r>
-              <a:rPr lang="en-US" altLang="zh-CN" dirty="0"/>
-              <a:t>test</a:t>
-            </a:r>
-            <a:r>
-              <a:rPr lang="zh-CN" altLang="en-US" dirty="0"/>
-              <a:t> 暴漏</a:t>
-            </a:r>
-            <a:r>
-              <a:rPr lang="en-US" altLang="zh-CN" dirty="0"/>
-              <a:t>bug</a:t>
-            </a:r>
-            <a:endParaRPr lang="en-CN" dirty="0"/>
-          </a:p>
-        </p:txBody>
-      </p:sp>
-      <p:sp>
-        <p:nvSpPr>
-          <p:cNvPr id="4" name="Slide Number Placeholder 3"/>
-          <p:cNvSpPr>
-            <a:spLocks noGrp="1"/>
-          </p:cNvSpPr>
-          <p:nvPr>
-            <p:ph type="sldNum" sz="quarter" idx="5"/>
-          </p:nvPr>
-        </p:nvSpPr>
-        <p:spPr/>
-        <p:txBody>
-          <a:bodyPr/>
-          <a:lstStyle/>
-          <a:p>
-            <a:fld id="{BC577713-C50F-0A49-B6B5-BF3553DE71B6}" type="slidenum">
-              <a:rPr lang="en-CN" smtClean="0"/>
-              <a:t>8</a:t>
-            </a:fld>
-            <a:endParaRPr lang="en-CN"/>
-          </a:p>
-        </p:txBody>
-      </p:sp>
-    </p:spTree>
-    <p:extLst>
-      <p:ext uri="{BB962C8B-B14F-4D97-AF65-F5344CB8AC3E}">
-        <p14:creationId xmlns:p14="http://schemas.microsoft.com/office/powerpoint/2010/main" val="3674324794"/>
-      </p:ext>
-    </p:extLst>
-  </p:cSld>
-  <p:clrMapOvr>
-    <a:masterClrMapping/>
-  </p:clrMapOvr>
-</p:notes>
 </file>
 
 <file path=ppt/slideLayouts/slideLayout1.xml><?xml version="1.0" encoding="utf-8"?>
@@ -4124,6 +3923,1554 @@
           <p:cNvPr id="2" name="Title 1">
             <a:extLst>
               <a:ext uri="{FF2B5EF4-FFF2-40B4-BE49-F238E27FC236}">
+                <a16:creationId xmlns:a16="http://schemas.microsoft.com/office/drawing/2014/main" id="{13F8CEAA-D56D-274E-AB8C-9AA921D9DC89}"/>
+              </a:ext>
+            </a:extLst>
+          </p:cNvPr>
+          <p:cNvSpPr>
+            <a:spLocks noGrp="1"/>
+          </p:cNvSpPr>
+          <p:nvPr>
+            <p:ph type="title"/>
+          </p:nvPr>
+        </p:nvSpPr>
+        <p:spPr/>
+        <p:txBody>
+          <a:bodyPr/>
+          <a:lstStyle/>
+          <a:p>
+            <a:r>
+              <a:rPr lang="zh-CN" altLang="en-US" b="1" dirty="0"/>
+              <a:t>哪些迹象表明何时必须重构 </a:t>
+            </a:r>
+            <a:r>
+              <a:rPr lang="en-US" altLang="zh-CN" b="1" dirty="0"/>
+              <a:t>–</a:t>
+            </a:r>
+            <a:r>
+              <a:rPr lang="zh-CN" altLang="en-US" b="1" dirty="0"/>
+              <a:t> </a:t>
+            </a:r>
+            <a:r>
+              <a:rPr lang="en-US" altLang="zh-CN" b="1" dirty="0"/>
+              <a:t>12/22)</a:t>
+            </a:r>
+            <a:endParaRPr lang="en-CN" dirty="0"/>
+          </a:p>
+        </p:txBody>
+      </p:sp>
+      <p:sp>
+        <p:nvSpPr>
+          <p:cNvPr id="3" name="Content Placeholder 2">
+            <a:extLst>
+              <a:ext uri="{FF2B5EF4-FFF2-40B4-BE49-F238E27FC236}">
+                <a16:creationId xmlns:a16="http://schemas.microsoft.com/office/drawing/2014/main" id="{641A0D54-5C98-4041-AFD2-F61EFEB66874}"/>
+              </a:ext>
+            </a:extLst>
+          </p:cNvPr>
+          <p:cNvSpPr>
+            <a:spLocks noGrp="1"/>
+          </p:cNvSpPr>
+          <p:nvPr>
+            <p:ph idx="1"/>
+          </p:nvPr>
+        </p:nvSpPr>
+        <p:spPr/>
+        <p:txBody>
+          <a:bodyPr>
+            <a:normAutofit fontScale="77500" lnSpcReduction="20000"/>
+          </a:bodyPr>
+          <a:lstStyle/>
+          <a:p>
+            <a:r>
+              <a:rPr lang="en-US" dirty="0" err="1"/>
+              <a:t>Dupicated</a:t>
+            </a:r>
+            <a:r>
+              <a:rPr lang="en-US" dirty="0"/>
+              <a:t> Code(</a:t>
+            </a:r>
+            <a:r>
+              <a:rPr lang="zh-CN" altLang="en-US" dirty="0"/>
+              <a:t>重复代码</a:t>
+            </a:r>
+            <a:r>
+              <a:rPr lang="en-US" altLang="zh-CN" dirty="0"/>
+              <a:t>)</a:t>
+            </a:r>
+          </a:p>
+          <a:p>
+            <a:r>
+              <a:rPr lang="en-US" altLang="zh-CN" dirty="0"/>
+              <a:t>Long Method</a:t>
+            </a:r>
+            <a:r>
+              <a:rPr lang="zh-CN" altLang="en-US" dirty="0"/>
+              <a:t>（过长函数）</a:t>
+            </a:r>
+          </a:p>
+          <a:p>
+            <a:r>
+              <a:rPr lang="en-US" altLang="zh-CN" dirty="0"/>
+              <a:t>Large Class</a:t>
+            </a:r>
+            <a:r>
+              <a:rPr lang="zh-CN" altLang="en-US" dirty="0"/>
+              <a:t>（过大的类）</a:t>
+            </a:r>
+          </a:p>
+          <a:p>
+            <a:r>
+              <a:rPr lang="en-US" altLang="zh-CN" dirty="0"/>
+              <a:t>Long </a:t>
+            </a:r>
+            <a:r>
+              <a:rPr lang="en-US" altLang="zh-CN" dirty="0" err="1"/>
+              <a:t>Parmeter</a:t>
+            </a:r>
+            <a:r>
+              <a:rPr lang="en-US" altLang="zh-CN" dirty="0"/>
+              <a:t> List</a:t>
+            </a:r>
+            <a:r>
+              <a:rPr lang="zh-CN" altLang="en-US" dirty="0"/>
+              <a:t>（过长参数列）</a:t>
+            </a:r>
+          </a:p>
+          <a:p>
+            <a:r>
+              <a:rPr lang="en-US" altLang="zh-CN" dirty="0"/>
+              <a:t>Divergent Change</a:t>
+            </a:r>
+            <a:r>
+              <a:rPr lang="zh-CN" altLang="en-US" dirty="0"/>
+              <a:t>（发散式变化）：一个类受多种变化的影响</a:t>
+            </a:r>
+          </a:p>
+          <a:p>
+            <a:r>
+              <a:rPr lang="en-US" altLang="zh-CN" dirty="0"/>
+              <a:t>Shotgun Surgery</a:t>
+            </a:r>
+            <a:r>
+              <a:rPr lang="zh-CN" altLang="en-US" dirty="0"/>
+              <a:t>（霰弹式修改）：一种变化引发多个类相应修改</a:t>
+            </a:r>
+          </a:p>
+          <a:p>
+            <a:r>
+              <a:rPr lang="en-US" altLang="zh-CN" dirty="0"/>
+              <a:t>Feature Envy(</a:t>
+            </a:r>
+            <a:r>
+              <a:rPr lang="zh-CN" altLang="en-US" dirty="0"/>
+              <a:t>依恋情结</a:t>
+            </a:r>
+            <a:r>
+              <a:rPr lang="en-US" altLang="zh-CN" dirty="0"/>
+              <a:t>)</a:t>
+            </a:r>
+          </a:p>
+          <a:p>
+            <a:r>
+              <a:rPr lang="en-US" altLang="zh-CN" dirty="0"/>
+              <a:t>Data Clumps(</a:t>
+            </a:r>
+            <a:r>
+              <a:rPr lang="zh-CN" altLang="en-US" dirty="0"/>
+              <a:t>数据泥团</a:t>
+            </a:r>
+            <a:r>
+              <a:rPr lang="en-US" altLang="zh-CN" dirty="0"/>
+              <a:t>)</a:t>
+            </a:r>
+          </a:p>
+          <a:p>
+            <a:r>
+              <a:rPr lang="en-US" altLang="zh-CN" dirty="0"/>
+              <a:t>Primitive </a:t>
+            </a:r>
+            <a:r>
+              <a:rPr lang="en-US" altLang="zh-CN" dirty="0" err="1"/>
+              <a:t>Obssession</a:t>
+            </a:r>
+            <a:r>
+              <a:rPr lang="zh-CN" altLang="en-US" dirty="0"/>
+              <a:t>（基本类型偏执）</a:t>
+            </a:r>
+          </a:p>
+          <a:p>
+            <a:r>
+              <a:rPr lang="en-US" altLang="zh-CN" dirty="0"/>
+              <a:t>Switch Statements</a:t>
+            </a:r>
+            <a:r>
+              <a:rPr lang="zh-CN" altLang="en-US" dirty="0"/>
+              <a:t>（</a:t>
+            </a:r>
+            <a:r>
+              <a:rPr lang="en-US" altLang="zh-CN" dirty="0"/>
+              <a:t>Switch </a:t>
+            </a:r>
+            <a:r>
+              <a:rPr lang="zh-CN" altLang="en-US" dirty="0"/>
+              <a:t>惊悚现身）</a:t>
+            </a:r>
+          </a:p>
+          <a:p>
+            <a:r>
+              <a:rPr lang="en-US" altLang="zh-CN" dirty="0"/>
+              <a:t>Parallel Inheritance Hierarchies</a:t>
+            </a:r>
+            <a:r>
+              <a:rPr lang="zh-CN" altLang="en-US" dirty="0"/>
+              <a:t>（平行继承体系）</a:t>
+            </a:r>
+          </a:p>
+          <a:p>
+            <a:r>
+              <a:rPr lang="en-US" altLang="zh-CN" dirty="0"/>
+              <a:t>Lazy Class</a:t>
+            </a:r>
+            <a:r>
+              <a:rPr lang="zh-CN" altLang="en-US" dirty="0"/>
+              <a:t>（冗赘类）</a:t>
+            </a:r>
+            <a:endParaRPr lang="en-US" altLang="zh-CN" dirty="0"/>
+          </a:p>
+        </p:txBody>
+      </p:sp>
+    </p:spTree>
+    <p:extLst>
+      <p:ext uri="{BB962C8B-B14F-4D97-AF65-F5344CB8AC3E}">
+        <p14:creationId xmlns:p14="http://schemas.microsoft.com/office/powerpoint/2010/main" val="1452360220"/>
+      </p:ext>
+    </p:extLst>
+  </p:cSld>
+  <p:clrMapOvr>
+    <a:masterClrMapping/>
+  </p:clrMapOvr>
+</p:sld>
+</file>
+
+<file path=ppt/slides/slide11.xml><?xml version="1.0" encoding="utf-8"?>
+<p:sld xmlns:a="http://schemas.openxmlformats.org/drawingml/2006/main" xmlns:r="http://schemas.openxmlformats.org/officeDocument/2006/relationships" xmlns:p="http://schemas.openxmlformats.org/presentationml/2006/main">
+  <p:cSld>
+    <p:spTree>
+      <p:nvGrpSpPr>
+        <p:cNvPr id="1" name=""/>
+        <p:cNvGrpSpPr/>
+        <p:nvPr/>
+      </p:nvGrpSpPr>
+      <p:grpSpPr>
+        <a:xfrm>
+          <a:off x="0" y="0"/>
+          <a:ext cx="0" cy="0"/>
+          <a:chOff x="0" y="0"/>
+          <a:chExt cx="0" cy="0"/>
+        </a:xfrm>
+      </p:grpSpPr>
+      <p:sp>
+        <p:nvSpPr>
+          <p:cNvPr id="2" name="Title 1">
+            <a:extLst>
+              <a:ext uri="{FF2B5EF4-FFF2-40B4-BE49-F238E27FC236}">
+                <a16:creationId xmlns:a16="http://schemas.microsoft.com/office/drawing/2014/main" id="{148FEFDC-EB2B-794A-959D-929CF1456472}"/>
+              </a:ext>
+            </a:extLst>
+          </p:cNvPr>
+          <p:cNvSpPr>
+            <a:spLocks noGrp="1"/>
+          </p:cNvSpPr>
+          <p:nvPr>
+            <p:ph type="title"/>
+          </p:nvPr>
+        </p:nvSpPr>
+        <p:spPr/>
+        <p:txBody>
+          <a:bodyPr/>
+          <a:lstStyle/>
+          <a:p>
+            <a:r>
+              <a:rPr lang="zh-CN" altLang="en-US" b="1" dirty="0"/>
+              <a:t>哪些迹象表明何时必须重构 </a:t>
+            </a:r>
+            <a:r>
+              <a:rPr lang="en-US" altLang="zh-CN" b="1" dirty="0"/>
+              <a:t>–</a:t>
+            </a:r>
+            <a:r>
+              <a:rPr lang="zh-CN" altLang="en-US" b="1" dirty="0"/>
+              <a:t> </a:t>
+            </a:r>
+            <a:r>
+              <a:rPr lang="en-US" altLang="zh-CN" b="1" dirty="0"/>
+              <a:t>22/22</a:t>
+            </a:r>
+            <a:endParaRPr lang="en-CN" dirty="0"/>
+          </a:p>
+        </p:txBody>
+      </p:sp>
+      <p:sp>
+        <p:nvSpPr>
+          <p:cNvPr id="3" name="Content Placeholder 2">
+            <a:extLst>
+              <a:ext uri="{FF2B5EF4-FFF2-40B4-BE49-F238E27FC236}">
+                <a16:creationId xmlns:a16="http://schemas.microsoft.com/office/drawing/2014/main" id="{FB0BC6C5-0462-7344-9A14-EB80CF0A5CFB}"/>
+              </a:ext>
+            </a:extLst>
+          </p:cNvPr>
+          <p:cNvSpPr>
+            <a:spLocks noGrp="1"/>
+          </p:cNvSpPr>
+          <p:nvPr>
+            <p:ph idx="1"/>
+          </p:nvPr>
+        </p:nvSpPr>
+        <p:spPr/>
+        <p:txBody>
+          <a:bodyPr>
+            <a:normAutofit fontScale="92500" lnSpcReduction="20000"/>
+          </a:bodyPr>
+          <a:lstStyle/>
+          <a:p>
+            <a:r>
+              <a:rPr lang="en-US" dirty="0"/>
+              <a:t>Speculative Generality（</a:t>
+            </a:r>
+            <a:r>
+              <a:rPr lang="zh-CN" altLang="en-US" dirty="0"/>
+              <a:t>夸夸其谈未来性）</a:t>
+            </a:r>
+          </a:p>
+          <a:p>
+            <a:r>
+              <a:rPr lang="en-US" dirty="0"/>
+              <a:t>Temporary Field（</a:t>
+            </a:r>
+            <a:r>
+              <a:rPr lang="zh-CN" altLang="en-US" dirty="0"/>
+              <a:t>令人迷惑的暂时字段）</a:t>
+            </a:r>
+          </a:p>
+          <a:p>
+            <a:r>
+              <a:rPr lang="en-US" dirty="0"/>
+              <a:t>Message Chains（</a:t>
+            </a:r>
+            <a:r>
+              <a:rPr lang="zh-CN" altLang="en-US" dirty="0"/>
+              <a:t>过度耦合的消息链）</a:t>
+            </a:r>
+          </a:p>
+          <a:p>
+            <a:r>
+              <a:rPr lang="en-US" dirty="0"/>
+              <a:t>Middle Man（</a:t>
+            </a:r>
+            <a:r>
+              <a:rPr lang="zh-CN" altLang="en-US" dirty="0"/>
+              <a:t>中间人）</a:t>
+            </a:r>
+            <a:endParaRPr lang="en-US" altLang="zh-CN" dirty="0"/>
+          </a:p>
+          <a:p>
+            <a:r>
+              <a:rPr lang="en-US" altLang="zh-CN" dirty="0"/>
+              <a:t>Inappropriate Intimacy</a:t>
+            </a:r>
+            <a:r>
+              <a:rPr lang="zh-CN" altLang="en-US" dirty="0"/>
+              <a:t>（狎昵关系）</a:t>
+            </a:r>
+          </a:p>
+          <a:p>
+            <a:r>
+              <a:rPr lang="en-US" altLang="zh-CN" dirty="0"/>
+              <a:t>Alternate Classes with Different Interfaces</a:t>
+            </a:r>
+            <a:r>
+              <a:rPr lang="zh-CN" altLang="en-US" dirty="0"/>
+              <a:t>（异曲同工的类</a:t>
+            </a:r>
+            <a:r>
+              <a:rPr lang="en-US" altLang="zh-CN" dirty="0"/>
+              <a:t>)</a:t>
+            </a:r>
+          </a:p>
+          <a:p>
+            <a:r>
+              <a:rPr lang="en-US" altLang="zh-CN" dirty="0"/>
+              <a:t>Incomplete Library Class</a:t>
+            </a:r>
+            <a:r>
+              <a:rPr lang="zh-CN" altLang="en-US" dirty="0"/>
+              <a:t>（不完美的库类</a:t>
+            </a:r>
+            <a:r>
+              <a:rPr lang="en-US" altLang="zh-CN" dirty="0"/>
+              <a:t>)</a:t>
+            </a:r>
+          </a:p>
+          <a:p>
+            <a:r>
+              <a:rPr lang="en-US" altLang="zh-CN" dirty="0"/>
+              <a:t>Data Class</a:t>
+            </a:r>
+            <a:r>
+              <a:rPr lang="zh-CN" altLang="en-US" dirty="0"/>
+              <a:t>（纯雅的数据类）</a:t>
+            </a:r>
+          </a:p>
+          <a:p>
+            <a:r>
+              <a:rPr lang="en-US" altLang="zh-CN" dirty="0"/>
+              <a:t>Refused Bequest</a:t>
+            </a:r>
+            <a:r>
+              <a:rPr lang="zh-CN" altLang="en-US" dirty="0"/>
+              <a:t>（被拒绝的馈赠）</a:t>
+            </a:r>
+            <a:endParaRPr lang="en-US" altLang="zh-CN" dirty="0"/>
+          </a:p>
+          <a:p>
+            <a:r>
+              <a:rPr lang="en-US" altLang="zh-CN" dirty="0"/>
+              <a:t>Comments</a:t>
+            </a:r>
+            <a:r>
+              <a:rPr lang="zh-CN" altLang="en-US" dirty="0"/>
+              <a:t>（过多的注释）</a:t>
+            </a:r>
+            <a:endParaRPr lang="en-US" altLang="zh-CN" dirty="0"/>
+          </a:p>
+          <a:p>
+            <a:endParaRPr lang="zh-CN" altLang="en-US" dirty="0"/>
+          </a:p>
+          <a:p>
+            <a:endParaRPr lang="en-CN" dirty="0"/>
+          </a:p>
+        </p:txBody>
+      </p:sp>
+    </p:spTree>
+    <p:extLst>
+      <p:ext uri="{BB962C8B-B14F-4D97-AF65-F5344CB8AC3E}">
+        <p14:creationId xmlns:p14="http://schemas.microsoft.com/office/powerpoint/2010/main" val="4010781902"/>
+      </p:ext>
+    </p:extLst>
+  </p:cSld>
+  <p:clrMapOvr>
+    <a:masterClrMapping/>
+  </p:clrMapOvr>
+</p:sld>
+</file>
+
+<file path=ppt/slides/slide12.xml><?xml version="1.0" encoding="utf-8"?>
+<p:sld xmlns:a="http://schemas.openxmlformats.org/drawingml/2006/main" xmlns:r="http://schemas.openxmlformats.org/officeDocument/2006/relationships" xmlns:p="http://schemas.openxmlformats.org/presentationml/2006/main">
+  <p:cSld>
+    <p:spTree>
+      <p:nvGrpSpPr>
+        <p:cNvPr id="1" name=""/>
+        <p:cNvGrpSpPr/>
+        <p:nvPr/>
+      </p:nvGrpSpPr>
+      <p:grpSpPr>
+        <a:xfrm>
+          <a:off x="0" y="0"/>
+          <a:ext cx="0" cy="0"/>
+          <a:chOff x="0" y="0"/>
+          <a:chExt cx="0" cy="0"/>
+        </a:xfrm>
+      </p:grpSpPr>
+      <p:sp>
+        <p:nvSpPr>
+          <p:cNvPr id="2" name="Title 1">
+            <a:extLst>
+              <a:ext uri="{FF2B5EF4-FFF2-40B4-BE49-F238E27FC236}">
+                <a16:creationId xmlns:a16="http://schemas.microsoft.com/office/drawing/2014/main" id="{13DC53F3-43F6-5543-813C-6910213D37B6}"/>
+              </a:ext>
+            </a:extLst>
+          </p:cNvPr>
+          <p:cNvSpPr>
+            <a:spLocks noGrp="1"/>
+          </p:cNvSpPr>
+          <p:nvPr>
+            <p:ph type="title"/>
+          </p:nvPr>
+        </p:nvSpPr>
+        <p:spPr/>
+        <p:txBody>
+          <a:bodyPr/>
+          <a:lstStyle/>
+          <a:p>
+            <a:r>
+              <a:rPr lang="zh-CN" altLang="en-US" dirty="0"/>
+              <a:t>重构与性能</a:t>
+            </a:r>
+            <a:br>
+              <a:rPr lang="zh-CN" altLang="en-US" dirty="0"/>
+            </a:br>
+            <a:endParaRPr lang="en-CN" dirty="0"/>
+          </a:p>
+        </p:txBody>
+      </p:sp>
+      <p:sp>
+        <p:nvSpPr>
+          <p:cNvPr id="3" name="Content Placeholder 2">
+            <a:extLst>
+              <a:ext uri="{FF2B5EF4-FFF2-40B4-BE49-F238E27FC236}">
+                <a16:creationId xmlns:a16="http://schemas.microsoft.com/office/drawing/2014/main" id="{D0D488FD-8310-8D46-9217-B98FA6C52FFA}"/>
+              </a:ext>
+            </a:extLst>
+          </p:cNvPr>
+          <p:cNvSpPr>
+            <a:spLocks noGrp="1"/>
+          </p:cNvSpPr>
+          <p:nvPr>
+            <p:ph idx="1"/>
+          </p:nvPr>
+        </p:nvSpPr>
+        <p:spPr/>
+        <p:txBody>
+          <a:bodyPr>
+            <a:normAutofit fontScale="92500" lnSpcReduction="10000"/>
+          </a:bodyPr>
+          <a:lstStyle/>
+          <a:p>
+            <a:pPr marL="0" indent="0">
+              <a:lnSpc>
+                <a:spcPct val="70000"/>
+              </a:lnSpc>
+              <a:buNone/>
+            </a:pPr>
+            <a:endParaRPr lang="en-US" altLang="zh-CN" dirty="0"/>
+          </a:p>
+          <a:p>
+            <a:pPr>
+              <a:lnSpc>
+                <a:spcPct val="100000"/>
+              </a:lnSpc>
+            </a:pPr>
+            <a:r>
+              <a:rPr lang="en-CN" dirty="0">
+                <a:solidFill>
+                  <a:prstClr val="black"/>
+                </a:solidFill>
+              </a:rPr>
+              <a:t>多数重构提高性能</a:t>
+            </a:r>
+            <a:r>
+              <a:rPr lang="zh-CN" altLang="en-US" dirty="0">
+                <a:solidFill>
+                  <a:prstClr val="black"/>
+                </a:solidFill>
+              </a:rPr>
+              <a:t>，少数反而降低性能</a:t>
+            </a:r>
+            <a:endParaRPr lang="en-US" altLang="zh-CN" dirty="0">
+              <a:solidFill>
+                <a:prstClr val="black"/>
+              </a:solidFill>
+            </a:endParaRPr>
+          </a:p>
+          <a:p>
+            <a:pPr>
+              <a:lnSpc>
+                <a:spcPct val="100000"/>
+              </a:lnSpc>
+            </a:pPr>
+            <a:r>
+              <a:rPr lang="zh-CN" altLang="en-US" dirty="0">
+                <a:solidFill>
+                  <a:prstClr val="black"/>
+                </a:solidFill>
+              </a:rPr>
+              <a:t>重构能使得性能提高更容易</a:t>
+            </a:r>
+            <a:endParaRPr lang="en-CN" dirty="0">
+              <a:solidFill>
+                <a:prstClr val="black"/>
+              </a:solidFill>
+            </a:endParaRPr>
+          </a:p>
+          <a:p>
+            <a:pPr>
+              <a:lnSpc>
+                <a:spcPct val="100000"/>
+              </a:lnSpc>
+            </a:pPr>
+            <a:r>
+              <a:rPr lang="en-CN" dirty="0">
+                <a:solidFill>
+                  <a:prstClr val="black"/>
+                </a:solidFill>
+              </a:rPr>
+              <a:t>二八原则</a:t>
+            </a:r>
+          </a:p>
+          <a:p>
+            <a:pPr>
+              <a:lnSpc>
+                <a:spcPct val="100000"/>
+              </a:lnSpc>
+            </a:pPr>
+            <a:r>
+              <a:rPr lang="zh-CN" altLang="en-US" dirty="0">
+                <a:solidFill>
+                  <a:prstClr val="black"/>
+                </a:solidFill>
+              </a:rPr>
+              <a:t>集中测试</a:t>
+            </a:r>
+            <a:endParaRPr lang="en-US" altLang="zh-CN" dirty="0">
+              <a:solidFill>
+                <a:prstClr val="black"/>
+              </a:solidFill>
+            </a:endParaRPr>
+          </a:p>
+          <a:p>
+            <a:pPr>
+              <a:lnSpc>
+                <a:spcPct val="100000"/>
+              </a:lnSpc>
+            </a:pPr>
+            <a:r>
+              <a:rPr lang="zh-CN" altLang="en-CN" dirty="0">
+                <a:solidFill>
+                  <a:prstClr val="black"/>
+                </a:solidFill>
+              </a:rPr>
+              <a:t>测量</a:t>
+            </a:r>
+            <a:r>
+              <a:rPr lang="zh-CN" altLang="en-US" dirty="0">
+                <a:solidFill>
+                  <a:prstClr val="black"/>
+                </a:solidFill>
+              </a:rPr>
+              <a:t>工具</a:t>
+            </a:r>
+            <a:endParaRPr lang="en-US" altLang="zh-CN" dirty="0">
+              <a:solidFill>
+                <a:prstClr val="black"/>
+              </a:solidFill>
+            </a:endParaRPr>
+          </a:p>
+          <a:p>
+            <a:pPr>
+              <a:lnSpc>
+                <a:spcPct val="100000"/>
+              </a:lnSpc>
+            </a:pPr>
+            <a:r>
+              <a:rPr lang="zh-CN" altLang="en-US" dirty="0">
+                <a:solidFill>
+                  <a:prstClr val="black"/>
+                </a:solidFill>
+              </a:rPr>
+              <a:t>小幅度修改。每走一步，都需要编译、测试、再次度量。如果没有提高性能，应该撤销此次修改</a:t>
+            </a:r>
+            <a:endParaRPr lang="en-US" altLang="zh-CN" dirty="0">
+              <a:solidFill>
+                <a:prstClr val="black"/>
+              </a:solidFill>
+            </a:endParaRPr>
+          </a:p>
+          <a:p>
+            <a:pPr>
+              <a:lnSpc>
+                <a:spcPct val="100000"/>
+              </a:lnSpc>
+            </a:pPr>
+            <a:r>
+              <a:rPr lang="zh-CN" altLang="en-US" dirty="0">
+                <a:solidFill>
+                  <a:prstClr val="black"/>
+                </a:solidFill>
+              </a:rPr>
+              <a:t>持续提高</a:t>
+            </a:r>
+            <a:endParaRPr lang="en-US" altLang="zh-CN" dirty="0">
+              <a:solidFill>
+                <a:prstClr val="black"/>
+              </a:solidFill>
+            </a:endParaRPr>
+          </a:p>
+        </p:txBody>
+      </p:sp>
+    </p:spTree>
+    <p:extLst>
+      <p:ext uri="{BB962C8B-B14F-4D97-AF65-F5344CB8AC3E}">
+        <p14:creationId xmlns:p14="http://schemas.microsoft.com/office/powerpoint/2010/main" val="3459578394"/>
+      </p:ext>
+    </p:extLst>
+  </p:cSld>
+  <p:clrMapOvr>
+    <a:masterClrMapping/>
+  </p:clrMapOvr>
+</p:sld>
+</file>
+
+<file path=ppt/slides/slide13.xml><?xml version="1.0" encoding="utf-8"?>
+<p:sld xmlns:a="http://schemas.openxmlformats.org/drawingml/2006/main" xmlns:r="http://schemas.openxmlformats.org/officeDocument/2006/relationships" xmlns:p="http://schemas.openxmlformats.org/presentationml/2006/main">
+  <p:cSld>
+    <p:spTree>
+      <p:nvGrpSpPr>
+        <p:cNvPr id="1" name=""/>
+        <p:cNvGrpSpPr/>
+        <p:nvPr/>
+      </p:nvGrpSpPr>
+      <p:grpSpPr>
+        <a:xfrm>
+          <a:off x="0" y="0"/>
+          <a:ext cx="0" cy="0"/>
+          <a:chOff x="0" y="0"/>
+          <a:chExt cx="0" cy="0"/>
+        </a:xfrm>
+      </p:grpSpPr>
+      <p:sp>
+        <p:nvSpPr>
+          <p:cNvPr id="2" name="Title 1">
+            <a:extLst>
+              <a:ext uri="{FF2B5EF4-FFF2-40B4-BE49-F238E27FC236}">
+                <a16:creationId xmlns:a16="http://schemas.microsoft.com/office/drawing/2014/main" id="{313F1D7C-6BE7-7B40-9C87-94689DE3B2A8}"/>
+              </a:ext>
+            </a:extLst>
+          </p:cNvPr>
+          <p:cNvSpPr>
+            <a:spLocks noGrp="1"/>
+          </p:cNvSpPr>
+          <p:nvPr>
+            <p:ph type="title"/>
+          </p:nvPr>
+        </p:nvSpPr>
+        <p:spPr/>
+        <p:txBody>
+          <a:bodyPr/>
+          <a:lstStyle/>
+          <a:p>
+            <a:r>
+              <a:rPr lang="zh-CN" altLang="en-US" dirty="0"/>
+              <a:t>重构准备</a:t>
+            </a:r>
+            <a:endParaRPr lang="en-CN" dirty="0"/>
+          </a:p>
+        </p:txBody>
+      </p:sp>
+      <p:sp>
+        <p:nvSpPr>
+          <p:cNvPr id="3" name="Content Placeholder 2">
+            <a:extLst>
+              <a:ext uri="{FF2B5EF4-FFF2-40B4-BE49-F238E27FC236}">
+                <a16:creationId xmlns:a16="http://schemas.microsoft.com/office/drawing/2014/main" id="{9876854F-C029-014C-A678-115DAF583AC8}"/>
+              </a:ext>
+            </a:extLst>
+          </p:cNvPr>
+          <p:cNvSpPr>
+            <a:spLocks noGrp="1"/>
+          </p:cNvSpPr>
+          <p:nvPr>
+            <p:ph idx="1"/>
+          </p:nvPr>
+        </p:nvSpPr>
+        <p:spPr/>
+        <p:txBody>
+          <a:bodyPr>
+            <a:normAutofit fontScale="62500" lnSpcReduction="20000"/>
+          </a:bodyPr>
+          <a:lstStyle/>
+          <a:p>
+            <a:endParaRPr lang="zh-CN" altLang="en-US" dirty="0"/>
+          </a:p>
+          <a:p>
+            <a:r>
+              <a:rPr lang="zh-CN" altLang="en-US" dirty="0"/>
+              <a:t>重构之前，先有测试代码：自检能力 </a:t>
+            </a:r>
+            <a:r>
+              <a:rPr lang="en-US" altLang="zh-CN" dirty="0"/>
+              <a:t>/ </a:t>
+            </a:r>
+            <a:r>
+              <a:rPr lang="zh-CN" altLang="en-US" dirty="0"/>
+              <a:t>自测试</a:t>
+            </a:r>
+          </a:p>
+          <a:p>
+            <a:pPr marL="0" indent="0">
+              <a:buNone/>
+            </a:pPr>
+            <a:r>
+              <a:rPr lang="en-US" altLang="zh-CN" dirty="0"/>
+              <a:t>	</a:t>
+            </a:r>
+            <a:r>
+              <a:rPr lang="zh-CN" altLang="en-US" dirty="0"/>
+              <a:t>✔ 单元测试 </a:t>
+            </a:r>
+            <a:r>
+              <a:rPr lang="en-US" altLang="zh-CN" dirty="0"/>
+              <a:t>: </a:t>
+            </a:r>
+            <a:r>
+              <a:rPr lang="en-US" dirty="0"/>
+              <a:t>Junit ; </a:t>
+            </a:r>
+            <a:r>
+              <a:rPr lang="zh-CN" altLang="en-US" dirty="0"/>
+              <a:t>捕捉失败</a:t>
+            </a:r>
+            <a:r>
+              <a:rPr lang="en-US" altLang="zh-CN" dirty="0"/>
+              <a:t>(</a:t>
+            </a:r>
+            <a:r>
+              <a:rPr lang="en-US" dirty="0"/>
+              <a:t>false)/ </a:t>
+            </a:r>
+            <a:r>
+              <a:rPr lang="zh-CN" altLang="en-US" dirty="0"/>
+              <a:t>异常</a:t>
+            </a:r>
+            <a:r>
+              <a:rPr lang="en-US" altLang="zh-CN" dirty="0"/>
+              <a:t>(</a:t>
+            </a:r>
+            <a:r>
+              <a:rPr lang="en-US" dirty="0"/>
+              <a:t>exception)</a:t>
+            </a:r>
+          </a:p>
+          <a:p>
+            <a:pPr marL="0" indent="0">
+              <a:buNone/>
+            </a:pPr>
+            <a:r>
+              <a:rPr lang="en-US" dirty="0"/>
+              <a:t>	✗ </a:t>
+            </a:r>
+            <a:r>
+              <a:rPr lang="zh-CN" altLang="en-US" dirty="0"/>
+              <a:t>功能测试：质量</a:t>
+            </a:r>
+          </a:p>
+          <a:p>
+            <a:pPr marL="0" indent="0">
+              <a:buNone/>
+            </a:pPr>
+            <a:r>
+              <a:rPr lang="en-US" dirty="0"/>
+              <a:t>	Not all public </a:t>
+            </a:r>
+            <a:r>
+              <a:rPr lang="zh-CN" altLang="en-US" dirty="0"/>
+              <a:t>函数 </a:t>
+            </a:r>
+          </a:p>
+          <a:p>
+            <a:pPr marL="0" indent="0">
+              <a:buNone/>
+            </a:pPr>
+            <a:r>
+              <a:rPr lang="en-US" altLang="zh-CN" dirty="0"/>
+              <a:t>	</a:t>
+            </a:r>
+            <a:r>
+              <a:rPr lang="zh-CN" altLang="en-US" dirty="0"/>
+              <a:t> 边界条件 </a:t>
+            </a:r>
+            <a:r>
+              <a:rPr lang="en-US" altLang="zh-CN" dirty="0"/>
+              <a:t>/</a:t>
+            </a:r>
+          </a:p>
+          <a:p>
+            <a:pPr marL="0" indent="0">
+              <a:buNone/>
+            </a:pPr>
+            <a:r>
+              <a:rPr lang="en-US" altLang="zh-CN" dirty="0"/>
+              <a:t>	</a:t>
+            </a:r>
+            <a:r>
+              <a:rPr lang="zh-CN" altLang="en-US" dirty="0"/>
+              <a:t>最容易出错</a:t>
+            </a:r>
+            <a:r>
+              <a:rPr lang="en-US" altLang="zh-CN" dirty="0"/>
+              <a:t>/ </a:t>
+            </a:r>
+            <a:r>
+              <a:rPr lang="zh-CN" altLang="en-US" dirty="0"/>
+              <a:t>最常见</a:t>
+            </a:r>
+            <a:r>
+              <a:rPr lang="en-US" altLang="zh-CN" dirty="0"/>
+              <a:t>/</a:t>
+            </a:r>
+            <a:r>
+              <a:rPr lang="zh-CN" altLang="en-US" dirty="0"/>
+              <a:t>常见情况</a:t>
+            </a:r>
+          </a:p>
+          <a:p>
+            <a:pPr marL="0" indent="0">
+              <a:buNone/>
+            </a:pPr>
+            <a:r>
+              <a:rPr lang="en-US" altLang="zh-CN" dirty="0"/>
+              <a:t>	</a:t>
+            </a:r>
+            <a:r>
+              <a:rPr lang="zh-CN" altLang="en-US" dirty="0"/>
+              <a:t>如果没有</a:t>
+            </a:r>
+            <a:r>
+              <a:rPr lang="en-US" dirty="0"/>
+              <a:t>Unit Test，</a:t>
+            </a:r>
+            <a:r>
+              <a:rPr lang="zh-CN" altLang="en-US" dirty="0"/>
+              <a:t>用测试用例</a:t>
+            </a:r>
+            <a:r>
+              <a:rPr lang="en-US" altLang="zh-CN" dirty="0"/>
+              <a:t>+</a:t>
+            </a:r>
+            <a:r>
+              <a:rPr lang="zh-CN" altLang="en-US" dirty="0"/>
+              <a:t>应用场景：</a:t>
+            </a:r>
+            <a:r>
+              <a:rPr lang="en-US" dirty="0"/>
+              <a:t>all case</a:t>
+            </a:r>
+          </a:p>
+          <a:p>
+            <a:pPr marL="0" indent="0">
+              <a:buNone/>
+            </a:pPr>
+            <a:r>
+              <a:rPr lang="en-US" dirty="0"/>
+              <a:t> </a:t>
+            </a:r>
+          </a:p>
+          <a:p>
+            <a:r>
+              <a:rPr lang="en-US" dirty="0"/>
+              <a:t>Diff tool</a:t>
+            </a:r>
+          </a:p>
+          <a:p>
+            <a:pPr marL="0" indent="0">
+              <a:buNone/>
+            </a:pPr>
+            <a:r>
+              <a:rPr lang="en-US" dirty="0"/>
+              <a:t>	Beyond Compare, IDE</a:t>
+            </a:r>
+          </a:p>
+          <a:p>
+            <a:r>
+              <a:rPr lang="en-US" dirty="0"/>
+              <a:t>Branch</a:t>
+            </a:r>
+          </a:p>
+          <a:p>
+            <a:pPr marL="0" indent="0">
+              <a:buNone/>
+            </a:pPr>
+            <a:r>
+              <a:rPr lang="en-US" dirty="0"/>
+              <a:t>	</a:t>
+            </a:r>
+            <a:r>
+              <a:rPr lang="en-US" dirty="0" err="1"/>
+              <a:t>refactor_current</a:t>
+            </a:r>
+            <a:r>
+              <a:rPr lang="en-US" dirty="0"/>
+              <a:t> / </a:t>
+            </a:r>
+            <a:r>
+              <a:rPr lang="en-US" dirty="0" err="1"/>
+              <a:t>refactor_master</a:t>
+            </a:r>
+            <a:r>
+              <a:rPr lang="en-US" dirty="0"/>
+              <a:t> / feature</a:t>
+            </a:r>
+          </a:p>
+          <a:p>
+            <a:endParaRPr lang="en-US" dirty="0"/>
+          </a:p>
+          <a:p>
+            <a:endParaRPr lang="en-US" dirty="0"/>
+          </a:p>
+          <a:p>
+            <a:endParaRPr lang="en-CN" dirty="0"/>
+          </a:p>
+        </p:txBody>
+      </p:sp>
+    </p:spTree>
+    <p:extLst>
+      <p:ext uri="{BB962C8B-B14F-4D97-AF65-F5344CB8AC3E}">
+        <p14:creationId xmlns:p14="http://schemas.microsoft.com/office/powerpoint/2010/main" val="475951304"/>
+      </p:ext>
+    </p:extLst>
+  </p:cSld>
+  <p:clrMapOvr>
+    <a:masterClrMapping/>
+  </p:clrMapOvr>
+</p:sld>
+</file>
+
+<file path=ppt/slides/slide14.xml><?xml version="1.0" encoding="utf-8"?>
+<p:sld xmlns:a="http://schemas.openxmlformats.org/drawingml/2006/main" xmlns:r="http://schemas.openxmlformats.org/officeDocument/2006/relationships" xmlns:p="http://schemas.openxmlformats.org/presentationml/2006/main">
+  <p:cSld>
+    <p:spTree>
+      <p:nvGrpSpPr>
+        <p:cNvPr id="1" name=""/>
+        <p:cNvGrpSpPr/>
+        <p:nvPr/>
+      </p:nvGrpSpPr>
+      <p:grpSpPr>
+        <a:xfrm>
+          <a:off x="0" y="0"/>
+          <a:ext cx="0" cy="0"/>
+          <a:chOff x="0" y="0"/>
+          <a:chExt cx="0" cy="0"/>
+        </a:xfrm>
+      </p:grpSpPr>
+      <p:sp>
+        <p:nvSpPr>
+          <p:cNvPr id="2" name="Title 1">
+            <a:extLst>
+              <a:ext uri="{FF2B5EF4-FFF2-40B4-BE49-F238E27FC236}">
+                <a16:creationId xmlns:a16="http://schemas.microsoft.com/office/drawing/2014/main" id="{0A52C904-145F-1745-A9C5-A07EFCBDD4ED}"/>
+              </a:ext>
+            </a:extLst>
+          </p:cNvPr>
+          <p:cNvSpPr>
+            <a:spLocks noGrp="1"/>
+          </p:cNvSpPr>
+          <p:nvPr>
+            <p:ph type="title"/>
+          </p:nvPr>
+        </p:nvSpPr>
+        <p:spPr/>
+        <p:txBody>
+          <a:bodyPr/>
+          <a:lstStyle/>
+          <a:p>
+            <a:r>
+              <a:rPr lang="zh-CN" altLang="en-US" dirty="0"/>
+              <a:t>重构时</a:t>
+            </a:r>
+            <a:endParaRPr lang="en-CN" dirty="0"/>
+          </a:p>
+        </p:txBody>
+      </p:sp>
+      <p:sp>
+        <p:nvSpPr>
+          <p:cNvPr id="3" name="Content Placeholder 2">
+            <a:extLst>
+              <a:ext uri="{FF2B5EF4-FFF2-40B4-BE49-F238E27FC236}">
+                <a16:creationId xmlns:a16="http://schemas.microsoft.com/office/drawing/2014/main" id="{8E577437-25A1-554A-8656-E7825C0C6C7C}"/>
+              </a:ext>
+            </a:extLst>
+          </p:cNvPr>
+          <p:cNvSpPr>
+            <a:spLocks noGrp="1"/>
+          </p:cNvSpPr>
+          <p:nvPr>
+            <p:ph idx="1"/>
+          </p:nvPr>
+        </p:nvSpPr>
+        <p:spPr/>
+        <p:txBody>
+          <a:bodyPr/>
+          <a:lstStyle/>
+          <a:p>
+            <a:r>
+              <a:rPr lang="zh-CN" altLang="en-US" dirty="0"/>
+              <a:t>两顶帽子：添加新功能（修改），以及重构</a:t>
+            </a:r>
+          </a:p>
+          <a:p>
+            <a:pPr marL="0" indent="0">
+              <a:buNone/>
+            </a:pPr>
+            <a:r>
+              <a:rPr lang="zh-CN" altLang="en-US" dirty="0"/>
+              <a:t>软件开发过程中，经常变化帽子，但无论何时只能戴有一顶帽子。</a:t>
+            </a:r>
+            <a:endParaRPr lang="en-US" altLang="zh-CN" dirty="0"/>
+          </a:p>
+          <a:p>
+            <a:pPr marL="0" indent="0">
+              <a:buNone/>
+            </a:pPr>
+            <a:endParaRPr lang="zh-CN" altLang="en-US" dirty="0"/>
+          </a:p>
+          <a:p>
+            <a:r>
+              <a:rPr lang="zh-CN" altLang="en-US" dirty="0"/>
+              <a:t>小步前进、频繁测试</a:t>
+            </a:r>
+            <a:endParaRPr lang="en-CN" dirty="0"/>
+          </a:p>
+        </p:txBody>
+      </p:sp>
+    </p:spTree>
+    <p:extLst>
+      <p:ext uri="{BB962C8B-B14F-4D97-AF65-F5344CB8AC3E}">
+        <p14:creationId xmlns:p14="http://schemas.microsoft.com/office/powerpoint/2010/main" val="827538509"/>
+      </p:ext>
+    </p:extLst>
+  </p:cSld>
+  <p:clrMapOvr>
+    <a:masterClrMapping/>
+  </p:clrMapOvr>
+</p:sld>
+</file>
+
+<file path=ppt/slides/slide15.xml><?xml version="1.0" encoding="utf-8"?>
+<p:sld xmlns:a="http://schemas.openxmlformats.org/drawingml/2006/main" xmlns:r="http://schemas.openxmlformats.org/officeDocument/2006/relationships" xmlns:p="http://schemas.openxmlformats.org/presentationml/2006/main">
+  <p:cSld>
+    <p:spTree>
+      <p:nvGrpSpPr>
+        <p:cNvPr id="1" name=""/>
+        <p:cNvGrpSpPr/>
+        <p:nvPr/>
+      </p:nvGrpSpPr>
+      <p:grpSpPr>
+        <a:xfrm>
+          <a:off x="0" y="0"/>
+          <a:ext cx="0" cy="0"/>
+          <a:chOff x="0" y="0"/>
+          <a:chExt cx="0" cy="0"/>
+        </a:xfrm>
+      </p:grpSpPr>
+      <p:sp>
+        <p:nvSpPr>
+          <p:cNvPr id="2" name="Title 1">
+            <a:extLst>
+              <a:ext uri="{FF2B5EF4-FFF2-40B4-BE49-F238E27FC236}">
+                <a16:creationId xmlns:a16="http://schemas.microsoft.com/office/drawing/2014/main" id="{75A270D7-9825-D14B-898C-841509BD4F30}"/>
+              </a:ext>
+            </a:extLst>
+          </p:cNvPr>
+          <p:cNvSpPr>
+            <a:spLocks noGrp="1"/>
+          </p:cNvSpPr>
+          <p:nvPr>
+            <p:ph type="title"/>
+          </p:nvPr>
+        </p:nvSpPr>
+        <p:spPr/>
+        <p:txBody>
+          <a:bodyPr/>
+          <a:lstStyle/>
+          <a:p>
+            <a:r>
+              <a:rPr lang="en-US" dirty="0"/>
+              <a:t>Problem in  refactoring</a:t>
+            </a:r>
+            <a:endParaRPr lang="en-CN" dirty="0"/>
+          </a:p>
+        </p:txBody>
+      </p:sp>
+      <p:sp>
+        <p:nvSpPr>
+          <p:cNvPr id="3" name="Content Placeholder 2">
+            <a:extLst>
+              <a:ext uri="{FF2B5EF4-FFF2-40B4-BE49-F238E27FC236}">
+                <a16:creationId xmlns:a16="http://schemas.microsoft.com/office/drawing/2014/main" id="{BD1DED41-D96A-8E44-8967-AB5C7C6A6728}"/>
+              </a:ext>
+            </a:extLst>
+          </p:cNvPr>
+          <p:cNvSpPr>
+            <a:spLocks noGrp="1"/>
+          </p:cNvSpPr>
+          <p:nvPr>
+            <p:ph idx="1"/>
+          </p:nvPr>
+        </p:nvSpPr>
+        <p:spPr/>
+        <p:txBody>
+          <a:bodyPr>
+            <a:normAutofit fontScale="92500" lnSpcReduction="20000"/>
+          </a:bodyPr>
+          <a:lstStyle/>
+          <a:p>
+            <a:endParaRPr lang="en-US" dirty="0"/>
+          </a:p>
+          <a:p>
+            <a:r>
+              <a:rPr lang="zh-CN" altLang="en-US" dirty="0"/>
+              <a:t>数据库</a:t>
+            </a:r>
+          </a:p>
+          <a:p>
+            <a:r>
+              <a:rPr lang="zh-CN" altLang="en-US" dirty="0"/>
+              <a:t>接口 </a:t>
+            </a:r>
+            <a:r>
+              <a:rPr lang="en-US" altLang="zh-CN" dirty="0"/>
+              <a:t>: </a:t>
+            </a:r>
+            <a:r>
+              <a:rPr lang="en-US" dirty="0"/>
+              <a:t>public / </a:t>
+            </a:r>
+            <a:r>
+              <a:rPr lang="en-US" dirty="0" err="1"/>
+              <a:t>pushlished</a:t>
+            </a:r>
+            <a:r>
+              <a:rPr lang="en-US" dirty="0"/>
+              <a:t> interface</a:t>
+            </a:r>
+          </a:p>
+          <a:p>
+            <a:r>
+              <a:rPr lang="zh-CN" altLang="en-US" dirty="0"/>
+              <a:t>难以通过重构手法完成的设计改动</a:t>
+            </a:r>
+          </a:p>
+          <a:p>
+            <a:r>
+              <a:rPr lang="zh-CN" altLang="en-US" dirty="0">
+                <a:solidFill>
+                  <a:srgbClr val="FF0000"/>
+                </a:solidFill>
+              </a:rPr>
+              <a:t>本书中重构手法的前提：“单进程软件”，并不适合并发和分布式程序设计。</a:t>
+            </a:r>
+          </a:p>
+          <a:p>
+            <a:pPr marL="0" indent="0">
+              <a:buNone/>
+            </a:pPr>
+            <a:r>
+              <a:rPr lang="en-US" altLang="zh-CN" dirty="0">
+                <a:solidFill>
+                  <a:srgbClr val="FF0000"/>
+                </a:solidFill>
+              </a:rPr>
+              <a:t>   </a:t>
+            </a:r>
+            <a:r>
+              <a:rPr lang="zh-CN" altLang="en-US" dirty="0">
+                <a:solidFill>
+                  <a:srgbClr val="FF0000"/>
+                </a:solidFill>
+              </a:rPr>
+              <a:t>并发和分布式程序设计，有着完全不同的重构技术。</a:t>
+            </a:r>
+          </a:p>
+          <a:p>
+            <a:endParaRPr lang="zh-CN" altLang="en-US" dirty="0"/>
+          </a:p>
+          <a:p>
+            <a:r>
+              <a:rPr lang="zh-CN" altLang="en-US" dirty="0"/>
+              <a:t>寻找引用点</a:t>
+            </a:r>
+          </a:p>
+          <a:p>
+            <a:pPr marL="0" indent="0">
+              <a:buNone/>
+            </a:pPr>
+            <a:r>
+              <a:rPr lang="en-US" altLang="zh-CN" dirty="0"/>
+              <a:t>  </a:t>
+            </a:r>
+            <a:r>
+              <a:rPr lang="zh-CN" altLang="en-US" dirty="0"/>
+              <a:t>替换 ： 手动 </a:t>
+            </a:r>
+            <a:r>
+              <a:rPr lang="en-US" altLang="zh-CN" dirty="0"/>
+              <a:t>/ </a:t>
+            </a:r>
+            <a:r>
+              <a:rPr lang="en-US" dirty="0"/>
+              <a:t>Diff tool </a:t>
+            </a:r>
+          </a:p>
+          <a:p>
+            <a:pPr marL="0" indent="0">
+              <a:buNone/>
+            </a:pPr>
+            <a:r>
+              <a:rPr lang="en-US" altLang="zh-CN" dirty="0"/>
+              <a:t>  </a:t>
+            </a:r>
+            <a:r>
+              <a:rPr lang="zh-CN" altLang="en-US" dirty="0"/>
+              <a:t>查找 ： 反射</a:t>
+            </a:r>
+          </a:p>
+          <a:p>
+            <a:endParaRPr lang="zh-CN" altLang="en-US" dirty="0"/>
+          </a:p>
+          <a:p>
+            <a:endParaRPr lang="zh-CN" altLang="en-US" dirty="0"/>
+          </a:p>
+          <a:p>
+            <a:endParaRPr lang="en-CN" dirty="0"/>
+          </a:p>
+        </p:txBody>
+      </p:sp>
+    </p:spTree>
+    <p:extLst>
+      <p:ext uri="{BB962C8B-B14F-4D97-AF65-F5344CB8AC3E}">
+        <p14:creationId xmlns:p14="http://schemas.microsoft.com/office/powerpoint/2010/main" val="1627292905"/>
+      </p:ext>
+    </p:extLst>
+  </p:cSld>
+  <p:clrMapOvr>
+    <a:masterClrMapping/>
+  </p:clrMapOvr>
+</p:sld>
+</file>
+
+<file path=ppt/slides/slide16.xml><?xml version="1.0" encoding="utf-8"?>
+<p:sld xmlns:a="http://schemas.openxmlformats.org/drawingml/2006/main" xmlns:r="http://schemas.openxmlformats.org/officeDocument/2006/relationships" xmlns:p="http://schemas.openxmlformats.org/presentationml/2006/main">
+  <p:cSld>
+    <p:spTree>
+      <p:nvGrpSpPr>
+        <p:cNvPr id="1" name=""/>
+        <p:cNvGrpSpPr/>
+        <p:nvPr/>
+      </p:nvGrpSpPr>
+      <p:grpSpPr>
+        <a:xfrm>
+          <a:off x="0" y="0"/>
+          <a:ext cx="0" cy="0"/>
+          <a:chOff x="0" y="0"/>
+          <a:chExt cx="0" cy="0"/>
+        </a:xfrm>
+      </p:grpSpPr>
+      <p:sp>
+        <p:nvSpPr>
+          <p:cNvPr id="2" name="Title 1">
+            <a:extLst>
+              <a:ext uri="{FF2B5EF4-FFF2-40B4-BE49-F238E27FC236}">
+                <a16:creationId xmlns:a16="http://schemas.microsoft.com/office/drawing/2014/main" id="{0EDA4548-CA9B-4245-A98D-8C8CAA7A2199}"/>
+              </a:ext>
+            </a:extLst>
+          </p:cNvPr>
+          <p:cNvSpPr>
+            <a:spLocks noGrp="1"/>
+          </p:cNvSpPr>
+          <p:nvPr>
+            <p:ph type="title"/>
+          </p:nvPr>
+        </p:nvSpPr>
+        <p:spPr/>
+        <p:txBody>
+          <a:bodyPr/>
+          <a:lstStyle/>
+          <a:p>
+            <a:r>
+              <a:rPr lang="en-US" altLang="zh-CN" dirty="0"/>
+              <a:t>+</a:t>
+            </a:r>
+            <a:r>
+              <a:rPr lang="zh-CN" altLang="en-US" dirty="0"/>
+              <a:t> </a:t>
+            </a:r>
+            <a:r>
+              <a:rPr lang="en-CN" dirty="0"/>
+              <a:t>QA</a:t>
+            </a:r>
+          </a:p>
+        </p:txBody>
+      </p:sp>
+      <p:sp>
+        <p:nvSpPr>
+          <p:cNvPr id="3" name="Content Placeholder 2">
+            <a:extLst>
+              <a:ext uri="{FF2B5EF4-FFF2-40B4-BE49-F238E27FC236}">
+                <a16:creationId xmlns:a16="http://schemas.microsoft.com/office/drawing/2014/main" id="{5B33604C-DB0C-504C-8E80-857E7A949477}"/>
+              </a:ext>
+            </a:extLst>
+          </p:cNvPr>
+          <p:cNvSpPr>
+            <a:spLocks noGrp="1"/>
+          </p:cNvSpPr>
+          <p:nvPr>
+            <p:ph idx="1"/>
+          </p:nvPr>
+        </p:nvSpPr>
+        <p:spPr/>
+        <p:txBody>
+          <a:bodyPr>
+            <a:noAutofit/>
+          </a:bodyPr>
+          <a:lstStyle/>
+          <a:p>
+            <a:r>
+              <a:rPr lang="zh-CN" altLang="en-US" sz="2000" dirty="0"/>
+              <a:t>平时开发中需要如何设计代码结构，做到以后尽量少或者小的重构？</a:t>
+            </a:r>
+            <a:endParaRPr lang="en-US" altLang="zh-CN" sz="2000" dirty="0"/>
+          </a:p>
+          <a:p>
+            <a:pPr marL="0" indent="0">
+              <a:buNone/>
+            </a:pPr>
+            <a:r>
+              <a:rPr lang="zh-CN" altLang="en-US" sz="2000" dirty="0"/>
+              <a:t>  不能</a:t>
+            </a:r>
+            <a:endParaRPr lang="en-US" altLang="zh-CN" sz="2000" dirty="0"/>
+          </a:p>
+          <a:p>
+            <a:pPr marL="0" indent="0">
+              <a:buNone/>
+            </a:pPr>
+            <a:r>
+              <a:rPr lang="zh-CN" altLang="en-US" sz="2000" dirty="0"/>
+              <a:t>  架构</a:t>
+            </a:r>
+            <a:endParaRPr lang="en-US" altLang="zh-CN" sz="2000" dirty="0"/>
+          </a:p>
+          <a:p>
+            <a:pPr marL="0" indent="0">
+              <a:buNone/>
+            </a:pPr>
+            <a:endParaRPr lang="en-US" altLang="zh-CN" sz="2000" dirty="0"/>
+          </a:p>
+          <a:p>
+            <a:r>
+              <a:rPr lang="zh-CN" altLang="en-US" sz="2000" dirty="0"/>
+              <a:t>重构 在</a:t>
+            </a:r>
+            <a:r>
+              <a:rPr lang="en-US" altLang="zh-CN" sz="2000" dirty="0"/>
+              <a:t>JS</a:t>
+            </a:r>
+            <a:r>
+              <a:rPr lang="zh-CN" altLang="en-US" sz="2000" dirty="0"/>
+              <a:t> 中能用吗？</a:t>
+            </a:r>
+            <a:endParaRPr lang="en-US" altLang="zh-CN" sz="2000" dirty="0"/>
+          </a:p>
+          <a:p>
+            <a:pPr marL="0" indent="0">
+              <a:buNone/>
+            </a:pPr>
+            <a:r>
+              <a:rPr lang="zh-CN" altLang="en-US" sz="2000" dirty="0"/>
+              <a:t>     任何语言</a:t>
+            </a:r>
+            <a:endParaRPr lang="en-US" altLang="zh-CN" sz="2000" dirty="0"/>
+          </a:p>
+          <a:p>
+            <a:pPr marL="0" indent="0">
+              <a:buNone/>
+            </a:pPr>
+            <a:r>
+              <a:rPr lang="zh-CN" altLang="en-US" sz="2000" dirty="0"/>
+              <a:t> </a:t>
+            </a:r>
+            <a:endParaRPr lang="en-US" altLang="zh-CN" sz="2000" dirty="0"/>
+          </a:p>
+          <a:p>
+            <a:r>
+              <a:rPr lang="zh-CN" altLang="en-US" sz="2000" dirty="0"/>
+              <a:t>项目架构非常</a:t>
+            </a:r>
+            <a:r>
+              <a:rPr lang="en-US" altLang="zh-CN" sz="2000" dirty="0"/>
+              <a:t>common</a:t>
+            </a:r>
+            <a:r>
+              <a:rPr lang="zh-CN" altLang="en-US" sz="2000" dirty="0"/>
+              <a:t>，不能一下子改完，该如何着手重构？</a:t>
+            </a:r>
+            <a:endParaRPr lang="en-US" altLang="zh-CN" sz="2000" dirty="0"/>
+          </a:p>
+          <a:p>
+            <a:pPr marL="0" indent="0">
+              <a:buNone/>
+            </a:pPr>
+            <a:r>
+              <a:rPr lang="zh-CN" altLang="en-US" sz="2000" dirty="0"/>
+              <a:t>    重构架构是超大范围的重构，即使使用重构手法也不能一下子改完。</a:t>
+            </a:r>
+            <a:endParaRPr lang="en-US" altLang="zh-CN" sz="2000" dirty="0"/>
+          </a:p>
+          <a:p>
+            <a:pPr marL="0" indent="0">
+              <a:buNone/>
+            </a:pPr>
+            <a:r>
+              <a:rPr lang="zh-CN" altLang="en-US" sz="2000" dirty="0"/>
+              <a:t>    逐个替换</a:t>
+            </a:r>
+            <a:r>
+              <a:rPr lang="en-US" altLang="zh-CN" sz="2000" dirty="0"/>
+              <a:t>+</a:t>
+            </a:r>
+            <a:r>
+              <a:rPr lang="zh-CN" altLang="en-US" sz="2000" dirty="0"/>
+              <a:t>测试用例</a:t>
+            </a:r>
+            <a:endParaRPr lang="en-US" altLang="zh-CN" sz="2000" dirty="0"/>
+          </a:p>
+          <a:p>
+            <a:pPr marL="0" indent="0">
+              <a:buNone/>
+            </a:pPr>
+            <a:r>
+              <a:rPr lang="zh-CN" altLang="en-US" sz="2000" dirty="0"/>
+              <a:t>    用重构按小步调和布局范围改善代码，使得代码清晰，能帮助找到更好的架构。</a:t>
+            </a:r>
+            <a:endParaRPr lang="en-CN" sz="2000" dirty="0"/>
+          </a:p>
+        </p:txBody>
+      </p:sp>
+    </p:spTree>
+    <p:extLst>
+      <p:ext uri="{BB962C8B-B14F-4D97-AF65-F5344CB8AC3E}">
+        <p14:creationId xmlns:p14="http://schemas.microsoft.com/office/powerpoint/2010/main" val="529310518"/>
+      </p:ext>
+    </p:extLst>
+  </p:cSld>
+  <p:clrMapOvr>
+    <a:masterClrMapping/>
+  </p:clrMapOvr>
+</p:sld>
+</file>
+
+<file path=ppt/slides/slide17.xml><?xml version="1.0" encoding="utf-8"?>
+<p:sld xmlns:a="http://schemas.openxmlformats.org/drawingml/2006/main" xmlns:r="http://schemas.openxmlformats.org/officeDocument/2006/relationships" xmlns:p="http://schemas.openxmlformats.org/presentationml/2006/main">
+  <p:cSld>
+    <p:spTree>
+      <p:nvGrpSpPr>
+        <p:cNvPr id="1" name=""/>
+        <p:cNvGrpSpPr/>
+        <p:nvPr/>
+      </p:nvGrpSpPr>
+      <p:grpSpPr>
+        <a:xfrm>
+          <a:off x="0" y="0"/>
+          <a:ext cx="0" cy="0"/>
+          <a:chOff x="0" y="0"/>
+          <a:chExt cx="0" cy="0"/>
+        </a:xfrm>
+      </p:grpSpPr>
+      <p:sp>
+        <p:nvSpPr>
+          <p:cNvPr id="2" name="Title 1">
+            <a:extLst>
+              <a:ext uri="{FF2B5EF4-FFF2-40B4-BE49-F238E27FC236}">
                 <a16:creationId xmlns:a16="http://schemas.microsoft.com/office/drawing/2014/main" id="{B1251E48-0CAE-E940-98C2-89A57854692F}"/>
               </a:ext>
             </a:extLst>
@@ -4150,13 +5497,19 @@
               <a:rPr lang="en-US" altLang="zh-CN" b="1" dirty="0">
                 <a:effectLst/>
               </a:rPr>
-              <a:t>-</a:t>
+              <a:t>–</a:t>
             </a:r>
             <a:r>
               <a:rPr lang="zh-CN" altLang="en-US" b="1" dirty="0">
                 <a:effectLst/>
               </a:rPr>
               <a:t> </a:t>
+            </a:r>
+            <a:r>
+              <a:rPr lang="en-US" altLang="zh-CN" b="1" dirty="0">
+                <a:effectLst/>
+              </a:rPr>
+              <a:t>C6 </a:t>
             </a:r>
             <a:r>
               <a:rPr lang="zh-CN" altLang="en-US" b="1" dirty="0"/>
@@ -5403,19 +6756,94 @@
         </p:nvSpPr>
         <p:spPr/>
         <p:txBody>
-          <a:bodyPr/>
+          <a:bodyPr>
+            <a:normAutofit/>
+          </a:bodyPr>
           <a:lstStyle/>
           <a:p>
             <a:r>
-              <a:rPr lang="en-US" dirty="0"/>
+              <a:rPr lang="en-US" sz="1600" dirty="0"/>
               <a:t>Code first, then read summary</a:t>
             </a:r>
           </a:p>
           <a:p>
             <a:r>
-              <a:rPr lang="en-US" dirty="0"/>
+              <a:rPr lang="en-US" sz="1600" dirty="0"/>
               <a:t>Search the project code, the practice refactoring</a:t>
             </a:r>
+          </a:p>
+          <a:p>
+            <a:pPr marL="0" indent="0">
+              <a:buNone/>
+            </a:pPr>
+            <a:endParaRPr lang="en-US" sz="1600" dirty="0"/>
+          </a:p>
+          <a:p>
+            <a:r>
+              <a:rPr lang="en-US" sz="1600" dirty="0">
+                <a:hlinkClick r:id="rId2"/>
+              </a:rPr>
+              <a:t>Memo</a:t>
+            </a:r>
+          </a:p>
+          <a:p>
+            <a:pPr marL="0" indent="0">
+              <a:buNone/>
+            </a:pPr>
+            <a:r>
+              <a:rPr lang="en-US" sz="1600" dirty="0"/>
+              <a:t> </a:t>
+            </a:r>
+            <a:r>
+              <a:rPr lang="en-US" sz="1600" dirty="0" err="1"/>
+              <a:t>gitee</a:t>
+            </a:r>
+            <a:r>
+              <a:rPr lang="en-US" sz="1600" dirty="0"/>
+              <a:t> / </a:t>
+            </a:r>
+            <a:r>
+              <a:rPr lang="en-US" sz="1600" dirty="0" err="1"/>
+              <a:t>github</a:t>
+            </a:r>
+            <a:endParaRPr lang="en-US" sz="1600" dirty="0">
+              <a:hlinkClick r:id="rId2"/>
+            </a:endParaRPr>
+          </a:p>
+          <a:p>
+            <a:pPr marL="0" indent="0">
+              <a:buNone/>
+            </a:pPr>
+            <a:r>
+              <a:rPr lang="en-US" sz="1400" dirty="0">
+                <a:hlinkClick r:id="rId2"/>
+              </a:rPr>
+              <a:t>https://gitee.com/YingVickyCao/YingVickyCao.github.io/tree/master/books/refactoring_improve_the_design_of_existing_code</a:t>
+            </a:r>
+            <a:endParaRPr lang="en-US" sz="1400" dirty="0"/>
+          </a:p>
+          <a:p>
+            <a:pPr marL="0" indent="0">
+              <a:buNone/>
+            </a:pPr>
+            <a:r>
+              <a:rPr lang="en-US" sz="1400" dirty="0">
+                <a:hlinkClick r:id="rId3"/>
+              </a:rPr>
+              <a:t>Code</a:t>
+            </a:r>
+          </a:p>
+          <a:p>
+            <a:pPr marL="0" indent="0">
+              <a:buNone/>
+            </a:pPr>
+            <a:r>
+              <a:rPr lang="en-US" sz="1400" dirty="0">
+                <a:hlinkClick r:id="rId3"/>
+              </a:rPr>
+              <a:t>https://gitee.com/YingVickyCao/Refactoring-Improving-the-Design-of-Existing-Code</a:t>
+            </a:r>
+            <a:endParaRPr lang="en-US" sz="1400" dirty="0"/>
           </a:p>
         </p:txBody>
       </p:sp>
@@ -5470,7 +6898,10 @@
           <a:bodyPr/>
           <a:lstStyle/>
           <a:p>
-            <a:endParaRPr lang="en-CN"/>
+            <a:r>
+              <a:rPr lang="en-CN" dirty="0"/>
+              <a:t>约定</a:t>
+            </a:r>
           </a:p>
         </p:txBody>
       </p:sp>
@@ -5619,11 +7050,13 @@
         </p:nvSpPr>
         <p:spPr/>
         <p:txBody>
-          <a:bodyPr/>
+          <a:bodyPr>
+            <a:noAutofit/>
+          </a:bodyPr>
           <a:lstStyle/>
           <a:p>
             <a:r>
-              <a:rPr lang="en-US" altLang="zh-CN" sz="1600" dirty="0">
+              <a:rPr lang="en-US" altLang="zh-CN" dirty="0">
                 <a:solidFill>
                   <a:srgbClr val="FF0000"/>
                 </a:solidFill>
@@ -5632,7 +7065,7 @@
               <a:t>1. </a:t>
             </a:r>
             <a:r>
-              <a:rPr lang="zh-CN" altLang="en-US" sz="1600" dirty="0">
+              <a:rPr lang="zh-CN" altLang="en-US" dirty="0">
                 <a:solidFill>
                   <a:srgbClr val="FF0000"/>
                 </a:solidFill>
@@ -5640,7 +7073,7 @@
               </a:rPr>
               <a:t>为什么需要重构？</a:t>
             </a:r>
-            <a:endParaRPr lang="en-US" altLang="zh-CN" sz="1600" dirty="0">
+            <a:endParaRPr lang="en-US" altLang="zh-CN" dirty="0">
               <a:solidFill>
                 <a:srgbClr val="FF0000"/>
               </a:solidFill>
@@ -5649,7 +7082,7 @@
           </a:p>
           <a:p>
             <a:r>
-              <a:rPr lang="en-US" altLang="zh-CN" sz="1600" dirty="0">
+              <a:rPr lang="en-US" altLang="zh-CN" dirty="0">
                 <a:solidFill>
                   <a:srgbClr val="FF0000"/>
                 </a:solidFill>
@@ -5658,7 +7091,7 @@
               <a:t>2.</a:t>
             </a:r>
             <a:r>
-              <a:rPr lang="zh-CN" altLang="en-US" sz="1600" dirty="0">
+              <a:rPr lang="zh-CN" altLang="en-US" dirty="0">
                 <a:solidFill>
                   <a:srgbClr val="FF0000"/>
                 </a:solidFill>
@@ -5666,7 +7099,7 @@
               </a:rPr>
               <a:t>什么时候需要重构？</a:t>
             </a:r>
-            <a:endParaRPr lang="en-US" altLang="zh-CN" sz="1600" dirty="0">
+            <a:endParaRPr lang="en-US" altLang="zh-CN" dirty="0">
               <a:solidFill>
                 <a:srgbClr val="FF0000"/>
               </a:solidFill>
@@ -5675,7 +7108,7 @@
           </a:p>
           <a:p>
             <a:r>
-              <a:rPr lang="en-US" altLang="zh-CN" sz="1600" dirty="0">
+              <a:rPr lang="en-US" altLang="zh-CN" dirty="0">
                 <a:solidFill>
                   <a:srgbClr val="FF0000"/>
                 </a:solidFill>
@@ -5684,16 +7117,31 @@
               <a:t>3.</a:t>
             </a:r>
             <a:r>
-              <a:rPr lang="zh-CN" altLang="en-US" sz="1600" dirty="0">
+              <a:rPr lang="zh-CN" altLang="en-US" dirty="0">
                 <a:solidFill>
                   <a:srgbClr val="FF0000"/>
                 </a:solidFill>
                 <a:effectLst/>
               </a:rPr>
-              <a:t>重构有哪</a:t>
-            </a:r>
-            <a:r>
-              <a:rPr lang="en-US" altLang="zh-CN" sz="1600" dirty="0">
+              <a:t>重构有</a:t>
+            </a:r>
+            <a:r>
+              <a:rPr lang="zh-CN" altLang="en-US" dirty="0">
+                <a:solidFill>
+                  <a:srgbClr val="FF0000"/>
+                </a:solidFill>
+              </a:rPr>
+              <a:t>哪些方法？</a:t>
+            </a:r>
+            <a:endParaRPr lang="en-US" altLang="zh-CN" dirty="0">
+              <a:solidFill>
+                <a:srgbClr val="FF0000"/>
+              </a:solidFill>
+            </a:endParaRPr>
+          </a:p>
+          <a:p>
+            <a:r>
+              <a:rPr lang="en-US" altLang="zh-CN" dirty="0">
                 <a:solidFill>
                   <a:srgbClr val="FF0000"/>
                 </a:solidFill>
@@ -5702,7 +7150,7 @@
               <a:t>4.</a:t>
             </a:r>
             <a:r>
-              <a:rPr lang="zh-CN" altLang="en-US" sz="1600" dirty="0">
+              <a:rPr lang="zh-CN" altLang="en-US" dirty="0">
                 <a:solidFill>
                   <a:srgbClr val="FF0000"/>
                 </a:solidFill>
@@ -5711,7 +7159,7 @@
               <a:t>如何检测重构以后是否引入新的</a:t>
             </a:r>
             <a:r>
-              <a:rPr lang="en-US" sz="1600" dirty="0">
+              <a:rPr lang="en-US" dirty="0">
                 <a:solidFill>
                   <a:srgbClr val="FF0000"/>
                 </a:solidFill>
@@ -5722,24 +7170,7 @@
           </a:p>
           <a:p>
             <a:r>
-              <a:rPr lang="zh-CN" altLang="en-US" sz="1600" dirty="0">
-                <a:solidFill>
-                  <a:srgbClr val="FF0000"/>
-                </a:solidFill>
-                <a:effectLst/>
-              </a:rPr>
-              <a:t>些方法？</a:t>
-            </a:r>
-            <a:endParaRPr lang="en-US" altLang="zh-CN" sz="1600" dirty="0">
-              <a:solidFill>
-                <a:srgbClr val="FF0000"/>
-              </a:solidFill>
-              <a:effectLst/>
-            </a:endParaRPr>
-          </a:p>
-          <a:p>
-            <a:r>
-              <a:rPr lang="en-US" sz="1600" dirty="0">
+              <a:rPr lang="en-US" dirty="0">
                 <a:solidFill>
                   <a:srgbClr val="FF0000"/>
                 </a:solidFill>
@@ -5748,7 +7179,7 @@
               <a:t>5.</a:t>
             </a:r>
             <a:r>
-              <a:rPr lang="zh-CN" altLang="en-US" sz="1600" dirty="0">
+              <a:rPr lang="zh-CN" altLang="en-US" dirty="0">
                 <a:solidFill>
                   <a:srgbClr val="FF0000"/>
                 </a:solidFill>
@@ -5756,7 +7187,7 @@
               </a:rPr>
               <a:t>平时开发中需要如何设计代码结构，做到以后尽量少或者小的重构？</a:t>
             </a:r>
-            <a:endParaRPr lang="en-US" altLang="zh-CN" sz="1600" dirty="0">
+            <a:endParaRPr lang="en-US" altLang="zh-CN" dirty="0">
               <a:solidFill>
                 <a:srgbClr val="FF0000"/>
               </a:solidFill>
@@ -5765,7 +7196,7 @@
           </a:p>
           <a:p>
             <a:r>
-              <a:rPr lang="en-US" altLang="zh-CN" sz="1600" dirty="0">
+              <a:rPr lang="en-US" altLang="zh-CN" dirty="0">
                 <a:solidFill>
                   <a:srgbClr val="FF0000"/>
                 </a:solidFill>
@@ -5775,7 +7206,7 @@
           </a:p>
           <a:p>
             <a:r>
-              <a:rPr lang="en-US" altLang="zh-CN" sz="1600" dirty="0">
+              <a:rPr lang="en-US" altLang="zh-CN" dirty="0">
                 <a:solidFill>
                   <a:srgbClr val="FF0000"/>
                 </a:solidFill>
@@ -5784,7 +7215,7 @@
               <a:t>6.</a:t>
             </a:r>
             <a:r>
-              <a:rPr lang="zh-CN" altLang="en-US" sz="1600" dirty="0">
+              <a:rPr lang="zh-CN" altLang="en-US" dirty="0">
                 <a:solidFill>
                   <a:srgbClr val="FF0000"/>
                 </a:solidFill>
@@ -5793,7 +7224,7 @@
               <a:t> 重构 在</a:t>
             </a:r>
             <a:r>
-              <a:rPr lang="en-US" altLang="zh-CN" sz="1600" dirty="0">
+              <a:rPr lang="en-US" altLang="zh-CN" dirty="0">
                 <a:solidFill>
                   <a:srgbClr val="FF0000"/>
                 </a:solidFill>
@@ -5801,7 +7232,7 @@
               <a:t>JS</a:t>
             </a:r>
             <a:r>
-              <a:rPr lang="zh-CN" altLang="en-US" sz="1600" dirty="0">
+              <a:rPr lang="zh-CN" altLang="en-US" dirty="0">
                 <a:solidFill>
                   <a:srgbClr val="FF0000"/>
                 </a:solidFill>
@@ -5809,7 +7240,7 @@
               <a:t> </a:t>
             </a:r>
             <a:r>
-              <a:rPr lang="zh-CN" altLang="en-US" sz="1600" dirty="0">
+              <a:rPr lang="zh-CN" altLang="en-US" dirty="0">
                 <a:solidFill>
                   <a:srgbClr val="FF0000"/>
                 </a:solidFill>
@@ -5817,7 +7248,7 @@
               </a:rPr>
               <a:t>中能用吗？</a:t>
             </a:r>
-            <a:endParaRPr lang="en-US" altLang="zh-CN" sz="1600" dirty="0">
+            <a:endParaRPr lang="en-US" altLang="zh-CN" dirty="0">
               <a:solidFill>
                 <a:srgbClr val="FF0000"/>
               </a:solidFill>
@@ -5826,7 +7257,7 @@
           </a:p>
           <a:p>
             <a:r>
-              <a:rPr lang="en-US" altLang="zh-CN" sz="1600" dirty="0">
+              <a:rPr lang="en-US" altLang="zh-CN" dirty="0">
                 <a:solidFill>
                   <a:srgbClr val="FF0000"/>
                 </a:solidFill>
@@ -5834,7 +7265,7 @@
               <a:t>7.</a:t>
             </a:r>
             <a:r>
-              <a:rPr lang="zh-CN" altLang="en-US" sz="1600" dirty="0">
+              <a:rPr lang="zh-CN" altLang="en-US" dirty="0">
                 <a:solidFill>
                   <a:srgbClr val="FF0000"/>
                 </a:solidFill>
@@ -5842,7 +7273,7 @@
               <a:t>  项目架构非常</a:t>
             </a:r>
             <a:r>
-              <a:rPr lang="en-US" altLang="zh-CN" sz="1600" dirty="0">
+              <a:rPr lang="en-US" altLang="zh-CN" dirty="0">
                 <a:solidFill>
                   <a:srgbClr val="FF0000"/>
                 </a:solidFill>
@@ -5850,14 +7281,14 @@
               <a:t>common</a:t>
             </a:r>
             <a:r>
-              <a:rPr lang="zh-CN" altLang="en-US" sz="1600" dirty="0">
+              <a:rPr lang="zh-CN" altLang="en-US" dirty="0">
                 <a:solidFill>
                   <a:srgbClr val="FF0000"/>
                 </a:solidFill>
               </a:rPr>
               <a:t>，不能一下子改完，该如何着手重构？</a:t>
             </a:r>
-            <a:endParaRPr lang="zh-CN" altLang="en-US" sz="1600" dirty="0">
+            <a:endParaRPr lang="zh-CN" altLang="en-US" dirty="0">
               <a:solidFill>
                 <a:srgbClr val="FF0000"/>
               </a:solidFill>
@@ -5901,7 +7332,7 @@
           <p:cNvPr id="2" name="Title 1">
             <a:extLst>
               <a:ext uri="{FF2B5EF4-FFF2-40B4-BE49-F238E27FC236}">
-                <a16:creationId xmlns:a16="http://schemas.microsoft.com/office/drawing/2014/main" id="{4DF9926D-5D3D-964A-858A-4CE5C039E5EC}"/>
+                <a16:creationId xmlns:a16="http://schemas.microsoft.com/office/drawing/2014/main" id="{3C3178D5-738A-FF4A-8BDF-233E84511FD5}"/>
               </a:ext>
             </a:extLst>
           </p:cNvPr>
@@ -5917,7 +7348,6 @@
           <a:bodyPr/>
           <a:lstStyle/>
           <a:p>
-            <a:pPr algn="ctr"/>
             <a:r>
               <a:rPr lang="en-CN" dirty="0"/>
               <a:t>Read Example togeter</a:t>
@@ -5925,35 +7355,1098 @@
           </a:p>
         </p:txBody>
       </p:sp>
-      <p:sp>
-        <p:nvSpPr>
-          <p:cNvPr id="3" name="Content Placeholder 2">
-            <a:extLst>
-              <a:ext uri="{FF2B5EF4-FFF2-40B4-BE49-F238E27FC236}">
-                <a16:creationId xmlns:a16="http://schemas.microsoft.com/office/drawing/2014/main" id="{5197768A-7D6A-804D-80E1-51F3C558904A}"/>
-              </a:ext>
-            </a:extLst>
-          </p:cNvPr>
-          <p:cNvSpPr>
-            <a:spLocks noGrp="1"/>
-          </p:cNvSpPr>
+      <p:graphicFrame>
+        <p:nvGraphicFramePr>
+          <p:cNvPr id="5" name="Content Placeholder 4">
+            <a:extLst>
+              <a:ext uri="{FF2B5EF4-FFF2-40B4-BE49-F238E27FC236}">
+                <a16:creationId xmlns:a16="http://schemas.microsoft.com/office/drawing/2014/main" id="{A1449DC7-E7E7-A54E-A38C-80EEC1928E8B}"/>
+              </a:ext>
+            </a:extLst>
+          </p:cNvPr>
+          <p:cNvGraphicFramePr>
+            <a:graphicFrameLocks noGrp="1"/>
+          </p:cNvGraphicFramePr>
           <p:nvPr>
             <p:ph idx="1"/>
           </p:nvPr>
-        </p:nvSpPr>
-        <p:spPr/>
-        <p:txBody>
-          <a:bodyPr/>
-          <a:lstStyle/>
-          <a:p>
-            <a:endParaRPr lang="en-CN" dirty="0"/>
-          </a:p>
-        </p:txBody>
-      </p:sp>
+        </p:nvGraphicFramePr>
+        <p:xfrm>
+          <a:off x="838200" y="1901688"/>
+          <a:ext cx="10515600" cy="4199211"/>
+        </p:xfrm>
+        <a:graphic>
+          <a:graphicData uri="http://schemas.openxmlformats.org/drawingml/2006/table">
+            <a:tbl>
+              <a:tblPr>
+                <a:tableStyleId>{5C22544A-7EE6-4342-B048-85BDC9FD1C3A}</a:tableStyleId>
+              </a:tblPr>
+              <a:tblGrid>
+                <a:gridCol w="692417">
+                  <a:extLst>
+                    <a:ext uri="{9D8B030D-6E8A-4147-A177-3AD203B41FA5}">
+                      <a16:colId xmlns:a16="http://schemas.microsoft.com/office/drawing/2014/main" val="2885986515"/>
+                    </a:ext>
+                  </a:extLst>
+                </a:gridCol>
+                <a:gridCol w="5204537">
+                  <a:extLst>
+                    <a:ext uri="{9D8B030D-6E8A-4147-A177-3AD203B41FA5}">
+                      <a16:colId xmlns:a16="http://schemas.microsoft.com/office/drawing/2014/main" val="893374954"/>
+                    </a:ext>
+                  </a:extLst>
+                </a:gridCol>
+                <a:gridCol w="4618646">
+                  <a:extLst>
+                    <a:ext uri="{9D8B030D-6E8A-4147-A177-3AD203B41FA5}">
+                      <a16:colId xmlns:a16="http://schemas.microsoft.com/office/drawing/2014/main" val="516633318"/>
+                    </a:ext>
+                  </a:extLst>
+                </a:gridCol>
+              </a:tblGrid>
+              <a:tr h="213154">
+                <a:tc>
+                  <a:txBody>
+                    <a:bodyPr/>
+                    <a:lstStyle/>
+                    <a:p>
+                      <a:pPr algn="l" fontAlgn="b"/>
+                      <a:r>
+                        <a:rPr lang="en-US" sz="1300" u="none" strike="noStrike">
+                          <a:effectLst/>
+                        </a:rPr>
+                        <a:t>Version</a:t>
+                      </a:r>
+                      <a:endParaRPr lang="en-US" sz="1300" b="1" i="0" u="none" strike="noStrike">
+                        <a:solidFill>
+                          <a:srgbClr val="40485B"/>
+                        </a:solidFill>
+                        <a:effectLst/>
+                        <a:latin typeface="Helvetica" pitchFamily="2" charset="0"/>
+                      </a:endParaRPr>
+                    </a:p>
+                  </a:txBody>
+                  <a:tcPr marL="7613" marR="7613" marT="7613" marB="0" anchor="b"/>
+                </a:tc>
+                <a:tc>
+                  <a:txBody>
+                    <a:bodyPr/>
+                    <a:lstStyle/>
+                    <a:p>
+                      <a:pPr algn="l" fontAlgn="b"/>
+                      <a:r>
+                        <a:rPr lang="en-US" sz="1300" u="none" strike="noStrike">
+                          <a:effectLst/>
+                        </a:rPr>
+                        <a:t>Modify</a:t>
+                      </a:r>
+                      <a:endParaRPr lang="en-US" sz="1300" b="1" i="0" u="none" strike="noStrike">
+                        <a:solidFill>
+                          <a:srgbClr val="40485B"/>
+                        </a:solidFill>
+                        <a:effectLst/>
+                        <a:latin typeface="Helvetica" pitchFamily="2" charset="0"/>
+                      </a:endParaRPr>
+                    </a:p>
+                  </a:txBody>
+                  <a:tcPr marL="7613" marR="7613" marT="7613" marB="0" anchor="b"/>
+                </a:tc>
+                <a:tc>
+                  <a:txBody>
+                    <a:bodyPr/>
+                    <a:lstStyle/>
+                    <a:p>
+                      <a:pPr algn="l" fontAlgn="b"/>
+                      <a:r>
+                        <a:rPr lang="en-US" sz="1300" u="none" strike="noStrike">
+                          <a:effectLst/>
+                        </a:rPr>
+                        <a:t>Tool</a:t>
+                      </a:r>
+                      <a:endParaRPr lang="en-US" sz="1300" b="1" i="0" u="none" strike="noStrike">
+                        <a:solidFill>
+                          <a:srgbClr val="40485B"/>
+                        </a:solidFill>
+                        <a:effectLst/>
+                        <a:latin typeface="Helvetica" pitchFamily="2" charset="0"/>
+                      </a:endParaRPr>
+                    </a:p>
+                  </a:txBody>
+                  <a:tcPr marL="7613" marR="7613" marT="7613" marB="0" anchor="b"/>
+                </a:tc>
+                <a:extLst>
+                  <a:ext uri="{0D108BD9-81ED-4DB2-BD59-A6C34878D82A}">
+                    <a16:rowId xmlns:a16="http://schemas.microsoft.com/office/drawing/2014/main" val="252071684"/>
+                  </a:ext>
+                </a:extLst>
+              </a:tr>
+              <a:tr h="286235">
+                <a:tc>
+                  <a:txBody>
+                    <a:bodyPr/>
+                    <a:lstStyle/>
+                    <a:p>
+                      <a:pPr algn="l" fontAlgn="b"/>
+                      <a:r>
+                        <a:rPr lang="en-US" sz="1300" u="none" strike="noStrike">
+                          <a:effectLst/>
+                        </a:rPr>
+                        <a:t>v1</a:t>
+                      </a:r>
+                      <a:endParaRPr lang="en-US" sz="1300" b="0" i="0" u="none" strike="noStrike">
+                        <a:solidFill>
+                          <a:srgbClr val="40485B"/>
+                        </a:solidFill>
+                        <a:effectLst/>
+                        <a:latin typeface="Helvetica" pitchFamily="2" charset="0"/>
+                      </a:endParaRPr>
+                    </a:p>
+                  </a:txBody>
+                  <a:tcPr marL="7613" marR="7613" marT="45676" marB="45676" anchor="b"/>
+                </a:tc>
+                <a:tc>
+                  <a:txBody>
+                    <a:bodyPr/>
+                    <a:lstStyle/>
+                    <a:p>
+                      <a:pPr algn="l" fontAlgn="b"/>
+                      <a:r>
+                        <a:rPr lang="en-US" sz="1300" u="none" strike="noStrike">
+                          <a:effectLst/>
+                        </a:rPr>
+                        <a:t>Customer - switch -&gt; method</a:t>
+                      </a:r>
+                      <a:endParaRPr lang="en-US" sz="1300" b="0" i="0" u="none" strike="noStrike">
+                        <a:solidFill>
+                          <a:srgbClr val="40485B"/>
+                        </a:solidFill>
+                        <a:effectLst/>
+                        <a:latin typeface="Helvetica" pitchFamily="2" charset="0"/>
+                      </a:endParaRPr>
+                    </a:p>
+                  </a:txBody>
+                  <a:tcPr marL="7613" marR="7613" marT="45676" marB="45676" anchor="b"/>
+                </a:tc>
+                <a:tc>
+                  <a:txBody>
+                    <a:bodyPr/>
+                    <a:lstStyle/>
+                    <a:p>
+                      <a:pPr algn="l" fontAlgn="b"/>
+                      <a:r>
+                        <a:rPr lang="en-US" sz="1300" u="none" strike="noStrike">
+                          <a:effectLst/>
+                        </a:rPr>
+                        <a:t>Extract Method(110)</a:t>
+                      </a:r>
+                      <a:endParaRPr lang="en-US" sz="1300" b="0" i="0" u="none" strike="noStrike">
+                        <a:solidFill>
+                          <a:srgbClr val="40485B"/>
+                        </a:solidFill>
+                        <a:effectLst/>
+                        <a:latin typeface="Helvetica" pitchFamily="2" charset="0"/>
+                      </a:endParaRPr>
+                    </a:p>
+                  </a:txBody>
+                  <a:tcPr marL="7613" marR="7613" marT="45676" marB="45676" anchor="b"/>
+                </a:tc>
+                <a:extLst>
+                  <a:ext uri="{0D108BD9-81ED-4DB2-BD59-A6C34878D82A}">
+                    <a16:rowId xmlns:a16="http://schemas.microsoft.com/office/drawing/2014/main" val="1877649923"/>
+                  </a:ext>
+                </a:extLst>
+              </a:tr>
+              <a:tr h="286235">
+                <a:tc>
+                  <a:txBody>
+                    <a:bodyPr/>
+                    <a:lstStyle/>
+                    <a:p>
+                      <a:pPr algn="l" fontAlgn="b"/>
+                      <a:r>
+                        <a:rPr lang="en-US" sz="1300" u="none" strike="noStrike">
+                          <a:effectLst/>
+                        </a:rPr>
+                        <a:t>v2</a:t>
+                      </a:r>
+                      <a:endParaRPr lang="en-US" sz="1300" b="0" i="0" u="none" strike="noStrike">
+                        <a:solidFill>
+                          <a:srgbClr val="40485B"/>
+                        </a:solidFill>
+                        <a:effectLst/>
+                        <a:latin typeface="Helvetica" pitchFamily="2" charset="0"/>
+                      </a:endParaRPr>
+                    </a:p>
+                  </a:txBody>
+                  <a:tcPr marL="7613" marR="7613" marT="45676" marB="45676" anchor="b"/>
+                </a:tc>
+                <a:tc>
+                  <a:txBody>
+                    <a:bodyPr/>
+                    <a:lstStyle/>
+                    <a:p>
+                      <a:pPr algn="l" fontAlgn="b"/>
+                      <a:r>
+                        <a:rPr lang="en-US" sz="1300" u="none" strike="noStrike">
+                          <a:effectLst/>
+                        </a:rPr>
+                        <a:t>Customer - move amountFor</a:t>
+                      </a:r>
+                      <a:endParaRPr lang="en-US" sz="1300" b="0" i="0" u="none" strike="noStrike">
+                        <a:solidFill>
+                          <a:srgbClr val="40485B"/>
+                        </a:solidFill>
+                        <a:effectLst/>
+                        <a:latin typeface="Helvetica" pitchFamily="2" charset="0"/>
+                      </a:endParaRPr>
+                    </a:p>
+                  </a:txBody>
+                  <a:tcPr marL="7613" marR="7613" marT="45676" marB="45676" anchor="b"/>
+                </a:tc>
+                <a:tc>
+                  <a:txBody>
+                    <a:bodyPr/>
+                    <a:lstStyle/>
+                    <a:p>
+                      <a:pPr algn="l" fontAlgn="b"/>
+                      <a:r>
+                        <a:rPr lang="en-US" sz="1300" u="none" strike="noStrike">
+                          <a:effectLst/>
+                        </a:rPr>
+                        <a:t>Move Method(142)</a:t>
+                      </a:r>
+                      <a:endParaRPr lang="en-US" sz="1300" b="0" i="0" u="none" strike="noStrike">
+                        <a:solidFill>
+                          <a:srgbClr val="40485B"/>
+                        </a:solidFill>
+                        <a:effectLst/>
+                        <a:latin typeface="Helvetica" pitchFamily="2" charset="0"/>
+                      </a:endParaRPr>
+                    </a:p>
+                  </a:txBody>
+                  <a:tcPr marL="7613" marR="7613" marT="45676" marB="45676" anchor="b"/>
+                </a:tc>
+                <a:extLst>
+                  <a:ext uri="{0D108BD9-81ED-4DB2-BD59-A6C34878D82A}">
+                    <a16:rowId xmlns:a16="http://schemas.microsoft.com/office/drawing/2014/main" val="912342628"/>
+                  </a:ext>
+                </a:extLst>
+              </a:tr>
+              <a:tr h="286235">
+                <a:tc>
+                  <a:txBody>
+                    <a:bodyPr/>
+                    <a:lstStyle/>
+                    <a:p>
+                      <a:pPr algn="l" fontAlgn="b"/>
+                      <a:r>
+                        <a:rPr lang="en-US" sz="1300" u="none" strike="noStrike">
+                          <a:effectLst/>
+                        </a:rPr>
+                        <a:t>v3</a:t>
+                      </a:r>
+                      <a:endParaRPr lang="en-US" sz="1300" b="0" i="0" u="none" strike="noStrike">
+                        <a:solidFill>
+                          <a:srgbClr val="40485B"/>
+                        </a:solidFill>
+                        <a:effectLst/>
+                        <a:latin typeface="Helvetica" pitchFamily="2" charset="0"/>
+                      </a:endParaRPr>
+                    </a:p>
+                  </a:txBody>
+                  <a:tcPr marL="7613" marR="7613" marT="45676" marB="45676" anchor="b"/>
+                </a:tc>
+                <a:tc>
+                  <a:txBody>
+                    <a:bodyPr/>
+                    <a:lstStyle/>
+                    <a:p>
+                      <a:pPr algn="l" fontAlgn="b"/>
+                      <a:r>
+                        <a:rPr lang="en-US" sz="1300" u="none" strike="noStrike">
+                          <a:effectLst/>
+                        </a:rPr>
+                        <a:t>Customer - thisAmount</a:t>
+                      </a:r>
+                      <a:endParaRPr lang="en-US" sz="1300" b="0" i="0" u="none" strike="noStrike">
+                        <a:solidFill>
+                          <a:srgbClr val="40485B"/>
+                        </a:solidFill>
+                        <a:effectLst/>
+                        <a:latin typeface="Helvetica" pitchFamily="2" charset="0"/>
+                      </a:endParaRPr>
+                    </a:p>
+                  </a:txBody>
+                  <a:tcPr marL="7613" marR="7613" marT="45676" marB="45676" anchor="b"/>
+                </a:tc>
+                <a:tc>
+                  <a:txBody>
+                    <a:bodyPr/>
+                    <a:lstStyle/>
+                    <a:p>
+                      <a:pPr algn="l" fontAlgn="b"/>
+                      <a:r>
+                        <a:rPr lang="en-US" sz="1300" u="none" strike="noStrike">
+                          <a:effectLst/>
+                        </a:rPr>
+                        <a:t>Replace tmp with query(120)</a:t>
+                      </a:r>
+                      <a:endParaRPr lang="en-US" sz="1300" b="0" i="0" u="none" strike="noStrike">
+                        <a:solidFill>
+                          <a:srgbClr val="40485B"/>
+                        </a:solidFill>
+                        <a:effectLst/>
+                        <a:latin typeface="Helvetica" pitchFamily="2" charset="0"/>
+                      </a:endParaRPr>
+                    </a:p>
+                  </a:txBody>
+                  <a:tcPr marL="7613" marR="7613" marT="45676" marB="45676" anchor="b"/>
+                </a:tc>
+                <a:extLst>
+                  <a:ext uri="{0D108BD9-81ED-4DB2-BD59-A6C34878D82A}">
+                    <a16:rowId xmlns:a16="http://schemas.microsoft.com/office/drawing/2014/main" val="3450862081"/>
+                  </a:ext>
+                </a:extLst>
+              </a:tr>
+              <a:tr h="286235">
+                <a:tc>
+                  <a:txBody>
+                    <a:bodyPr/>
+                    <a:lstStyle/>
+                    <a:p>
+                      <a:pPr algn="l" fontAlgn="b"/>
+                      <a:r>
+                        <a:rPr lang="en-US" sz="1300" u="none" strike="noStrike">
+                          <a:effectLst/>
+                        </a:rPr>
+                        <a:t>v4</a:t>
+                      </a:r>
+                      <a:endParaRPr lang="en-US" sz="1300" b="0" i="0" u="none" strike="noStrike">
+                        <a:solidFill>
+                          <a:srgbClr val="40485B"/>
+                        </a:solidFill>
+                        <a:effectLst/>
+                        <a:latin typeface="Helvetica" pitchFamily="2" charset="0"/>
+                      </a:endParaRPr>
+                    </a:p>
+                  </a:txBody>
+                  <a:tcPr marL="7613" marR="7613" marT="45676" marB="45676" anchor="b"/>
+                </a:tc>
+                <a:tc>
+                  <a:txBody>
+                    <a:bodyPr/>
+                    <a:lstStyle/>
+                    <a:p>
+                      <a:pPr algn="l" fontAlgn="b"/>
+                      <a:r>
+                        <a:rPr lang="en-US" sz="1300" u="none" strike="noStrike">
+                          <a:effectLst/>
+                        </a:rPr>
+                        <a:t>Customer - frequentRenterPoints -&gt; method</a:t>
+                      </a:r>
+                      <a:endParaRPr lang="en-US" sz="1300" b="0" i="0" u="none" strike="noStrike">
+                        <a:solidFill>
+                          <a:srgbClr val="40485B"/>
+                        </a:solidFill>
+                        <a:effectLst/>
+                        <a:latin typeface="Helvetica" pitchFamily="2" charset="0"/>
+                      </a:endParaRPr>
+                    </a:p>
+                  </a:txBody>
+                  <a:tcPr marL="7613" marR="7613" marT="45676" marB="45676" anchor="b"/>
+                </a:tc>
+                <a:tc>
+                  <a:txBody>
+                    <a:bodyPr/>
+                    <a:lstStyle/>
+                    <a:p>
+                      <a:pPr algn="l" fontAlgn="b"/>
+                      <a:r>
+                        <a:rPr lang="en-US" sz="1300" u="none" strike="noStrike">
+                          <a:effectLst/>
+                        </a:rPr>
+                        <a:t>Extract Method(110)</a:t>
+                      </a:r>
+                      <a:endParaRPr lang="en-US" sz="1300" b="0" i="0" u="none" strike="noStrike">
+                        <a:solidFill>
+                          <a:srgbClr val="40485B"/>
+                        </a:solidFill>
+                        <a:effectLst/>
+                        <a:latin typeface="Helvetica" pitchFamily="2" charset="0"/>
+                      </a:endParaRPr>
+                    </a:p>
+                  </a:txBody>
+                  <a:tcPr marL="7613" marR="7613" marT="45676" marB="45676" anchor="b"/>
+                </a:tc>
+                <a:extLst>
+                  <a:ext uri="{0D108BD9-81ED-4DB2-BD59-A6C34878D82A}">
+                    <a16:rowId xmlns:a16="http://schemas.microsoft.com/office/drawing/2014/main" val="976802211"/>
+                  </a:ext>
+                </a:extLst>
+              </a:tr>
+              <a:tr h="286235">
+                <a:tc>
+                  <a:txBody>
+                    <a:bodyPr/>
+                    <a:lstStyle/>
+                    <a:p>
+                      <a:pPr algn="l" fontAlgn="b"/>
+                      <a:r>
+                        <a:rPr lang="en-US" sz="1300" u="none" strike="noStrike">
+                          <a:effectLst/>
+                        </a:rPr>
+                        <a:t>v5</a:t>
+                      </a:r>
+                      <a:endParaRPr lang="en-US" sz="1300" b="0" i="0" u="none" strike="noStrike">
+                        <a:solidFill>
+                          <a:srgbClr val="40485B"/>
+                        </a:solidFill>
+                        <a:effectLst/>
+                        <a:latin typeface="Helvetica" pitchFamily="2" charset="0"/>
+                      </a:endParaRPr>
+                    </a:p>
+                  </a:txBody>
+                  <a:tcPr marL="7613" marR="7613" marT="45676" marB="45676" anchor="b"/>
+                </a:tc>
+                <a:tc>
+                  <a:txBody>
+                    <a:bodyPr/>
+                    <a:lstStyle/>
+                    <a:p>
+                      <a:pPr algn="l" fontAlgn="b"/>
+                      <a:r>
+                        <a:rPr lang="en-US" sz="1300" u="none" strike="noStrike">
+                          <a:effectLst/>
+                        </a:rPr>
+                        <a:t>Customer - totalAmount -&gt; method</a:t>
+                      </a:r>
+                      <a:endParaRPr lang="en-US" sz="1300" b="0" i="0" u="none" strike="noStrike">
+                        <a:solidFill>
+                          <a:srgbClr val="40485B"/>
+                        </a:solidFill>
+                        <a:effectLst/>
+                        <a:latin typeface="Helvetica" pitchFamily="2" charset="0"/>
+                      </a:endParaRPr>
+                    </a:p>
+                  </a:txBody>
+                  <a:tcPr marL="7613" marR="7613" marT="45676" marB="45676" anchor="b"/>
+                </a:tc>
+                <a:tc>
+                  <a:txBody>
+                    <a:bodyPr/>
+                    <a:lstStyle/>
+                    <a:p>
+                      <a:pPr algn="l" fontAlgn="b"/>
+                      <a:r>
+                        <a:rPr lang="en-US" sz="1300" u="none" strike="noStrike">
+                          <a:effectLst/>
+                        </a:rPr>
+                        <a:t>Replace tmp with query(120)：</a:t>
+                      </a:r>
+                      <a:r>
+                        <a:rPr lang="zh-CN" altLang="en-US" sz="1300" u="none" strike="noStrike">
+                          <a:effectLst/>
+                        </a:rPr>
+                        <a:t>性能？</a:t>
+                      </a:r>
+                      <a:endParaRPr lang="zh-CN" altLang="en-US" sz="1300" b="0" i="0" u="none" strike="noStrike">
+                        <a:solidFill>
+                          <a:srgbClr val="40485B"/>
+                        </a:solidFill>
+                        <a:effectLst/>
+                        <a:latin typeface="Helvetica" pitchFamily="2" charset="0"/>
+                      </a:endParaRPr>
+                    </a:p>
+                  </a:txBody>
+                  <a:tcPr marL="7613" marR="7613" marT="45676" marB="45676" anchor="b"/>
+                </a:tc>
+                <a:extLst>
+                  <a:ext uri="{0D108BD9-81ED-4DB2-BD59-A6C34878D82A}">
+                    <a16:rowId xmlns:a16="http://schemas.microsoft.com/office/drawing/2014/main" val="953438647"/>
+                  </a:ext>
+                </a:extLst>
+              </a:tr>
+              <a:tr h="286235">
+                <a:tc>
+                  <a:txBody>
+                    <a:bodyPr/>
+                    <a:lstStyle/>
+                    <a:p>
+                      <a:pPr algn="l" fontAlgn="b"/>
+                      <a:r>
+                        <a:rPr lang="en-US" sz="1300" u="none" strike="noStrike">
+                          <a:effectLst/>
+                        </a:rPr>
+                        <a:t>v6</a:t>
+                      </a:r>
+                      <a:endParaRPr lang="en-US" sz="1300" b="0" i="0" u="none" strike="noStrike">
+                        <a:solidFill>
+                          <a:srgbClr val="40485B"/>
+                        </a:solidFill>
+                        <a:effectLst/>
+                        <a:latin typeface="Helvetica" pitchFamily="2" charset="0"/>
+                      </a:endParaRPr>
+                    </a:p>
+                  </a:txBody>
+                  <a:tcPr marL="7613" marR="7613" marT="45676" marB="45676" anchor="b"/>
+                </a:tc>
+                <a:tc>
+                  <a:txBody>
+                    <a:bodyPr/>
+                    <a:lstStyle/>
+                    <a:p>
+                      <a:pPr algn="l" fontAlgn="b"/>
+                      <a:r>
+                        <a:rPr lang="en-US" sz="1300" u="none" strike="noStrike">
+                          <a:effectLst/>
+                        </a:rPr>
+                        <a:t>Customer - frequentRenterPoints -&gt; method</a:t>
+                      </a:r>
+                      <a:endParaRPr lang="en-US" sz="1300" b="0" i="0" u="none" strike="noStrike">
+                        <a:solidFill>
+                          <a:srgbClr val="40485B"/>
+                        </a:solidFill>
+                        <a:effectLst/>
+                        <a:latin typeface="Helvetica" pitchFamily="2" charset="0"/>
+                      </a:endParaRPr>
+                    </a:p>
+                  </a:txBody>
+                  <a:tcPr marL="7613" marR="7613" marT="45676" marB="45676" anchor="b"/>
+                </a:tc>
+                <a:tc>
+                  <a:txBody>
+                    <a:bodyPr/>
+                    <a:lstStyle/>
+                    <a:p>
+                      <a:pPr algn="l" fontAlgn="b"/>
+                      <a:r>
+                        <a:rPr lang="en-US" sz="1300" u="none" strike="noStrike">
+                          <a:effectLst/>
+                        </a:rPr>
+                        <a:t>Replace tmp with query(120)：</a:t>
+                      </a:r>
+                      <a:r>
+                        <a:rPr lang="zh-CN" altLang="en-US" sz="1300" u="none" strike="noStrike">
+                          <a:effectLst/>
+                        </a:rPr>
+                        <a:t>性能？</a:t>
+                      </a:r>
+                      <a:endParaRPr lang="zh-CN" altLang="en-US" sz="1300" b="0" i="0" u="none" strike="noStrike">
+                        <a:solidFill>
+                          <a:srgbClr val="40485B"/>
+                        </a:solidFill>
+                        <a:effectLst/>
+                        <a:latin typeface="Helvetica" pitchFamily="2" charset="0"/>
+                      </a:endParaRPr>
+                    </a:p>
+                  </a:txBody>
+                  <a:tcPr marL="7613" marR="7613" marT="45676" marB="45676" anchor="b"/>
+                </a:tc>
+                <a:extLst>
+                  <a:ext uri="{0D108BD9-81ED-4DB2-BD59-A6C34878D82A}">
+                    <a16:rowId xmlns:a16="http://schemas.microsoft.com/office/drawing/2014/main" val="537936278"/>
+                  </a:ext>
+                </a:extLst>
+              </a:tr>
+              <a:tr h="481119">
+                <a:tc>
+                  <a:txBody>
+                    <a:bodyPr/>
+                    <a:lstStyle/>
+                    <a:p>
+                      <a:pPr algn="l" fontAlgn="b"/>
+                      <a:r>
+                        <a:rPr lang="en-US" sz="1300" u="none" strike="noStrike">
+                          <a:effectLst/>
+                        </a:rPr>
+                        <a:t>v7</a:t>
+                      </a:r>
+                      <a:endParaRPr lang="en-US" sz="1300" b="0" i="0" u="none" strike="noStrike">
+                        <a:solidFill>
+                          <a:srgbClr val="40485B"/>
+                        </a:solidFill>
+                        <a:effectLst/>
+                        <a:latin typeface="Helvetica" pitchFamily="2" charset="0"/>
+                      </a:endParaRPr>
+                    </a:p>
+                  </a:txBody>
+                  <a:tcPr marL="7613" marR="7613" marT="7613" marB="0" anchor="b"/>
+                </a:tc>
+                <a:tc>
+                  <a:txBody>
+                    <a:bodyPr/>
+                    <a:lstStyle/>
+                    <a:p>
+                      <a:pPr algn="l" fontAlgn="b"/>
+                      <a:r>
+                        <a:rPr lang="en-US" sz="1300" u="none" strike="noStrike">
+                          <a:effectLst/>
+                        </a:rPr>
+                        <a:t>Rental.getCharge()-&gt;Moview.getCharge()</a:t>
+                      </a:r>
+                      <a:br>
+                        <a:rPr lang="en-US" sz="1300" u="none" strike="noStrike">
+                          <a:effectLst/>
+                        </a:rPr>
+                      </a:br>
+                      <a:r>
+                        <a:rPr lang="en-US" sz="1300" u="none" strike="noStrike">
+                          <a:effectLst/>
+                        </a:rPr>
+                        <a:t>Rental.getFrequentRenterPoints()-&gt;Movie.getFrequentRenterPoints()</a:t>
+                      </a:r>
+                      <a:endParaRPr lang="en-US" sz="1300" b="0" i="0" u="none" strike="noStrike">
+                        <a:solidFill>
+                          <a:srgbClr val="40485B"/>
+                        </a:solidFill>
+                        <a:effectLst/>
+                        <a:latin typeface="Helvetica" pitchFamily="2" charset="0"/>
+                      </a:endParaRPr>
+                    </a:p>
+                  </a:txBody>
+                  <a:tcPr marL="7613" marR="7613" marT="45676" marB="45676" anchor="b"/>
+                </a:tc>
+                <a:tc>
+                  <a:txBody>
+                    <a:bodyPr/>
+                    <a:lstStyle/>
+                    <a:p>
+                      <a:pPr algn="l" fontAlgn="b"/>
+                      <a:r>
+                        <a:rPr lang="en-US" sz="1300" u="none" strike="noStrike">
+                          <a:effectLst/>
+                        </a:rPr>
+                        <a:t>Move Method(142)</a:t>
+                      </a:r>
+                      <a:endParaRPr lang="en-US" sz="1300" b="0" i="0" u="none" strike="noStrike">
+                        <a:solidFill>
+                          <a:srgbClr val="40485B"/>
+                        </a:solidFill>
+                        <a:effectLst/>
+                        <a:latin typeface="Helvetica" pitchFamily="2" charset="0"/>
+                      </a:endParaRPr>
+                    </a:p>
+                  </a:txBody>
+                  <a:tcPr marL="7613" marR="7613" marT="45676" marB="45676" anchor="b"/>
+                </a:tc>
+                <a:extLst>
+                  <a:ext uri="{0D108BD9-81ED-4DB2-BD59-A6C34878D82A}">
+                    <a16:rowId xmlns:a16="http://schemas.microsoft.com/office/drawing/2014/main" val="3026893733"/>
+                  </a:ext>
+                </a:extLst>
+              </a:tr>
+              <a:tr h="893217">
+                <a:tc>
+                  <a:txBody>
+                    <a:bodyPr/>
+                    <a:lstStyle/>
+                    <a:p>
+                      <a:pPr algn="l" fontAlgn="b"/>
+                      <a:r>
+                        <a:rPr lang="en-US" sz="1300" u="none" strike="noStrike">
+                          <a:effectLst/>
+                        </a:rPr>
+                        <a:t>v8</a:t>
+                      </a:r>
+                      <a:endParaRPr lang="en-US" sz="1300" b="0" i="0" u="none" strike="noStrike">
+                        <a:solidFill>
+                          <a:srgbClr val="40485B"/>
+                        </a:solidFill>
+                        <a:effectLst/>
+                        <a:latin typeface="Helvetica" pitchFamily="2" charset="0"/>
+                      </a:endParaRPr>
+                    </a:p>
+                  </a:txBody>
+                  <a:tcPr marL="7613" marR="7613" marT="45676" marB="45676" anchor="b"/>
+                </a:tc>
+                <a:tc>
+                  <a:txBody>
+                    <a:bodyPr/>
+                    <a:lstStyle/>
+                    <a:p>
+                      <a:pPr algn="l" fontAlgn="b"/>
+                      <a:r>
+                        <a:rPr lang="en-US" sz="1300" u="none" strike="noStrike">
+                          <a:effectLst/>
+                        </a:rPr>
+                        <a:t>Movie </a:t>
+                      </a:r>
+                      <a:r>
+                        <a:rPr lang="zh-CN" altLang="en-US" sz="1300" u="none" strike="noStrike">
+                          <a:effectLst/>
+                        </a:rPr>
+                        <a:t>类型</a:t>
+                      </a:r>
+                      <a:endParaRPr lang="zh-CN" altLang="en-US" sz="1300" b="0" i="0" u="none" strike="noStrike">
+                        <a:solidFill>
+                          <a:srgbClr val="40485B"/>
+                        </a:solidFill>
+                        <a:effectLst/>
+                        <a:latin typeface="Helvetica" pitchFamily="2" charset="0"/>
+                      </a:endParaRPr>
+                    </a:p>
+                  </a:txBody>
+                  <a:tcPr marL="7613" marR="7613" marT="45676" marB="45676" anchor="b"/>
+                </a:tc>
+                <a:tc>
+                  <a:txBody>
+                    <a:bodyPr/>
+                    <a:lstStyle/>
+                    <a:p>
+                      <a:pPr algn="l" fontAlgn="b"/>
+                      <a:r>
+                        <a:rPr lang="en-US" sz="1300" u="none" strike="noStrike">
+                          <a:effectLst/>
+                        </a:rPr>
+                        <a:t>Replace Type Code with State/Strategy(227)</a:t>
+                      </a:r>
+                      <a:br>
+                        <a:rPr lang="en-US" sz="1300" u="none" strike="noStrike">
+                          <a:effectLst/>
+                        </a:rPr>
+                      </a:br>
+                      <a:r>
+                        <a:rPr lang="en-US" sz="1300" u="none" strike="noStrike">
+                          <a:effectLst/>
+                        </a:rPr>
+                        <a:t>Self Encapsulate(171)</a:t>
+                      </a:r>
+                      <a:br>
+                        <a:rPr lang="en-US" sz="1300" u="none" strike="noStrike">
+                          <a:effectLst/>
+                        </a:rPr>
+                      </a:br>
+                      <a:r>
+                        <a:rPr lang="en-US" sz="1300" u="none" strike="noStrike">
+                          <a:effectLst/>
+                        </a:rPr>
+                        <a:t>:</a:t>
+                      </a:r>
+                      <a:r>
+                        <a:rPr lang="zh-CN" altLang="en-US" sz="1300" u="none" strike="noStrike">
+                          <a:effectLst/>
+                        </a:rPr>
+                        <a:t>引入 </a:t>
+                      </a:r>
+                      <a:r>
+                        <a:rPr lang="en-US" sz="1300" u="none" strike="noStrike">
+                          <a:effectLst/>
+                        </a:rPr>
+                        <a:t>State </a:t>
+                      </a:r>
+                      <a:r>
+                        <a:rPr lang="zh-CN" altLang="en-US" sz="1300" u="none" strike="noStrike">
+                          <a:effectLst/>
+                        </a:rPr>
+                        <a:t>模式</a:t>
+                      </a:r>
+                      <a:endParaRPr lang="zh-CN" altLang="en-US" sz="1300" b="0" i="0" u="none" strike="noStrike">
+                        <a:solidFill>
+                          <a:srgbClr val="40485B"/>
+                        </a:solidFill>
+                        <a:effectLst/>
+                        <a:latin typeface="Helvetica" pitchFamily="2" charset="0"/>
+                      </a:endParaRPr>
+                    </a:p>
+                  </a:txBody>
+                  <a:tcPr marL="7613" marR="7613" marT="45676" marB="45676" anchor="b"/>
+                </a:tc>
+                <a:extLst>
+                  <a:ext uri="{0D108BD9-81ED-4DB2-BD59-A6C34878D82A}">
+                    <a16:rowId xmlns:a16="http://schemas.microsoft.com/office/drawing/2014/main" val="2434128514"/>
+                  </a:ext>
+                </a:extLst>
+              </a:tr>
+              <a:tr h="286235">
+                <a:tc>
+                  <a:txBody>
+                    <a:bodyPr/>
+                    <a:lstStyle/>
+                    <a:p>
+                      <a:pPr algn="l" fontAlgn="b"/>
+                      <a:r>
+                        <a:rPr lang="en-US" sz="1300" u="none" strike="noStrike">
+                          <a:effectLst/>
+                        </a:rPr>
+                        <a:t>v9</a:t>
+                      </a:r>
+                      <a:endParaRPr lang="en-US" sz="1300" b="0" i="0" u="none" strike="noStrike">
+                        <a:solidFill>
+                          <a:srgbClr val="40485B"/>
+                        </a:solidFill>
+                        <a:effectLst/>
+                        <a:latin typeface="Helvetica" pitchFamily="2" charset="0"/>
+                      </a:endParaRPr>
+                    </a:p>
+                  </a:txBody>
+                  <a:tcPr marL="7613" marR="7613" marT="45676" marB="45676" anchor="b"/>
+                </a:tc>
+                <a:tc>
+                  <a:txBody>
+                    <a:bodyPr/>
+                    <a:lstStyle/>
+                    <a:p>
+                      <a:pPr algn="l" fontAlgn="b"/>
+                      <a:r>
+                        <a:rPr lang="en-US" sz="1300" u="none" strike="noStrike">
+                          <a:effectLst/>
+                        </a:rPr>
+                        <a:t>Movie - getCharge</a:t>
+                      </a:r>
+                      <a:endParaRPr lang="en-US" sz="1300" b="0" i="0" u="none" strike="noStrike">
+                        <a:solidFill>
+                          <a:srgbClr val="40485B"/>
+                        </a:solidFill>
+                        <a:effectLst/>
+                        <a:latin typeface="Helvetica" pitchFamily="2" charset="0"/>
+                      </a:endParaRPr>
+                    </a:p>
+                  </a:txBody>
+                  <a:tcPr marL="7613" marR="7613" marT="45676" marB="45676" anchor="b"/>
+                </a:tc>
+                <a:tc>
+                  <a:txBody>
+                    <a:bodyPr/>
+                    <a:lstStyle/>
+                    <a:p>
+                      <a:pPr algn="l" fontAlgn="b"/>
+                      <a:r>
+                        <a:rPr lang="en-US" sz="1300" u="none" strike="noStrike">
+                          <a:effectLst/>
+                        </a:rPr>
+                        <a:t>Move Method(142):</a:t>
+                      </a:r>
+                      <a:r>
+                        <a:rPr lang="zh-CN" altLang="en-US" sz="1300" u="none" strike="noStrike">
+                          <a:effectLst/>
+                        </a:rPr>
+                        <a:t>引入 </a:t>
+                      </a:r>
+                      <a:r>
+                        <a:rPr lang="en-US" sz="1300" u="none" strike="noStrike">
+                          <a:effectLst/>
+                        </a:rPr>
+                        <a:t>State </a:t>
+                      </a:r>
+                      <a:r>
+                        <a:rPr lang="zh-CN" altLang="en-US" sz="1300" u="none" strike="noStrike">
+                          <a:effectLst/>
+                        </a:rPr>
+                        <a:t>模式</a:t>
+                      </a:r>
+                      <a:endParaRPr lang="zh-CN" altLang="en-US" sz="1300" b="0" i="0" u="none" strike="noStrike">
+                        <a:solidFill>
+                          <a:srgbClr val="40485B"/>
+                        </a:solidFill>
+                        <a:effectLst/>
+                        <a:latin typeface="Helvetica" pitchFamily="2" charset="0"/>
+                      </a:endParaRPr>
+                    </a:p>
+                  </a:txBody>
+                  <a:tcPr marL="7613" marR="7613" marT="45676" marB="45676" anchor="b"/>
+                </a:tc>
+                <a:extLst>
+                  <a:ext uri="{0D108BD9-81ED-4DB2-BD59-A6C34878D82A}">
+                    <a16:rowId xmlns:a16="http://schemas.microsoft.com/office/drawing/2014/main" val="2793745187"/>
+                  </a:ext>
+                </a:extLst>
+              </a:tr>
+              <a:tr h="286235">
+                <a:tc>
+                  <a:txBody>
+                    <a:bodyPr/>
+                    <a:lstStyle/>
+                    <a:p>
+                      <a:pPr algn="l" fontAlgn="b"/>
+                      <a:r>
+                        <a:rPr lang="en-US" sz="1300" u="none" strike="noStrike">
+                          <a:effectLst/>
+                        </a:rPr>
+                        <a:t>v10</a:t>
+                      </a:r>
+                      <a:endParaRPr lang="en-US" sz="1300" b="0" i="0" u="none" strike="noStrike">
+                        <a:solidFill>
+                          <a:srgbClr val="40485B"/>
+                        </a:solidFill>
+                        <a:effectLst/>
+                        <a:latin typeface="Helvetica" pitchFamily="2" charset="0"/>
+                      </a:endParaRPr>
+                    </a:p>
+                  </a:txBody>
+                  <a:tcPr marL="7613" marR="7613" marT="45676" marB="45676" anchor="b"/>
+                </a:tc>
+                <a:tc>
+                  <a:txBody>
+                    <a:bodyPr/>
+                    <a:lstStyle/>
+                    <a:p>
+                      <a:pPr algn="l" fontAlgn="b"/>
+                      <a:r>
+                        <a:rPr lang="en-US" sz="1300" u="none" strike="noStrike">
+                          <a:effectLst/>
+                        </a:rPr>
+                        <a:t>Price- getCharge switch</a:t>
+                      </a:r>
+                      <a:endParaRPr lang="en-US" sz="1300" b="0" i="0" u="none" strike="noStrike">
+                        <a:solidFill>
+                          <a:srgbClr val="40485B"/>
+                        </a:solidFill>
+                        <a:effectLst/>
+                        <a:latin typeface="Helvetica" pitchFamily="2" charset="0"/>
+                      </a:endParaRPr>
+                    </a:p>
+                  </a:txBody>
+                  <a:tcPr marL="7613" marR="7613" marT="45676" marB="45676" anchor="b"/>
+                </a:tc>
+                <a:tc>
+                  <a:txBody>
+                    <a:bodyPr/>
+                    <a:lstStyle/>
+                    <a:p>
+                      <a:pPr algn="l" fontAlgn="b"/>
+                      <a:r>
+                        <a:rPr lang="en-US" sz="1300" u="none" strike="noStrike">
+                          <a:effectLst/>
+                        </a:rPr>
+                        <a:t>Replace Conditional with Polymorphism(255):</a:t>
+                      </a:r>
+                      <a:r>
+                        <a:rPr lang="zh-CN" altLang="en-US" sz="1300" u="none" strike="noStrike">
+                          <a:effectLst/>
+                        </a:rPr>
+                        <a:t>引入 </a:t>
+                      </a:r>
+                      <a:r>
+                        <a:rPr lang="en-US" sz="1300" u="none" strike="noStrike">
+                          <a:effectLst/>
+                        </a:rPr>
+                        <a:t>State </a:t>
+                      </a:r>
+                      <a:r>
+                        <a:rPr lang="zh-CN" altLang="en-US" sz="1300" u="none" strike="noStrike">
+                          <a:effectLst/>
+                        </a:rPr>
+                        <a:t>模式</a:t>
+                      </a:r>
+                      <a:endParaRPr lang="zh-CN" altLang="en-US" sz="1300" b="0" i="0" u="none" strike="noStrike">
+                        <a:solidFill>
+                          <a:srgbClr val="40485B"/>
+                        </a:solidFill>
+                        <a:effectLst/>
+                        <a:latin typeface="Helvetica" pitchFamily="2" charset="0"/>
+                      </a:endParaRPr>
+                    </a:p>
+                  </a:txBody>
+                  <a:tcPr marL="7613" marR="7613" marT="45676" marB="45676" anchor="b"/>
+                </a:tc>
+                <a:extLst>
+                  <a:ext uri="{0D108BD9-81ED-4DB2-BD59-A6C34878D82A}">
+                    <a16:rowId xmlns:a16="http://schemas.microsoft.com/office/drawing/2014/main" val="763801060"/>
+                  </a:ext>
+                </a:extLst>
+              </a:tr>
+              <a:tr h="286235">
+                <a:tc>
+                  <a:txBody>
+                    <a:bodyPr/>
+                    <a:lstStyle/>
+                    <a:p>
+                      <a:pPr algn="l" fontAlgn="b"/>
+                      <a:r>
+                        <a:rPr lang="en-US" sz="1300" u="none" strike="noStrike">
+                          <a:effectLst/>
+                        </a:rPr>
+                        <a:t>v11</a:t>
+                      </a:r>
+                      <a:endParaRPr lang="en-US" sz="1300" b="0" i="0" u="none" strike="noStrike">
+                        <a:solidFill>
+                          <a:srgbClr val="40485B"/>
+                        </a:solidFill>
+                        <a:effectLst/>
+                        <a:latin typeface="Helvetica" pitchFamily="2" charset="0"/>
+                      </a:endParaRPr>
+                    </a:p>
+                  </a:txBody>
+                  <a:tcPr marL="7613" marR="7613" marT="45676" marB="45676" anchor="b"/>
+                </a:tc>
+                <a:tc>
+                  <a:txBody>
+                    <a:bodyPr/>
+                    <a:lstStyle/>
+                    <a:p>
+                      <a:pPr algn="l" fontAlgn="b"/>
+                      <a:r>
+                        <a:rPr lang="en-US" sz="1300" u="none" strike="noStrike">
+                          <a:effectLst/>
+                        </a:rPr>
+                        <a:t>Movie - getFrequentRenterPoints switch</a:t>
+                      </a:r>
+                      <a:endParaRPr lang="en-US" sz="1300" b="0" i="0" u="none" strike="noStrike">
+                        <a:solidFill>
+                          <a:srgbClr val="40485B"/>
+                        </a:solidFill>
+                        <a:effectLst/>
+                        <a:latin typeface="Helvetica" pitchFamily="2" charset="0"/>
+                      </a:endParaRPr>
+                    </a:p>
+                  </a:txBody>
+                  <a:tcPr marL="7613" marR="7613" marT="45676" marB="45676" anchor="b"/>
+                </a:tc>
+                <a:tc>
+                  <a:txBody>
+                    <a:bodyPr/>
+                    <a:lstStyle/>
+                    <a:p>
+                      <a:pPr algn="l" fontAlgn="b"/>
+                      <a:r>
+                        <a:rPr lang="en-US" sz="1300" u="none" strike="noStrike" dirty="0">
+                          <a:effectLst/>
+                        </a:rPr>
+                        <a:t>Replace Conditional with Polymorphism(255):</a:t>
+                      </a:r>
+                      <a:r>
+                        <a:rPr lang="zh-CN" altLang="en-US" sz="1300" u="none" strike="noStrike" dirty="0">
+                          <a:effectLst/>
+                        </a:rPr>
+                        <a:t>引入 </a:t>
+                      </a:r>
+                      <a:r>
+                        <a:rPr lang="en-US" sz="1300" u="none" strike="noStrike" dirty="0">
+                          <a:effectLst/>
+                        </a:rPr>
+                        <a:t>State </a:t>
+                      </a:r>
+                      <a:r>
+                        <a:rPr lang="zh-CN" altLang="en-US" sz="1300" u="none" strike="noStrike" dirty="0">
+                          <a:effectLst/>
+                        </a:rPr>
+                        <a:t>模式</a:t>
+                      </a:r>
+                      <a:endParaRPr lang="zh-CN" altLang="en-US" sz="1300" b="0" i="0" u="none" strike="noStrike" dirty="0">
+                        <a:solidFill>
+                          <a:srgbClr val="40485B"/>
+                        </a:solidFill>
+                        <a:effectLst/>
+                        <a:latin typeface="Helvetica" pitchFamily="2" charset="0"/>
+                      </a:endParaRPr>
+                    </a:p>
+                  </a:txBody>
+                  <a:tcPr marL="7613" marR="7613" marT="45676" marB="45676" anchor="b"/>
+                </a:tc>
+                <a:extLst>
+                  <a:ext uri="{0D108BD9-81ED-4DB2-BD59-A6C34878D82A}">
+                    <a16:rowId xmlns:a16="http://schemas.microsoft.com/office/drawing/2014/main" val="3939088498"/>
+                  </a:ext>
+                </a:extLst>
+              </a:tr>
+            </a:tbl>
+          </a:graphicData>
+        </a:graphic>
+      </p:graphicFrame>
     </p:spTree>
     <p:extLst>
       <p:ext uri="{BB962C8B-B14F-4D97-AF65-F5344CB8AC3E}">
-        <p14:creationId xmlns:p14="http://schemas.microsoft.com/office/powerpoint/2010/main" val="408522942"/>
+        <p14:creationId xmlns:p14="http://schemas.microsoft.com/office/powerpoint/2010/main" val="3689497042"/>
       </p:ext>
     </p:extLst>
   </p:cSld>
@@ -6079,10 +8572,38 @@
       </p:grpSpPr>
       <p:sp>
         <p:nvSpPr>
+          <p:cNvPr id="2" name="Title 1">
+            <a:extLst>
+              <a:ext uri="{FF2B5EF4-FFF2-40B4-BE49-F238E27FC236}">
+                <a16:creationId xmlns:a16="http://schemas.microsoft.com/office/drawing/2014/main" id="{5259FCE8-5209-B64C-B9C4-0B37367F284F}"/>
+              </a:ext>
+            </a:extLst>
+          </p:cNvPr>
+          <p:cNvSpPr>
+            <a:spLocks noGrp="1"/>
+          </p:cNvSpPr>
+          <p:nvPr>
+            <p:ph type="title"/>
+          </p:nvPr>
+        </p:nvSpPr>
+        <p:spPr/>
+        <p:txBody>
+          <a:bodyPr/>
+          <a:lstStyle/>
+          <a:p>
+            <a:r>
+              <a:rPr lang="en-CN" dirty="0"/>
+              <a:t>Why</a:t>
+            </a:r>
+          </a:p>
+        </p:txBody>
+      </p:sp>
+      <p:sp>
+        <p:nvSpPr>
           <p:cNvPr id="3" name="Content Placeholder 2">
             <a:extLst>
               <a:ext uri="{FF2B5EF4-FFF2-40B4-BE49-F238E27FC236}">
-                <a16:creationId xmlns:a16="http://schemas.microsoft.com/office/drawing/2014/main" id="{0DFF7551-37B6-B64E-94F3-D1994955645D}"/>
+                <a16:creationId xmlns:a16="http://schemas.microsoft.com/office/drawing/2014/main" id="{D5772FCB-8520-5940-B220-351F8CF69A3A}"/>
               </a:ext>
             </a:extLst>
           </p:cNvPr>
@@ -6093,479 +8614,84 @@
             <p:ph idx="1"/>
           </p:nvPr>
         </p:nvSpPr>
-        <p:spPr>
-          <a:xfrm>
-            <a:off x="838200" y="87086"/>
-            <a:ext cx="5076825" cy="6487885"/>
-          </a:xfrm>
-        </p:spPr>
-        <p:txBody>
-          <a:bodyPr>
-            <a:normAutofit/>
-          </a:bodyPr>
+        <p:spPr/>
+        <p:txBody>
+          <a:bodyPr/>
           <a:lstStyle/>
           <a:p>
-            <a:pPr marL="0" indent="0">
-              <a:buNone/>
-            </a:pPr>
-            <a:r>
-              <a:rPr lang="en-US" altLang="zh-CN" dirty="0">
-                <a:solidFill>
-                  <a:srgbClr val="0070C0"/>
-                </a:solidFill>
-              </a:rPr>
-              <a:t>When can refactoring?</a:t>
-            </a:r>
-          </a:p>
-          <a:p>
-            <a:r>
-              <a:rPr lang="en-US" altLang="zh-CN" sz="1600" dirty="0"/>
-              <a:t>Add</a:t>
-            </a:r>
-          </a:p>
-          <a:p>
-            <a:r>
-              <a:rPr lang="en-US" altLang="zh-CN" sz="1600" dirty="0"/>
-              <a:t>Bug</a:t>
-            </a:r>
-          </a:p>
-          <a:p>
-            <a:r>
-              <a:rPr lang="zh-CN" altLang="en-US" sz="1600" dirty="0"/>
-              <a:t>复审代码</a:t>
-            </a:r>
-            <a:br>
-              <a:rPr lang="zh-CN" altLang="en-US" dirty="0"/>
-            </a:br>
-            <a:endParaRPr lang="en-US" altLang="zh-CN" dirty="0"/>
-          </a:p>
-          <a:p>
-            <a:pPr marL="0" indent="0">
-              <a:buNone/>
-            </a:pPr>
-            <a:r>
-              <a:rPr lang="en-US" altLang="zh-CN" dirty="0">
-                <a:solidFill>
-                  <a:srgbClr val="0070C0"/>
-                </a:solidFill>
-              </a:rPr>
-              <a:t>When can not refactoring?</a:t>
-            </a:r>
-          </a:p>
-          <a:p>
-            <a:r>
-              <a:rPr lang="zh-CN" altLang="en-US" sz="1600" dirty="0"/>
-              <a:t>现有代码过于混乱</a:t>
-            </a:r>
-            <a:endParaRPr lang="en-US" altLang="zh-CN" sz="1600" dirty="0"/>
-          </a:p>
-          <a:p>
-            <a:r>
-              <a:rPr lang="en-US" altLang="zh-CN" sz="1600" dirty="0"/>
-              <a:t>Not working</a:t>
-            </a:r>
-          </a:p>
-          <a:p>
-            <a:r>
-              <a:rPr lang="en-US" altLang="zh-CN" sz="1600" dirty="0"/>
-              <a:t>Deadline</a:t>
-            </a:r>
-          </a:p>
-          <a:p>
-            <a:endParaRPr lang="en-US" altLang="zh-CN" dirty="0"/>
-          </a:p>
-          <a:p>
-            <a:endParaRPr lang="en-US" altLang="zh-CN" dirty="0"/>
-          </a:p>
-          <a:p>
-            <a:endParaRPr lang="en-CN" dirty="0"/>
-          </a:p>
-        </p:txBody>
-      </p:sp>
-      <p:sp>
-        <p:nvSpPr>
-          <p:cNvPr id="5" name="Content Placeholder 2">
-            <a:extLst>
-              <a:ext uri="{FF2B5EF4-FFF2-40B4-BE49-F238E27FC236}">
-                <a16:creationId xmlns:a16="http://schemas.microsoft.com/office/drawing/2014/main" id="{612E8317-E1F3-0048-ADEF-74519F2651C9}"/>
-              </a:ext>
-            </a:extLst>
-          </p:cNvPr>
-          <p:cNvSpPr txBox="1">
-            <a:spLocks/>
-          </p:cNvSpPr>
-          <p:nvPr/>
-        </p:nvSpPr>
-        <p:spPr>
-          <a:xfrm>
-            <a:off x="6276975" y="87086"/>
-            <a:ext cx="5076825" cy="6487885"/>
-          </a:xfrm>
-          <a:prstGeom prst="rect">
-            <a:avLst/>
-          </a:prstGeom>
-        </p:spPr>
-        <p:txBody>
-          <a:bodyPr vert="horz" lIns="91440" tIns="45720" rIns="91440" bIns="45720" rtlCol="0">
-            <a:normAutofit/>
-          </a:bodyPr>
-          <a:lstStyle>
-            <a:lvl1pPr marL="228600" indent="-228600" algn="l" defTabSz="914400" rtl="0" eaLnBrk="1" latinLnBrk="0" hangingPunct="1">
-              <a:lnSpc>
-                <a:spcPct val="90000"/>
-              </a:lnSpc>
-              <a:spcBef>
-                <a:spcPts val="1000"/>
-              </a:spcBef>
-              <a:buFont typeface="Arial" panose="020B0604020202020204" pitchFamily="34" charset="0"/>
-              <a:buChar char="•"/>
-              <a:defRPr sz="2800" kern="1200">
-                <a:solidFill>
-                  <a:schemeClr val="tx1"/>
-                </a:solidFill>
-                <a:latin typeface="+mn-lt"/>
-                <a:ea typeface="+mn-ea"/>
-                <a:cs typeface="+mn-cs"/>
-              </a:defRPr>
-            </a:lvl1pPr>
-            <a:lvl2pPr marL="685800" indent="-228600" algn="l" defTabSz="914400" rtl="0" eaLnBrk="1" latinLnBrk="0" hangingPunct="1">
-              <a:lnSpc>
-                <a:spcPct val="90000"/>
-              </a:lnSpc>
-              <a:spcBef>
-                <a:spcPts val="500"/>
-              </a:spcBef>
-              <a:buFont typeface="Arial" panose="020B0604020202020204" pitchFamily="34" charset="0"/>
-              <a:buChar char="•"/>
-              <a:defRPr sz="2400" kern="1200">
-                <a:solidFill>
-                  <a:schemeClr val="tx1"/>
-                </a:solidFill>
-                <a:latin typeface="+mn-lt"/>
-                <a:ea typeface="+mn-ea"/>
-                <a:cs typeface="+mn-cs"/>
-              </a:defRPr>
-            </a:lvl2pPr>
-            <a:lvl3pPr marL="1143000" indent="-228600" algn="l" defTabSz="914400" rtl="0" eaLnBrk="1" latinLnBrk="0" hangingPunct="1">
-              <a:lnSpc>
-                <a:spcPct val="90000"/>
-              </a:lnSpc>
-              <a:spcBef>
-                <a:spcPts val="500"/>
-              </a:spcBef>
-              <a:buFont typeface="Arial" panose="020B0604020202020204" pitchFamily="34" charset="0"/>
-              <a:buChar char="•"/>
-              <a:defRPr sz="2000" kern="1200">
-                <a:solidFill>
-                  <a:schemeClr val="tx1"/>
-                </a:solidFill>
-                <a:latin typeface="+mn-lt"/>
-                <a:ea typeface="+mn-ea"/>
-                <a:cs typeface="+mn-cs"/>
-              </a:defRPr>
-            </a:lvl3pPr>
-            <a:lvl4pPr marL="1600200" indent="-228600" algn="l" defTabSz="914400" rtl="0" eaLnBrk="1" latinLnBrk="0" hangingPunct="1">
-              <a:lnSpc>
-                <a:spcPct val="90000"/>
-              </a:lnSpc>
-              <a:spcBef>
-                <a:spcPts val="500"/>
-              </a:spcBef>
-              <a:buFont typeface="Arial" panose="020B0604020202020204" pitchFamily="34" charset="0"/>
-              <a:buChar char="•"/>
-              <a:defRPr sz="1800" kern="1200">
-                <a:solidFill>
-                  <a:schemeClr val="tx1"/>
-                </a:solidFill>
-                <a:latin typeface="+mn-lt"/>
-                <a:ea typeface="+mn-ea"/>
-                <a:cs typeface="+mn-cs"/>
-              </a:defRPr>
-            </a:lvl4pPr>
-            <a:lvl5pPr marL="2057400" indent="-228600" algn="l" defTabSz="914400" rtl="0" eaLnBrk="1" latinLnBrk="0" hangingPunct="1">
-              <a:lnSpc>
-                <a:spcPct val="90000"/>
-              </a:lnSpc>
-              <a:spcBef>
-                <a:spcPts val="500"/>
-              </a:spcBef>
-              <a:buFont typeface="Arial" panose="020B0604020202020204" pitchFamily="34" charset="0"/>
-              <a:buChar char="•"/>
-              <a:defRPr sz="1800" kern="1200">
-                <a:solidFill>
-                  <a:schemeClr val="tx1"/>
-                </a:solidFill>
-                <a:latin typeface="+mn-lt"/>
-                <a:ea typeface="+mn-ea"/>
-                <a:cs typeface="+mn-cs"/>
-              </a:defRPr>
-            </a:lvl5pPr>
-            <a:lvl6pPr marL="2514600" indent="-228600" algn="l" defTabSz="914400" rtl="0" eaLnBrk="1" latinLnBrk="0" hangingPunct="1">
-              <a:lnSpc>
-                <a:spcPct val="90000"/>
-              </a:lnSpc>
-              <a:spcBef>
-                <a:spcPts val="500"/>
-              </a:spcBef>
-              <a:buFont typeface="Arial" panose="020B0604020202020204" pitchFamily="34" charset="0"/>
-              <a:buChar char="•"/>
-              <a:defRPr sz="1800" kern="1200">
-                <a:solidFill>
-                  <a:schemeClr val="tx1"/>
-                </a:solidFill>
-                <a:latin typeface="+mn-lt"/>
-                <a:ea typeface="+mn-ea"/>
-                <a:cs typeface="+mn-cs"/>
-              </a:defRPr>
-            </a:lvl6pPr>
-            <a:lvl7pPr marL="2971800" indent="-228600" algn="l" defTabSz="914400" rtl="0" eaLnBrk="1" latinLnBrk="0" hangingPunct="1">
-              <a:lnSpc>
-                <a:spcPct val="90000"/>
-              </a:lnSpc>
-              <a:spcBef>
-                <a:spcPts val="500"/>
-              </a:spcBef>
-              <a:buFont typeface="Arial" panose="020B0604020202020204" pitchFamily="34" charset="0"/>
-              <a:buChar char="•"/>
-              <a:defRPr sz="1800" kern="1200">
-                <a:solidFill>
-                  <a:schemeClr val="tx1"/>
-                </a:solidFill>
-                <a:latin typeface="+mn-lt"/>
-                <a:ea typeface="+mn-ea"/>
-                <a:cs typeface="+mn-cs"/>
-              </a:defRPr>
-            </a:lvl7pPr>
-            <a:lvl8pPr marL="3429000" indent="-228600" algn="l" defTabSz="914400" rtl="0" eaLnBrk="1" latinLnBrk="0" hangingPunct="1">
-              <a:lnSpc>
-                <a:spcPct val="90000"/>
-              </a:lnSpc>
-              <a:spcBef>
-                <a:spcPts val="500"/>
-              </a:spcBef>
-              <a:buFont typeface="Arial" panose="020B0604020202020204" pitchFamily="34" charset="0"/>
-              <a:buChar char="•"/>
-              <a:defRPr sz="1800" kern="1200">
-                <a:solidFill>
-                  <a:schemeClr val="tx1"/>
-                </a:solidFill>
-                <a:latin typeface="+mn-lt"/>
-                <a:ea typeface="+mn-ea"/>
-                <a:cs typeface="+mn-cs"/>
-              </a:defRPr>
-            </a:lvl8pPr>
-            <a:lvl9pPr marL="3886200" indent="-228600" algn="l" defTabSz="914400" rtl="0" eaLnBrk="1" latinLnBrk="0" hangingPunct="1">
-              <a:lnSpc>
-                <a:spcPct val="90000"/>
-              </a:lnSpc>
-              <a:spcBef>
-                <a:spcPts val="500"/>
-              </a:spcBef>
-              <a:buFont typeface="Arial" panose="020B0604020202020204" pitchFamily="34" charset="0"/>
-              <a:buChar char="•"/>
-              <a:defRPr sz="1800" kern="1200">
-                <a:solidFill>
-                  <a:schemeClr val="tx1"/>
-                </a:solidFill>
-                <a:latin typeface="+mn-lt"/>
-                <a:ea typeface="+mn-ea"/>
-                <a:cs typeface="+mn-cs"/>
-              </a:defRPr>
-            </a:lvl9pPr>
-          </a:lstStyle>
-          <a:p>
-            <a:pPr marL="0" indent="0">
-              <a:lnSpc>
-                <a:spcPct val="70000"/>
-              </a:lnSpc>
-              <a:buNone/>
-            </a:pPr>
-            <a:endParaRPr lang="en-US" altLang="zh-CN" sz="1600" dirty="0"/>
-          </a:p>
-          <a:p>
-            <a:pPr>
-              <a:lnSpc>
-                <a:spcPct val="70000"/>
-              </a:lnSpc>
-            </a:pPr>
-            <a:r>
-              <a:rPr lang="en-CN" dirty="0">
-                <a:solidFill>
-                  <a:srgbClr val="0070C0"/>
-                </a:solidFill>
-              </a:rPr>
-              <a:t>重构与性能</a:t>
-            </a:r>
-          </a:p>
-          <a:p>
-            <a:pPr>
+            <a:pPr lvl="0">
               <a:lnSpc>
                 <a:spcPct val="100000"/>
               </a:lnSpc>
             </a:pPr>
             <a:r>
-              <a:rPr lang="en-CN" sz="1600" dirty="0">
-                <a:solidFill>
-                  <a:prstClr val="black"/>
-                </a:solidFill>
-              </a:rPr>
-              <a:t>多数重构提高性能</a:t>
-            </a:r>
-            <a:r>
-              <a:rPr lang="zh-CN" altLang="en-US" sz="1600" dirty="0">
-                <a:solidFill>
-                  <a:prstClr val="black"/>
-                </a:solidFill>
-              </a:rPr>
-              <a:t>，少数反而降低性能</a:t>
-            </a:r>
-            <a:endParaRPr lang="en-US" altLang="zh-CN" sz="1600" dirty="0">
-              <a:solidFill>
-                <a:prstClr val="black"/>
-              </a:solidFill>
-            </a:endParaRPr>
-          </a:p>
-          <a:p>
-            <a:pPr>
+              <a:rPr lang="zh-CN" altLang="en-US" dirty="0"/>
+              <a:t>代码结构逐渐流失 </a:t>
+            </a:r>
+            <a:r>
+              <a:rPr lang="en-US" altLang="zh-CN" dirty="0"/>
+              <a:t>-&gt;</a:t>
+            </a:r>
+            <a:r>
+              <a:rPr lang="zh-CN" altLang="en-US" dirty="0"/>
+              <a:t>改善设计</a:t>
+            </a:r>
+            <a:endParaRPr lang="en-US" altLang="zh-CN" dirty="0"/>
+          </a:p>
+          <a:p>
+            <a:pPr lvl="0">
               <a:lnSpc>
                 <a:spcPct val="100000"/>
               </a:lnSpc>
             </a:pPr>
             <a:r>
-              <a:rPr lang="zh-CN" altLang="en-US" sz="1600" dirty="0">
-                <a:solidFill>
-                  <a:prstClr val="black"/>
-                </a:solidFill>
-              </a:rPr>
-              <a:t>重构能使得性能提高更容易</a:t>
-            </a:r>
-            <a:endParaRPr lang="en-CN" sz="1600" dirty="0">
-              <a:solidFill>
-                <a:prstClr val="black"/>
-              </a:solidFill>
-            </a:endParaRPr>
-          </a:p>
-          <a:p>
-            <a:pPr>
+              <a:rPr lang="zh-CN" altLang="en-US" dirty="0"/>
+              <a:t>可读性</a:t>
+            </a:r>
+            <a:endParaRPr lang="en-US" altLang="zh-CN" dirty="0"/>
+          </a:p>
+          <a:p>
+            <a:pPr lvl="0">
               <a:lnSpc>
                 <a:spcPct val="100000"/>
               </a:lnSpc>
             </a:pPr>
             <a:r>
-              <a:rPr lang="en-CN" sz="1600" dirty="0">
-                <a:solidFill>
-                  <a:prstClr val="black"/>
-                </a:solidFill>
-              </a:rPr>
-              <a:t>二八原则</a:t>
-            </a:r>
-          </a:p>
-          <a:p>
-            <a:pPr>
+              <a:rPr lang="zh-CN" altLang="en-US" dirty="0"/>
+              <a:t>减少</a:t>
+            </a:r>
+            <a:r>
+              <a:rPr lang="en-US" altLang="zh-CN" dirty="0"/>
+              <a:t>bug</a:t>
+            </a:r>
+            <a:r>
+              <a:rPr lang="zh-CN" altLang="en-US" dirty="0"/>
+              <a:t>，帮助找到</a:t>
+            </a:r>
+            <a:r>
+              <a:rPr lang="en-US" altLang="zh-CN" dirty="0"/>
+              <a:t>bug</a:t>
+            </a:r>
+            <a:endParaRPr lang="en-CN" altLang="zh-CN" dirty="0"/>
+          </a:p>
+          <a:p>
+            <a:pPr lvl="0">
               <a:lnSpc>
                 <a:spcPct val="100000"/>
               </a:lnSpc>
             </a:pPr>
             <a:r>
-              <a:rPr lang="zh-CN" altLang="en-US" sz="1600" dirty="0">
-                <a:solidFill>
-                  <a:prstClr val="black"/>
-                </a:solidFill>
-              </a:rPr>
-              <a:t>集中测试</a:t>
-            </a:r>
-            <a:endParaRPr lang="en-US" altLang="zh-CN" sz="1600" dirty="0">
-              <a:solidFill>
-                <a:prstClr val="black"/>
-              </a:solidFill>
-            </a:endParaRPr>
-          </a:p>
-          <a:p>
-            <a:pPr>
-              <a:lnSpc>
-                <a:spcPct val="100000"/>
-              </a:lnSpc>
-            </a:pPr>
-            <a:r>
-              <a:rPr lang="zh-CN" altLang="en-CN" sz="1600" dirty="0">
-                <a:solidFill>
-                  <a:prstClr val="black"/>
-                </a:solidFill>
-              </a:rPr>
-              <a:t>测量</a:t>
-            </a:r>
-            <a:r>
-              <a:rPr lang="zh-CN" altLang="en-US" sz="1600" dirty="0">
-                <a:solidFill>
-                  <a:prstClr val="black"/>
-                </a:solidFill>
-              </a:rPr>
-              <a:t>工具</a:t>
-            </a:r>
-            <a:endParaRPr lang="en-US" altLang="zh-CN" sz="1600" dirty="0">
-              <a:solidFill>
-                <a:prstClr val="black"/>
-              </a:solidFill>
-            </a:endParaRPr>
-          </a:p>
-          <a:p>
-            <a:pPr>
-              <a:lnSpc>
-                <a:spcPct val="100000"/>
-              </a:lnSpc>
-            </a:pPr>
-            <a:r>
-              <a:rPr lang="zh-CN" altLang="en-US" sz="1600" dirty="0">
-                <a:solidFill>
-                  <a:prstClr val="black"/>
-                </a:solidFill>
-              </a:rPr>
-              <a:t>小幅度修改。每走一步，都需要编译、测试、再次度量。如果没有提高性能，应该撤销此次修改</a:t>
-            </a:r>
-            <a:endParaRPr lang="en-US" altLang="zh-CN" sz="1600" dirty="0">
-              <a:solidFill>
-                <a:prstClr val="black"/>
-              </a:solidFill>
-            </a:endParaRPr>
-          </a:p>
-          <a:p>
-            <a:pPr>
-              <a:lnSpc>
-                <a:spcPct val="100000"/>
-              </a:lnSpc>
-            </a:pPr>
-            <a:r>
-              <a:rPr lang="zh-CN" altLang="en-US" sz="1600" dirty="0">
-                <a:solidFill>
-                  <a:prstClr val="black"/>
-                </a:solidFill>
-              </a:rPr>
-              <a:t>持续提高</a:t>
-            </a:r>
-            <a:endParaRPr lang="en-US" altLang="zh-CN" sz="1600" dirty="0">
-              <a:solidFill>
-                <a:prstClr val="black"/>
-              </a:solidFill>
-            </a:endParaRPr>
-          </a:p>
-          <a:p>
-            <a:pPr>
-              <a:lnSpc>
-                <a:spcPct val="70000"/>
-              </a:lnSpc>
-            </a:pPr>
-            <a:endParaRPr lang="zh-CN" altLang="en-US" sz="1600" dirty="0">
-              <a:solidFill>
-                <a:prstClr val="black"/>
-              </a:solidFill>
-            </a:endParaRPr>
+              <a:rPr lang="zh-CN" altLang="en-US" dirty="0"/>
+              <a:t>提高编程速度</a:t>
+            </a:r>
+            <a:endParaRPr lang="en-US" altLang="zh-CN" dirty="0"/>
           </a:p>
         </p:txBody>
       </p:sp>
     </p:spTree>
     <p:extLst>
       <p:ext uri="{BB962C8B-B14F-4D97-AF65-F5344CB8AC3E}">
-        <p14:creationId xmlns:p14="http://schemas.microsoft.com/office/powerpoint/2010/main" val="618700296"/>
+        <p14:creationId xmlns:p14="http://schemas.microsoft.com/office/powerpoint/2010/main" val="412285015"/>
       </p:ext>
     </p:extLst>
   </p:cSld>
@@ -6594,10 +8720,39 @@
       </p:grpSpPr>
       <p:sp>
         <p:nvSpPr>
+          <p:cNvPr id="2" name="Title 1">
+            <a:extLst>
+              <a:ext uri="{FF2B5EF4-FFF2-40B4-BE49-F238E27FC236}">
+                <a16:creationId xmlns:a16="http://schemas.microsoft.com/office/drawing/2014/main" id="{B3236BFF-B70F-4A43-9A7A-F1BD6E68977D}"/>
+              </a:ext>
+            </a:extLst>
+          </p:cNvPr>
+          <p:cNvSpPr>
+            <a:spLocks noGrp="1"/>
+          </p:cNvSpPr>
+          <p:nvPr>
+            <p:ph type="title"/>
+          </p:nvPr>
+        </p:nvSpPr>
+        <p:spPr/>
+        <p:txBody>
+          <a:bodyPr/>
+          <a:lstStyle/>
+          <a:p>
+            <a:r>
+              <a:rPr lang="en-US" dirty="0"/>
+              <a:t>When can</a:t>
+            </a:r>
+            <a:endParaRPr lang="en-CN" dirty="0"/>
+          </a:p>
+        </p:txBody>
+      </p:sp>
+      <p:sp>
+        <p:nvSpPr>
           <p:cNvPr id="3" name="Content Placeholder 2">
             <a:extLst>
               <a:ext uri="{FF2B5EF4-FFF2-40B4-BE49-F238E27FC236}">
-                <a16:creationId xmlns:a16="http://schemas.microsoft.com/office/drawing/2014/main" id="{0DFF7551-37B6-B64E-94F3-D1994955645D}"/>
+                <a16:creationId xmlns:a16="http://schemas.microsoft.com/office/drawing/2014/main" id="{30D2ABFB-FAFA-354B-BB69-4DA29D3D250D}"/>
               </a:ext>
             </a:extLst>
           </p:cNvPr>
@@ -6608,121 +8763,12 @@
             <p:ph idx="1"/>
           </p:nvPr>
         </p:nvSpPr>
-        <p:spPr>
-          <a:xfrm>
-            <a:off x="6276975" y="348343"/>
-            <a:ext cx="5076825" cy="5693683"/>
-          </a:xfrm>
-        </p:spPr>
+        <p:spPr/>
         <p:txBody>
           <a:bodyPr>
-            <a:noAutofit/>
+            <a:normAutofit fontScale="92500" lnSpcReduction="10000"/>
           </a:bodyPr>
           <a:lstStyle/>
-          <a:p>
-            <a:pPr marL="0" indent="0">
-              <a:buNone/>
-            </a:pPr>
-            <a:r>
-              <a:rPr lang="zh-CN" altLang="en-US" dirty="0">
-                <a:solidFill>
-                  <a:srgbClr val="0070C0"/>
-                </a:solidFill>
-              </a:rPr>
-              <a:t>重构时</a:t>
-            </a:r>
-            <a:endParaRPr lang="en-US" altLang="zh-CN" dirty="0"/>
-          </a:p>
-          <a:p>
-            <a:r>
-              <a:rPr lang="zh-CN" altLang="en-US" sz="1600" dirty="0"/>
-              <a:t>两顶帽子：添加新功能（修改），以及重构</a:t>
-            </a:r>
-            <a:endParaRPr lang="en-US" altLang="zh-CN" sz="1600" dirty="0"/>
-          </a:p>
-          <a:p>
-            <a:pPr marL="0" indent="0">
-              <a:buNone/>
-            </a:pPr>
-            <a:r>
-              <a:rPr lang="zh-CN" altLang="en-US" sz="1600" dirty="0"/>
-              <a:t>软件开发过程中，经常变化帽子，但无论何时只能戴有一顶帽子。</a:t>
-            </a:r>
-            <a:endParaRPr lang="en-US" altLang="zh-CN" sz="1600" dirty="0"/>
-          </a:p>
-          <a:p>
-            <a:r>
-              <a:rPr lang="zh-CN" altLang="en-US" sz="1600" dirty="0"/>
-              <a:t>小步前进、频繁测试</a:t>
-            </a:r>
-            <a:endParaRPr lang="en-US" altLang="zh-CN" sz="1600" dirty="0"/>
-          </a:p>
-          <a:p>
-            <a:endParaRPr lang="en-US" altLang="zh-CN" sz="1600" dirty="0"/>
-          </a:p>
-          <a:p>
-            <a:pPr marL="0" indent="0">
-              <a:lnSpc>
-                <a:spcPct val="70000"/>
-              </a:lnSpc>
-              <a:buNone/>
-            </a:pPr>
-            <a:r>
-              <a:rPr lang="en-CN" dirty="0">
-                <a:solidFill>
-                  <a:srgbClr val="0070C0"/>
-                </a:solidFill>
-              </a:rPr>
-              <a:t>Problem in  refactoring?</a:t>
-            </a:r>
-          </a:p>
-          <a:p>
-            <a:pPr>
-              <a:lnSpc>
-                <a:spcPct val="70000"/>
-              </a:lnSpc>
-            </a:pPr>
-            <a:r>
-              <a:rPr lang="en-US" sz="1600" dirty="0" err="1"/>
-              <a:t>数据库</a:t>
-            </a:r>
-            <a:endParaRPr lang="en-US" sz="1600" dirty="0"/>
-          </a:p>
-          <a:p>
-            <a:pPr>
-              <a:lnSpc>
-                <a:spcPct val="70000"/>
-              </a:lnSpc>
-            </a:pPr>
-            <a:r>
-              <a:rPr lang="en-US" sz="1600" dirty="0" err="1"/>
-              <a:t>接口</a:t>
-            </a:r>
-            <a:r>
-              <a:rPr lang="en-US" sz="1600" dirty="0"/>
-              <a:t> : public / </a:t>
-            </a:r>
-            <a:r>
-              <a:rPr lang="en-US" sz="1600" dirty="0" err="1"/>
-              <a:t>pushlished</a:t>
-            </a:r>
-            <a:r>
-              <a:rPr lang="en-US" sz="1600" dirty="0"/>
-              <a:t> interface</a:t>
-            </a:r>
-          </a:p>
-          <a:p>
-            <a:pPr>
-              <a:lnSpc>
-                <a:spcPct val="70000"/>
-              </a:lnSpc>
-            </a:pPr>
-            <a:r>
-              <a:rPr lang="zh-CN" altLang="en-US" sz="1600" dirty="0"/>
-              <a:t>难以通过重构手法完成的设计改动</a:t>
-            </a:r>
-            <a:endParaRPr lang="en-US" altLang="zh-CN" sz="1600" dirty="0"/>
-          </a:p>
           <a:p>
             <a:pPr>
               <a:lnSpc>
@@ -6730,50 +8776,32 @@
               </a:lnSpc>
             </a:pPr>
             <a:r>
-              <a:rPr lang="zh-CN" altLang="en-US" sz="1600" dirty="0">
-                <a:solidFill>
-                  <a:srgbClr val="FF0000"/>
-                </a:solidFill>
-              </a:rPr>
-              <a:t>本书中重构手法的前提：</a:t>
-            </a:r>
-            <a:r>
-              <a:rPr lang="en-US" altLang="zh-CN" sz="1600" dirty="0">
-                <a:solidFill>
-                  <a:srgbClr val="FF0000"/>
-                </a:solidFill>
-              </a:rPr>
-              <a:t>“</a:t>
-            </a:r>
-            <a:r>
-              <a:rPr lang="zh-CN" altLang="en-US" sz="1600" dirty="0">
-                <a:solidFill>
-                  <a:srgbClr val="FF0000"/>
-                </a:solidFill>
-              </a:rPr>
-              <a:t>单进程软件</a:t>
-            </a:r>
-            <a:r>
-              <a:rPr lang="en-US" altLang="zh-CN" sz="1600" dirty="0">
-                <a:solidFill>
-                  <a:srgbClr val="FF0000"/>
-                </a:solidFill>
-              </a:rPr>
-              <a:t>”</a:t>
-            </a:r>
-            <a:r>
-              <a:rPr lang="zh-CN" altLang="en-US" sz="1600" dirty="0">
-                <a:solidFill>
-                  <a:srgbClr val="FF0000"/>
-                </a:solidFill>
-              </a:rPr>
-              <a:t>，并不适合并发和分布式程序设计。</a:t>
-            </a:r>
-            <a:endParaRPr lang="en-US" altLang="zh-CN" sz="1600" dirty="0">
-              <a:solidFill>
-                <a:srgbClr val="FF0000"/>
-              </a:solidFill>
-            </a:endParaRPr>
+              <a:rPr lang="en-US" altLang="zh-CN" dirty="0"/>
+              <a:t>Add</a:t>
+            </a:r>
+          </a:p>
+          <a:p>
+            <a:pPr>
+              <a:lnSpc>
+                <a:spcPct val="100000"/>
+              </a:lnSpc>
+            </a:pPr>
+            <a:r>
+              <a:rPr lang="en-US" altLang="zh-CN" dirty="0"/>
+              <a:t>Bug</a:t>
+            </a:r>
+          </a:p>
+          <a:p>
+            <a:pPr>
+              <a:lnSpc>
+                <a:spcPct val="100000"/>
+              </a:lnSpc>
+            </a:pPr>
+            <a:r>
+              <a:rPr lang="zh-CN" altLang="en-US" dirty="0"/>
+              <a:t>复审代码</a:t>
+            </a:r>
+            <a:endParaRPr lang="en-US" altLang="zh-CN" dirty="0"/>
           </a:p>
           <a:p>
             <a:pPr marL="0" indent="0">
@@ -6782,786 +8810,105 @@
               </a:lnSpc>
               <a:buNone/>
             </a:pPr>
-            <a:r>
-              <a:rPr lang="zh-CN" altLang="en-US" sz="1600" dirty="0">
-                <a:solidFill>
-                  <a:srgbClr val="FF0000"/>
-                </a:solidFill>
-              </a:rPr>
-              <a:t>     并发和分布式程序设计，有着完全不同的重构技术。</a:t>
-            </a:r>
-            <a:endParaRPr lang="en-US" altLang="zh-CN" sz="1600" dirty="0">
-              <a:solidFill>
-                <a:srgbClr val="FF0000"/>
-              </a:solidFill>
-            </a:endParaRPr>
-          </a:p>
-          <a:p>
-            <a:endParaRPr lang="en-US" altLang="zh-CN" sz="1600" dirty="0"/>
-          </a:p>
-          <a:p>
-            <a:r>
-              <a:rPr lang="zh-CN" altLang="en-US" sz="1600" dirty="0"/>
-              <a:t>寻找引用点</a:t>
-            </a:r>
-          </a:p>
-          <a:p>
-            <a:pPr marL="0" indent="0">
-              <a:buNone/>
-            </a:pPr>
-            <a:r>
-              <a:rPr lang="zh-CN" altLang="en-US" sz="1600" dirty="0"/>
-              <a:t>替换 ： 手动 </a:t>
-            </a:r>
-            <a:r>
-              <a:rPr lang="en-US" altLang="zh-CN" sz="1600" dirty="0"/>
-              <a:t>/</a:t>
-            </a:r>
-            <a:r>
-              <a:rPr lang="zh-CN" altLang="en-US" sz="1600" dirty="0"/>
-              <a:t> </a:t>
-            </a:r>
-            <a:r>
-              <a:rPr lang="en-US" altLang="zh-CN" sz="1600" dirty="0"/>
-              <a:t>Diff tool </a:t>
-            </a:r>
-          </a:p>
-          <a:p>
-            <a:pPr marL="0" indent="0">
-              <a:buNone/>
-            </a:pPr>
-            <a:r>
-              <a:rPr lang="zh-CN" altLang="en-US" sz="1600" dirty="0"/>
-              <a:t>查找 ： 反射</a:t>
-            </a:r>
-          </a:p>
-          <a:p>
-            <a:endParaRPr lang="en-US" altLang="zh-CN" sz="1600" dirty="0"/>
-          </a:p>
-          <a:p>
-            <a:pPr marL="0" indent="0">
-              <a:buNone/>
-            </a:pPr>
-            <a:endParaRPr lang="en-US" altLang="zh-CN" sz="1600" dirty="0"/>
-          </a:p>
-        </p:txBody>
-      </p:sp>
-      <p:sp>
-        <p:nvSpPr>
-          <p:cNvPr id="5" name="Content Placeholder 2">
-            <a:extLst>
-              <a:ext uri="{FF2B5EF4-FFF2-40B4-BE49-F238E27FC236}">
-                <a16:creationId xmlns:a16="http://schemas.microsoft.com/office/drawing/2014/main" id="{612E8317-E1F3-0048-ADEF-74519F2651C9}"/>
-              </a:ext>
-            </a:extLst>
-          </p:cNvPr>
-          <p:cNvSpPr txBox="1">
-            <a:spLocks/>
-          </p:cNvSpPr>
-          <p:nvPr/>
-        </p:nvSpPr>
-        <p:spPr>
-          <a:xfrm>
-            <a:off x="838200" y="348343"/>
-            <a:ext cx="5076825" cy="5693683"/>
-          </a:xfrm>
-          <a:prstGeom prst="rect">
-            <a:avLst/>
-          </a:prstGeom>
-        </p:spPr>
-        <p:txBody>
-          <a:bodyPr vert="horz" lIns="91440" tIns="45720" rIns="91440" bIns="45720" rtlCol="0">
-            <a:normAutofit fontScale="92500" lnSpcReduction="20000"/>
-          </a:bodyPr>
-          <a:lstStyle>
-            <a:lvl1pPr marL="228600" indent="-228600" algn="l" defTabSz="914400" rtl="0" eaLnBrk="1" latinLnBrk="0" hangingPunct="1">
-              <a:lnSpc>
-                <a:spcPct val="90000"/>
-              </a:lnSpc>
-              <a:spcBef>
-                <a:spcPts val="1000"/>
-              </a:spcBef>
-              <a:buFont typeface="Arial" panose="020B0604020202020204" pitchFamily="34" charset="0"/>
-              <a:buChar char="•"/>
-              <a:defRPr sz="2800" kern="1200">
-                <a:solidFill>
-                  <a:schemeClr val="tx1"/>
-                </a:solidFill>
-                <a:latin typeface="+mn-lt"/>
-                <a:ea typeface="+mn-ea"/>
-                <a:cs typeface="+mn-cs"/>
-              </a:defRPr>
-            </a:lvl1pPr>
-            <a:lvl2pPr marL="685800" indent="-228600" algn="l" defTabSz="914400" rtl="0" eaLnBrk="1" latinLnBrk="0" hangingPunct="1">
-              <a:lnSpc>
-                <a:spcPct val="90000"/>
-              </a:lnSpc>
-              <a:spcBef>
-                <a:spcPts val="500"/>
-              </a:spcBef>
-              <a:buFont typeface="Arial" panose="020B0604020202020204" pitchFamily="34" charset="0"/>
-              <a:buChar char="•"/>
-              <a:defRPr sz="2400" kern="1200">
-                <a:solidFill>
-                  <a:schemeClr val="tx1"/>
-                </a:solidFill>
-                <a:latin typeface="+mn-lt"/>
-                <a:ea typeface="+mn-ea"/>
-                <a:cs typeface="+mn-cs"/>
-              </a:defRPr>
-            </a:lvl2pPr>
-            <a:lvl3pPr marL="1143000" indent="-228600" algn="l" defTabSz="914400" rtl="0" eaLnBrk="1" latinLnBrk="0" hangingPunct="1">
-              <a:lnSpc>
-                <a:spcPct val="90000"/>
-              </a:lnSpc>
-              <a:spcBef>
-                <a:spcPts val="500"/>
-              </a:spcBef>
-              <a:buFont typeface="Arial" panose="020B0604020202020204" pitchFamily="34" charset="0"/>
-              <a:buChar char="•"/>
-              <a:defRPr sz="2000" kern="1200">
-                <a:solidFill>
-                  <a:schemeClr val="tx1"/>
-                </a:solidFill>
-                <a:latin typeface="+mn-lt"/>
-                <a:ea typeface="+mn-ea"/>
-                <a:cs typeface="+mn-cs"/>
-              </a:defRPr>
-            </a:lvl3pPr>
-            <a:lvl4pPr marL="1600200" indent="-228600" algn="l" defTabSz="914400" rtl="0" eaLnBrk="1" latinLnBrk="0" hangingPunct="1">
-              <a:lnSpc>
-                <a:spcPct val="90000"/>
-              </a:lnSpc>
-              <a:spcBef>
-                <a:spcPts val="500"/>
-              </a:spcBef>
-              <a:buFont typeface="Arial" panose="020B0604020202020204" pitchFamily="34" charset="0"/>
-              <a:buChar char="•"/>
-              <a:defRPr sz="1800" kern="1200">
-                <a:solidFill>
-                  <a:schemeClr val="tx1"/>
-                </a:solidFill>
-                <a:latin typeface="+mn-lt"/>
-                <a:ea typeface="+mn-ea"/>
-                <a:cs typeface="+mn-cs"/>
-              </a:defRPr>
-            </a:lvl4pPr>
-            <a:lvl5pPr marL="2057400" indent="-228600" algn="l" defTabSz="914400" rtl="0" eaLnBrk="1" latinLnBrk="0" hangingPunct="1">
-              <a:lnSpc>
-                <a:spcPct val="90000"/>
-              </a:lnSpc>
-              <a:spcBef>
-                <a:spcPts val="500"/>
-              </a:spcBef>
-              <a:buFont typeface="Arial" panose="020B0604020202020204" pitchFamily="34" charset="0"/>
-              <a:buChar char="•"/>
-              <a:defRPr sz="1800" kern="1200">
-                <a:solidFill>
-                  <a:schemeClr val="tx1"/>
-                </a:solidFill>
-                <a:latin typeface="+mn-lt"/>
-                <a:ea typeface="+mn-ea"/>
-                <a:cs typeface="+mn-cs"/>
-              </a:defRPr>
-            </a:lvl5pPr>
-            <a:lvl6pPr marL="2514600" indent="-228600" algn="l" defTabSz="914400" rtl="0" eaLnBrk="1" latinLnBrk="0" hangingPunct="1">
-              <a:lnSpc>
-                <a:spcPct val="90000"/>
-              </a:lnSpc>
-              <a:spcBef>
-                <a:spcPts val="500"/>
-              </a:spcBef>
-              <a:buFont typeface="Arial" panose="020B0604020202020204" pitchFamily="34" charset="0"/>
-              <a:buChar char="•"/>
-              <a:defRPr sz="1800" kern="1200">
-                <a:solidFill>
-                  <a:schemeClr val="tx1"/>
-                </a:solidFill>
-                <a:latin typeface="+mn-lt"/>
-                <a:ea typeface="+mn-ea"/>
-                <a:cs typeface="+mn-cs"/>
-              </a:defRPr>
-            </a:lvl6pPr>
-            <a:lvl7pPr marL="2971800" indent="-228600" algn="l" defTabSz="914400" rtl="0" eaLnBrk="1" latinLnBrk="0" hangingPunct="1">
-              <a:lnSpc>
-                <a:spcPct val="90000"/>
-              </a:lnSpc>
-              <a:spcBef>
-                <a:spcPts val="500"/>
-              </a:spcBef>
-              <a:buFont typeface="Arial" panose="020B0604020202020204" pitchFamily="34" charset="0"/>
-              <a:buChar char="•"/>
-              <a:defRPr sz="1800" kern="1200">
-                <a:solidFill>
-                  <a:schemeClr val="tx1"/>
-                </a:solidFill>
-                <a:latin typeface="+mn-lt"/>
-                <a:ea typeface="+mn-ea"/>
-                <a:cs typeface="+mn-cs"/>
-              </a:defRPr>
-            </a:lvl7pPr>
-            <a:lvl8pPr marL="3429000" indent="-228600" algn="l" defTabSz="914400" rtl="0" eaLnBrk="1" latinLnBrk="0" hangingPunct="1">
-              <a:lnSpc>
-                <a:spcPct val="90000"/>
-              </a:lnSpc>
-              <a:spcBef>
-                <a:spcPts val="500"/>
-              </a:spcBef>
-              <a:buFont typeface="Arial" panose="020B0604020202020204" pitchFamily="34" charset="0"/>
-              <a:buChar char="•"/>
-              <a:defRPr sz="1800" kern="1200">
-                <a:solidFill>
-                  <a:schemeClr val="tx1"/>
-                </a:solidFill>
-                <a:latin typeface="+mn-lt"/>
-                <a:ea typeface="+mn-ea"/>
-                <a:cs typeface="+mn-cs"/>
-              </a:defRPr>
-            </a:lvl8pPr>
-            <a:lvl9pPr marL="3886200" indent="-228600" algn="l" defTabSz="914400" rtl="0" eaLnBrk="1" latinLnBrk="0" hangingPunct="1">
-              <a:lnSpc>
-                <a:spcPct val="90000"/>
-              </a:lnSpc>
-              <a:spcBef>
-                <a:spcPts val="500"/>
-              </a:spcBef>
-              <a:buFont typeface="Arial" panose="020B0604020202020204" pitchFamily="34" charset="0"/>
-              <a:buChar char="•"/>
-              <a:defRPr sz="1800" kern="1200">
-                <a:solidFill>
-                  <a:schemeClr val="tx1"/>
-                </a:solidFill>
-                <a:latin typeface="+mn-lt"/>
-                <a:ea typeface="+mn-ea"/>
-                <a:cs typeface="+mn-cs"/>
-              </a:defRPr>
-            </a:lvl9pPr>
-          </a:lstStyle>
+            <a:endParaRPr lang="en-US" altLang="zh-CN" dirty="0"/>
+          </a:p>
           <a:p>
             <a:pPr marL="0" indent="0">
               <a:lnSpc>
-                <a:spcPct val="70000"/>
+                <a:spcPct val="100000"/>
               </a:lnSpc>
               <a:buNone/>
             </a:pPr>
             <a:r>
-              <a:rPr lang="en-CN" dirty="0">
-                <a:solidFill>
-                  <a:srgbClr val="0070C0"/>
-                </a:solidFill>
-              </a:rPr>
-              <a:t>Why need refactoring?</a:t>
-            </a:r>
-            <a:endParaRPr lang="en-US" dirty="0">
-              <a:solidFill>
-                <a:srgbClr val="0070C0"/>
-              </a:solidFill>
-            </a:endParaRPr>
-          </a:p>
-          <a:p>
-            <a:pPr lvl="0">
+              <a:rPr lang="en-US" altLang="zh-CN" dirty="0"/>
+              <a:t>+</a:t>
+            </a:r>
+            <a:r>
+              <a:rPr lang="zh-CN" altLang="en-US" dirty="0"/>
+              <a:t> 时间足够</a:t>
+            </a:r>
+            <a:endParaRPr lang="en-US" altLang="zh-CN" dirty="0"/>
+          </a:p>
+          <a:p>
+            <a:pPr>
               <a:lnSpc>
-                <a:spcPct val="70000"/>
+                <a:spcPct val="100000"/>
               </a:lnSpc>
             </a:pPr>
             <a:r>
-              <a:rPr lang="zh-CN" altLang="en-US" sz="1600" dirty="0"/>
-              <a:t>代码结构逐渐流失 </a:t>
-            </a:r>
-            <a:r>
-              <a:rPr lang="en-US" altLang="zh-CN" sz="1600" dirty="0"/>
-              <a:t>-&gt;</a:t>
-            </a:r>
-            <a:r>
-              <a:rPr lang="zh-CN" altLang="en-US" sz="1600" dirty="0"/>
-              <a:t>改善设计</a:t>
-            </a:r>
-            <a:endParaRPr lang="en-US" altLang="zh-CN" sz="1600" dirty="0"/>
-          </a:p>
-          <a:p>
-            <a:pPr lvl="0">
+              <a:rPr lang="en-US" altLang="zh-CN" dirty="0"/>
+              <a:t>When read code</a:t>
+            </a:r>
+          </a:p>
+          <a:p>
+            <a:pPr>
               <a:lnSpc>
-                <a:spcPct val="70000"/>
+                <a:spcPct val="100000"/>
               </a:lnSpc>
             </a:pPr>
             <a:r>
-              <a:rPr lang="zh-CN" altLang="en-US" sz="1600" dirty="0"/>
-              <a:t>可读性</a:t>
-            </a:r>
-            <a:endParaRPr lang="en-US" altLang="zh-CN" sz="1600" dirty="0"/>
-          </a:p>
-          <a:p>
-            <a:pPr lvl="0">
+              <a:rPr lang="en-US" dirty="0"/>
+              <a:t>5s</a:t>
+            </a:r>
+          </a:p>
+          <a:p>
+            <a:pPr>
               <a:lnSpc>
-                <a:spcPct val="70000"/>
+                <a:spcPct val="100000"/>
               </a:lnSpc>
             </a:pPr>
             <a:r>
-              <a:rPr lang="zh-CN" altLang="en-US" sz="1600" dirty="0"/>
-              <a:t>减少</a:t>
-            </a:r>
-            <a:r>
-              <a:rPr lang="en-US" altLang="zh-CN" sz="1600" dirty="0"/>
-              <a:t>bug</a:t>
-            </a:r>
-            <a:r>
-              <a:rPr lang="zh-CN" altLang="en-US" sz="1600" dirty="0"/>
-              <a:t>，帮助找到</a:t>
-            </a:r>
-            <a:r>
-              <a:rPr lang="en-US" altLang="zh-CN" sz="1600" dirty="0"/>
-              <a:t>bug</a:t>
-            </a:r>
-            <a:endParaRPr lang="en-CN" altLang="zh-CN" sz="1600" dirty="0"/>
-          </a:p>
-          <a:p>
-            <a:pPr lvl="0">
+              <a:rPr lang="en-US" dirty="0" err="1"/>
+              <a:t>还能用</a:t>
+            </a:r>
+            <a:r>
+              <a:rPr lang="zh-CN" altLang="en-US" dirty="0"/>
+              <a:t>、很难加功能</a:t>
+            </a:r>
+            <a:endParaRPr lang="en-US" dirty="0"/>
+          </a:p>
+          <a:p>
+            <a:pPr>
               <a:lnSpc>
-                <a:spcPct val="70000"/>
+                <a:spcPct val="100000"/>
               </a:lnSpc>
             </a:pPr>
             <a:r>
-              <a:rPr lang="zh-CN" altLang="en-US" sz="1600" dirty="0"/>
-              <a:t>提高编程速度</a:t>
-            </a:r>
-            <a:endParaRPr lang="en-US" altLang="zh-CN" sz="1600" dirty="0"/>
-          </a:p>
-          <a:p>
-            <a:pPr lvl="0">
-              <a:lnSpc>
-                <a:spcPct val="70000"/>
-              </a:lnSpc>
-            </a:pPr>
-            <a:endParaRPr lang="en-US" altLang="zh-CN" sz="1600" dirty="0"/>
-          </a:p>
-          <a:p>
-            <a:pPr lvl="0">
-              <a:lnSpc>
-                <a:spcPct val="70000"/>
-              </a:lnSpc>
-            </a:pPr>
-            <a:endParaRPr lang="en-US" altLang="zh-CN" sz="1600" dirty="0"/>
-          </a:p>
-          <a:p>
-            <a:pPr marL="0" lvl="0" indent="0">
-              <a:lnSpc>
-                <a:spcPct val="70000"/>
-              </a:lnSpc>
-              <a:buNone/>
-            </a:pPr>
-            <a:r>
-              <a:rPr lang="zh-CN" altLang="en-US" dirty="0">
-                <a:solidFill>
-                  <a:srgbClr val="0070C0"/>
-                </a:solidFill>
-              </a:rPr>
-              <a:t>重构准备</a:t>
-            </a:r>
-            <a:endParaRPr lang="en-US" altLang="zh-CN" dirty="0">
-              <a:solidFill>
-                <a:srgbClr val="0070C0"/>
-              </a:solidFill>
-            </a:endParaRPr>
-          </a:p>
-          <a:p>
-            <a:r>
-              <a:rPr lang="zh-CN" altLang="en-US" sz="1600" dirty="0"/>
-              <a:t>重构之前，先有测试代码：自检能力 </a:t>
-            </a:r>
-            <a:r>
-              <a:rPr lang="en-US" altLang="zh-CN" sz="1600" dirty="0"/>
+              <a:rPr lang="zh-CN" altLang="en-US" dirty="0"/>
+              <a:t>这次就算了</a:t>
+            </a:r>
+            <a:r>
+              <a:rPr lang="en-US" altLang="zh-CN" dirty="0"/>
               <a:t>/</a:t>
             </a:r>
             <a:r>
-              <a:rPr lang="zh-CN" altLang="en-US" sz="1600" dirty="0"/>
-              <a:t> 自测试</a:t>
-            </a:r>
-            <a:endParaRPr lang="en-US" altLang="zh-CN" sz="1600" dirty="0"/>
-          </a:p>
-          <a:p>
-            <a:pPr marL="0" indent="0">
-              <a:buNone/>
-            </a:pPr>
-            <a:r>
-              <a:rPr lang="zh-CN" altLang="en-US" sz="1600" dirty="0"/>
-              <a:t>✔</a:t>
-            </a:r>
-            <a:r>
-              <a:rPr lang="en-US" altLang="zh-CN" sz="1600" dirty="0"/>
-              <a:t> </a:t>
-            </a:r>
-            <a:r>
-              <a:rPr lang="zh-CN" altLang="en-US" sz="1600" dirty="0"/>
-              <a:t>单元测试</a:t>
-            </a:r>
-            <a:r>
-              <a:rPr lang="en-US" altLang="zh-CN" sz="1600" dirty="0"/>
-              <a:t> :</a:t>
-            </a:r>
-            <a:r>
-              <a:rPr lang="en-US" sz="1600" dirty="0"/>
-              <a:t> Junit</a:t>
-            </a:r>
-            <a:r>
-              <a:rPr lang="zh-CN" altLang="en-US" sz="1600" dirty="0"/>
-              <a:t> </a:t>
-            </a:r>
-            <a:r>
-              <a:rPr lang="en-US" altLang="zh-CN" sz="1600" dirty="0"/>
-              <a:t>; </a:t>
-            </a:r>
-            <a:r>
-              <a:rPr lang="zh-CN" altLang="en-US" sz="1600" dirty="0"/>
-              <a:t>捕捉失败</a:t>
-            </a:r>
-            <a:r>
-              <a:rPr lang="en-US" altLang="zh-CN" sz="1600" dirty="0"/>
-              <a:t>(</a:t>
-            </a:r>
-            <a:r>
-              <a:rPr lang="en-US" sz="1600" dirty="0"/>
-              <a:t>false)/ </a:t>
-            </a:r>
-            <a:r>
-              <a:rPr lang="zh-CN" altLang="en-US" sz="1600" dirty="0"/>
-              <a:t>异常</a:t>
-            </a:r>
-            <a:r>
-              <a:rPr lang="en-US" altLang="zh-CN" sz="1600" dirty="0"/>
-              <a:t>(</a:t>
-            </a:r>
-            <a:r>
-              <a:rPr lang="en-US" sz="1600" dirty="0"/>
-              <a:t>exception)</a:t>
-            </a:r>
-          </a:p>
-          <a:p>
-            <a:pPr marL="0" indent="0">
-              <a:buNone/>
-            </a:pPr>
-            <a:r>
-              <a:rPr lang="zh-CN" altLang="en-US" sz="1600" dirty="0"/>
-              <a:t>✗</a:t>
-            </a:r>
-            <a:r>
-              <a:rPr lang="en-US" altLang="zh-CN" sz="1600" dirty="0"/>
-              <a:t> </a:t>
-            </a:r>
-            <a:r>
-              <a:rPr lang="zh-CN" altLang="en-US" sz="1600" dirty="0"/>
-              <a:t>功能测试：质量</a:t>
-            </a:r>
-            <a:endParaRPr lang="en-US" altLang="zh-CN" sz="1600" dirty="0"/>
-          </a:p>
-          <a:p>
-            <a:pPr marL="0" indent="0">
-              <a:buNone/>
-            </a:pPr>
-            <a:r>
-              <a:rPr lang="en-US" altLang="zh-CN" sz="1600" dirty="0"/>
-              <a:t>Not all public </a:t>
-            </a:r>
-            <a:r>
-              <a:rPr lang="zh-CN" altLang="en-US" sz="1600" dirty="0"/>
-              <a:t>函数</a:t>
-            </a:r>
-            <a:r>
-              <a:rPr lang="en-US" altLang="zh-CN" sz="1600" dirty="0"/>
-              <a:t> </a:t>
-            </a:r>
-          </a:p>
-          <a:p>
-            <a:pPr marL="0" indent="0">
-              <a:buNone/>
-            </a:pPr>
-            <a:r>
-              <a:rPr lang="en-US" altLang="zh-CN" sz="1600" dirty="0"/>
-              <a:t> </a:t>
-            </a:r>
-            <a:r>
-              <a:rPr lang="zh-CN" altLang="en-US" sz="1600" dirty="0">
-                <a:effectLst/>
-              </a:rPr>
-              <a:t>边界条件</a:t>
-            </a:r>
-            <a:r>
-              <a:rPr lang="en-US" altLang="zh-CN" sz="1600" dirty="0">
-                <a:effectLst/>
-              </a:rPr>
-              <a:t> /</a:t>
-            </a:r>
-          </a:p>
-          <a:p>
-            <a:pPr marL="0" indent="0">
-              <a:buNone/>
-            </a:pPr>
-            <a:r>
-              <a:rPr lang="zh-CN" altLang="en-US" sz="1600" dirty="0"/>
-              <a:t>最容易出错</a:t>
-            </a:r>
-            <a:r>
-              <a:rPr lang="en-US" altLang="zh-CN" sz="1600" dirty="0"/>
+              <a:rPr lang="zh-CN" altLang="en-US" dirty="0"/>
+              <a:t>下次重构吧</a:t>
+            </a:r>
+            <a:r>
+              <a:rPr lang="en-US" altLang="zh-CN" dirty="0"/>
               <a:t>/</a:t>
             </a:r>
             <a:r>
-              <a:rPr lang="zh-CN" altLang="en-US" sz="1600" dirty="0"/>
-              <a:t> 最常见</a:t>
-            </a:r>
-            <a:r>
-              <a:rPr lang="en-US" altLang="zh-CN" sz="1600" dirty="0"/>
-              <a:t>/</a:t>
-            </a:r>
-            <a:r>
-              <a:rPr lang="zh-CN" altLang="en-US" sz="1600" dirty="0"/>
-              <a:t>常见情况</a:t>
-            </a:r>
-            <a:endParaRPr lang="en-US" altLang="zh-CN" sz="1600" dirty="0"/>
-          </a:p>
-          <a:p>
-            <a:pPr marL="0" indent="0">
-              <a:buNone/>
-            </a:pPr>
-            <a:r>
-              <a:rPr lang="zh-CN" altLang="en-US" sz="1600" dirty="0"/>
-              <a:t>如果没有</a:t>
-            </a:r>
-            <a:r>
-              <a:rPr lang="en-US" altLang="zh-CN" sz="1600" dirty="0"/>
-              <a:t>Unit</a:t>
-            </a:r>
-            <a:r>
-              <a:rPr lang="zh-CN" altLang="en-US" sz="1600" dirty="0"/>
-              <a:t> </a:t>
-            </a:r>
-            <a:r>
-              <a:rPr lang="en-US" altLang="zh-CN" sz="1600" dirty="0"/>
-              <a:t>Test</a:t>
-            </a:r>
-            <a:r>
-              <a:rPr lang="zh-CN" altLang="en-US" sz="1600" dirty="0"/>
-              <a:t>，用测试用例</a:t>
-            </a:r>
-            <a:r>
-              <a:rPr lang="en-US" altLang="zh-CN" sz="1600" dirty="0"/>
-              <a:t>+</a:t>
-            </a:r>
-            <a:r>
-              <a:rPr lang="zh-CN" altLang="en-US" sz="1600" dirty="0"/>
-              <a:t>应用场景：</a:t>
-            </a:r>
-            <a:r>
-              <a:rPr lang="en-US" altLang="zh-CN" sz="1600" dirty="0"/>
-              <a:t>all</a:t>
-            </a:r>
-            <a:r>
-              <a:rPr lang="zh-CN" altLang="en-US" sz="1600" dirty="0"/>
-              <a:t> </a:t>
-            </a:r>
-            <a:r>
-              <a:rPr lang="en-US" altLang="zh-CN" sz="1600" dirty="0"/>
-              <a:t>case</a:t>
-            </a:r>
-          </a:p>
-          <a:p>
-            <a:pPr marL="0" indent="0">
-              <a:buNone/>
-            </a:pPr>
-            <a:r>
-              <a:rPr lang="zh-CN" altLang="en-US" sz="2200" b="1" dirty="0">
-                <a:solidFill>
-                  <a:srgbClr val="7030A0"/>
-                </a:solidFill>
-              </a:rPr>
-              <a:t> </a:t>
-            </a:r>
-            <a:endParaRPr lang="en-US" altLang="zh-CN" sz="2200" b="1" dirty="0">
-              <a:solidFill>
-                <a:srgbClr val="7030A0"/>
-              </a:solidFill>
-            </a:endParaRPr>
-          </a:p>
-          <a:p>
-            <a:pPr>
-              <a:lnSpc>
-                <a:spcPct val="70000"/>
-              </a:lnSpc>
-            </a:pPr>
-            <a:r>
-              <a:rPr lang="en-US" altLang="zh-CN" sz="1600" dirty="0"/>
-              <a:t>Diff</a:t>
-            </a:r>
-            <a:r>
-              <a:rPr lang="zh-CN" altLang="en-US" sz="1600" dirty="0"/>
-              <a:t> </a:t>
-            </a:r>
-            <a:r>
-              <a:rPr lang="en-US" altLang="zh-CN" sz="1600" dirty="0"/>
-              <a:t>tool</a:t>
-            </a:r>
-          </a:p>
-          <a:p>
-            <a:pPr marL="0" indent="0">
-              <a:lnSpc>
-                <a:spcPct val="70000"/>
-              </a:lnSpc>
-              <a:buNone/>
-            </a:pPr>
-            <a:r>
-              <a:rPr lang="en-US" altLang="zh-CN" sz="1600" dirty="0"/>
-              <a:t> Beyond Compare, IDE</a:t>
-            </a:r>
-          </a:p>
-          <a:p>
-            <a:pPr>
-              <a:lnSpc>
-                <a:spcPct val="70000"/>
-              </a:lnSpc>
-            </a:pPr>
-            <a:r>
-              <a:rPr lang="en-US" altLang="zh-CN" sz="1600" dirty="0"/>
-              <a:t>Branch branch</a:t>
-            </a:r>
-          </a:p>
-          <a:p>
-            <a:pPr marL="0" indent="0">
-              <a:lnSpc>
-                <a:spcPct val="70000"/>
-              </a:lnSpc>
-              <a:buNone/>
-            </a:pPr>
-            <a:r>
-              <a:rPr lang="en-US" altLang="zh-CN" sz="1600" dirty="0" err="1"/>
-              <a:t>refactor_current</a:t>
-            </a:r>
-            <a:r>
-              <a:rPr lang="zh-CN" altLang="en-US" sz="1600" dirty="0"/>
-              <a:t> </a:t>
-            </a:r>
-            <a:r>
-              <a:rPr lang="en-US" altLang="zh-CN" sz="1600" dirty="0"/>
-              <a:t>/</a:t>
-            </a:r>
-            <a:r>
-              <a:rPr lang="zh-CN" altLang="en-US" sz="1600" dirty="0"/>
-              <a:t> </a:t>
-            </a:r>
-            <a:r>
-              <a:rPr lang="en-US" altLang="zh-CN" sz="1600" dirty="0" err="1"/>
-              <a:t>refactor_master</a:t>
-            </a:r>
-            <a:r>
-              <a:rPr lang="zh-CN" altLang="en-US" sz="1600" dirty="0"/>
-              <a:t> </a:t>
-            </a:r>
-            <a:r>
-              <a:rPr lang="en-US" altLang="zh-CN" sz="1600" dirty="0"/>
-              <a:t>/</a:t>
-            </a:r>
-            <a:r>
-              <a:rPr lang="zh-CN" altLang="en-US" sz="1600" dirty="0"/>
-              <a:t> </a:t>
-            </a:r>
-            <a:r>
-              <a:rPr lang="en-US" altLang="zh-CN" sz="1600" dirty="0"/>
-              <a:t>feature</a:t>
-            </a:r>
-          </a:p>
-          <a:p>
-            <a:pPr marL="0" lvl="0" indent="0">
-              <a:lnSpc>
-                <a:spcPct val="70000"/>
-              </a:lnSpc>
-              <a:buNone/>
-            </a:pPr>
-            <a:endParaRPr lang="en-US" altLang="zh-CN" sz="1600" dirty="0"/>
-          </a:p>
-          <a:p>
-            <a:pPr marL="0" lvl="0" indent="0">
-              <a:lnSpc>
-                <a:spcPct val="70000"/>
-              </a:lnSpc>
-              <a:buNone/>
-            </a:pPr>
-            <a:endParaRPr lang="en-US" altLang="zh-CN" sz="1600" dirty="0"/>
-          </a:p>
-        </p:txBody>
-      </p:sp>
-      <p:pic>
-        <p:nvPicPr>
-          <p:cNvPr id="10" name="Graphic 9" descr="Add">
-            <a:extLst>
-              <a:ext uri="{FF2B5EF4-FFF2-40B4-BE49-F238E27FC236}">
-                <a16:creationId xmlns:a16="http://schemas.microsoft.com/office/drawing/2014/main" id="{D30CD3D9-6AC4-834E-9883-2D80B78B155A}"/>
-              </a:ext>
-            </a:extLst>
-          </p:cNvPr>
-          <p:cNvPicPr>
-            <a:picLocks noChangeAspect="1"/>
-          </p:cNvPicPr>
-          <p:nvPr/>
-        </p:nvPicPr>
-        <p:blipFill>
-          <a:blip r:embed="rId3">
-            <a:extLst>
-              <a:ext uri="{96DAC541-7B7A-43D3-8B79-37D633B846F1}">
-                <asvg:svgBlip xmlns:asvg="http://schemas.microsoft.com/office/drawing/2016/SVG/main" r:embed="rId4"/>
-              </a:ext>
-            </a:extLst>
-          </a:blip>
-          <a:stretch>
-            <a:fillRect/>
-          </a:stretch>
-        </p:blipFill>
-        <p:spPr>
-          <a:xfrm>
-            <a:off x="838200" y="4343399"/>
-            <a:ext cx="504825" cy="504825"/>
-          </a:xfrm>
-          <a:prstGeom prst="rect">
-            <a:avLst/>
-          </a:prstGeom>
-        </p:spPr>
-      </p:pic>
-      <p:pic>
-        <p:nvPicPr>
-          <p:cNvPr id="12" name="Graphic 11" descr="Add">
-            <a:extLst>
-              <a:ext uri="{FF2B5EF4-FFF2-40B4-BE49-F238E27FC236}">
-                <a16:creationId xmlns:a16="http://schemas.microsoft.com/office/drawing/2014/main" id="{13B13EC1-7B35-264A-9A5F-0638175FDE94}"/>
-              </a:ext>
-            </a:extLst>
-          </p:cNvPr>
-          <p:cNvPicPr>
-            <a:picLocks noChangeAspect="1"/>
-          </p:cNvPicPr>
-          <p:nvPr/>
-        </p:nvPicPr>
-        <p:blipFill>
-          <a:blip r:embed="rId3">
-            <a:extLst>
-              <a:ext uri="{96DAC541-7B7A-43D3-8B79-37D633B846F1}">
-                <asvg:svgBlip xmlns:asvg="http://schemas.microsoft.com/office/drawing/2016/SVG/main" r:embed="rId4"/>
-              </a:ext>
-            </a:extLst>
-          </a:blip>
-          <a:stretch>
-            <a:fillRect/>
-          </a:stretch>
-        </p:blipFill>
-        <p:spPr>
-          <a:xfrm>
-            <a:off x="6276975" y="4728481"/>
-            <a:ext cx="504825" cy="504825"/>
-          </a:xfrm>
-          <a:prstGeom prst="rect">
-            <a:avLst/>
-          </a:prstGeom>
-        </p:spPr>
-      </p:pic>
+              <a:rPr lang="zh-CN" altLang="en-US" dirty="0"/>
+              <a:t> 专门找时间重构吧 </a:t>
+            </a:r>
+            <a:r>
+              <a:rPr lang="en-US" altLang="zh-CN" dirty="0"/>
+              <a:t>-&gt; </a:t>
+            </a:r>
+            <a:r>
+              <a:rPr lang="zh-CN" altLang="en-US" dirty="0"/>
+              <a:t>立刻</a:t>
+            </a:r>
+            <a:endParaRPr lang="en-US" altLang="zh-CN" dirty="0"/>
+          </a:p>
+        </p:txBody>
+      </p:sp>
     </p:spTree>
     <p:extLst>
       <p:ext uri="{BB962C8B-B14F-4D97-AF65-F5344CB8AC3E}">
-        <p14:creationId xmlns:p14="http://schemas.microsoft.com/office/powerpoint/2010/main" val="57726554"/>
+        <p14:creationId xmlns:p14="http://schemas.microsoft.com/office/powerpoint/2010/main" val="3891254528"/>
       </p:ext>
     </p:extLst>
   </p:cSld>
@@ -7593,7 +8940,7 @@
           <p:cNvPr id="2" name="Title 1">
             <a:extLst>
               <a:ext uri="{FF2B5EF4-FFF2-40B4-BE49-F238E27FC236}">
-                <a16:creationId xmlns:a16="http://schemas.microsoft.com/office/drawing/2014/main" id="{0EDA4548-CA9B-4245-A98D-8C8CAA7A2199}"/>
+                <a16:creationId xmlns:a16="http://schemas.microsoft.com/office/drawing/2014/main" id="{3855AABE-B962-B249-956A-193853D96CFB}"/>
               </a:ext>
             </a:extLst>
           </p:cNvPr>
@@ -7610,17 +8957,10 @@
           <a:lstStyle/>
           <a:p>
             <a:r>
-              <a:rPr lang="en-US" altLang="zh-CN" dirty="0"/>
-              <a:t>+</a:t>
-            </a:r>
-            <a:r>
-              <a:rPr lang="zh-CN" altLang="en-US" dirty="0"/>
-              <a:t> </a:t>
-            </a:r>
-            <a:r>
-              <a:rPr lang="en-CN" dirty="0"/>
-              <a:t>QA</a:t>
-            </a:r>
+              <a:rPr lang="en-US" dirty="0"/>
+              <a:t>When can not</a:t>
+            </a:r>
+            <a:endParaRPr lang="en-CN" dirty="0"/>
           </a:p>
         </p:txBody>
       </p:sp>
@@ -7629,7 +8969,7 @@
           <p:cNvPr id="3" name="Content Placeholder 2">
             <a:extLst>
               <a:ext uri="{FF2B5EF4-FFF2-40B4-BE49-F238E27FC236}">
-                <a16:creationId xmlns:a16="http://schemas.microsoft.com/office/drawing/2014/main" id="{5B33604C-DB0C-504C-8E80-857E7A949477}"/>
+                <a16:creationId xmlns:a16="http://schemas.microsoft.com/office/drawing/2014/main" id="{6490126A-56C2-7A4E-8FC0-18238FA644EC}"/>
               </a:ext>
             </a:extLst>
           </p:cNvPr>
@@ -7642,143 +8982,44 @@
         </p:nvSpPr>
         <p:spPr/>
         <p:txBody>
-          <a:bodyPr>
-            <a:normAutofit/>
-          </a:bodyPr>
+          <a:bodyPr/>
           <a:lstStyle/>
-          <a:p>
-            <a:r>
-              <a:rPr lang="zh-CN" altLang="en-US" sz="1600" dirty="0"/>
-              <a:t>平时开发中需要如何设计代码结构，做到以后尽量少或者小的重构？</a:t>
-            </a:r>
-            <a:endParaRPr lang="en-US" altLang="zh-CN" sz="1600" dirty="0"/>
-          </a:p>
           <a:p>
             <a:pPr marL="0" indent="0">
               <a:buNone/>
             </a:pPr>
-            <a:r>
-              <a:rPr lang="zh-CN" altLang="en-US" sz="1600" dirty="0"/>
-              <a:t>  </a:t>
-            </a:r>
-            <a:r>
-              <a:rPr lang="zh-CN" altLang="en-US" sz="1600"/>
-              <a:t>不能</a:t>
-            </a:r>
-            <a:endParaRPr lang="en-US" altLang="zh-CN" sz="1600" dirty="0"/>
-          </a:p>
-          <a:p>
-            <a:pPr marL="0" indent="0">
-              <a:buNone/>
-            </a:pPr>
-            <a:r>
-              <a:rPr lang="zh-CN" altLang="en-US" sz="1600" dirty="0"/>
-              <a:t>  架构</a:t>
-            </a:r>
-            <a:endParaRPr lang="en-US" altLang="zh-CN" sz="1600" dirty="0"/>
-          </a:p>
-          <a:p>
-            <a:pPr marL="0" indent="0">
-              <a:buNone/>
-            </a:pPr>
-            <a:endParaRPr lang="en-US" altLang="zh-CN" sz="1600" dirty="0"/>
-          </a:p>
-          <a:p>
-            <a:r>
-              <a:rPr lang="zh-CN" altLang="en-US" sz="1600" dirty="0"/>
-              <a:t>重构 在</a:t>
-            </a:r>
-            <a:r>
-              <a:rPr lang="en-US" altLang="zh-CN" sz="1600" dirty="0"/>
-              <a:t>JS</a:t>
-            </a:r>
-            <a:r>
-              <a:rPr lang="zh-CN" altLang="en-US" sz="1600" dirty="0"/>
-              <a:t> 中能用吗？</a:t>
-            </a:r>
-            <a:endParaRPr lang="en-US" altLang="zh-CN" sz="1600" dirty="0"/>
-          </a:p>
-          <a:p>
-            <a:pPr marL="0" indent="0">
-              <a:buNone/>
-            </a:pPr>
-            <a:r>
-              <a:rPr lang="zh-CN" altLang="en-US" sz="1600" dirty="0"/>
-              <a:t>     任何语言</a:t>
-            </a:r>
-            <a:endParaRPr lang="en-US" altLang="zh-CN" sz="1600" dirty="0"/>
-          </a:p>
-          <a:p>
-            <a:pPr marL="0" indent="0">
-              <a:buNone/>
-            </a:pPr>
-            <a:r>
-              <a:rPr lang="zh-CN" altLang="en-US" sz="1600" dirty="0"/>
-              <a:t> </a:t>
-            </a:r>
-            <a:endParaRPr lang="en-US" altLang="zh-CN" sz="1600" dirty="0"/>
-          </a:p>
-          <a:p>
-            <a:r>
-              <a:rPr lang="zh-CN" altLang="en-US" sz="1600" dirty="0"/>
-              <a:t>项目架构非常</a:t>
-            </a:r>
-            <a:r>
-              <a:rPr lang="en-US" altLang="zh-CN" sz="1600" dirty="0"/>
-              <a:t>common</a:t>
-            </a:r>
-            <a:r>
-              <a:rPr lang="zh-CN" altLang="en-US" sz="1600" dirty="0"/>
-              <a:t>，不能一下子改完，该如何着手重构？</a:t>
-            </a:r>
-            <a:endParaRPr lang="en-US" altLang="zh-CN" sz="1600" dirty="0"/>
-          </a:p>
-          <a:p>
-            <a:pPr marL="0" indent="0">
-              <a:buNone/>
-            </a:pPr>
-            <a:r>
-              <a:rPr lang="zh-CN" altLang="en-US" sz="1600" dirty="0"/>
-              <a:t>    重构架构是超大范围的重构，即使使用重构手法也不能一下子改完。</a:t>
-            </a:r>
-            <a:endParaRPr lang="en-US" altLang="zh-CN" sz="1600" dirty="0"/>
-          </a:p>
-          <a:p>
-            <a:pPr marL="0" indent="0">
-              <a:buNone/>
-            </a:pPr>
-            <a:r>
-              <a:rPr lang="zh-CN" altLang="en-US" sz="1600" dirty="0"/>
-              <a:t>    逐个替换</a:t>
-            </a:r>
-            <a:r>
-              <a:rPr lang="en-US" altLang="zh-CN" sz="1600" dirty="0"/>
-              <a:t>+</a:t>
-            </a:r>
-            <a:r>
-              <a:rPr lang="zh-CN" altLang="en-US" sz="1600" dirty="0"/>
-              <a:t>测试用例</a:t>
-            </a:r>
-            <a:endParaRPr lang="en-US" altLang="zh-CN" sz="1600" dirty="0"/>
-          </a:p>
-          <a:p>
-            <a:pPr marL="0" indent="0">
-              <a:buNone/>
-            </a:pPr>
-            <a:r>
-              <a:rPr lang="zh-CN" altLang="en-US" sz="1600" dirty="0"/>
-              <a:t>    用重构按小步调和布局范围改善代码，使得代码清晰，能帮助找到更好的架构。</a:t>
-            </a:r>
-          </a:p>
-          <a:p>
-            <a:endParaRPr lang="en-CN" sz="1600" dirty="0"/>
+            <a:endParaRPr lang="en-US" altLang="zh-CN" dirty="0">
+              <a:solidFill>
+                <a:srgbClr val="0070C0"/>
+              </a:solidFill>
+            </a:endParaRPr>
+          </a:p>
+          <a:p>
+            <a:r>
+              <a:rPr lang="zh-CN" altLang="en-US" dirty="0"/>
+              <a:t>现有代码过于混乱</a:t>
+            </a:r>
+            <a:endParaRPr lang="en-US" altLang="zh-CN" dirty="0"/>
+          </a:p>
+          <a:p>
+            <a:r>
+              <a:rPr lang="en-US" altLang="zh-CN" dirty="0"/>
+              <a:t>Not working</a:t>
+            </a:r>
+          </a:p>
+          <a:p>
+            <a:r>
+              <a:rPr lang="en-US" altLang="zh-CN" dirty="0"/>
+              <a:t>Deadline</a:t>
+            </a:r>
+            <a:endParaRPr lang="en-CN" dirty="0"/>
           </a:p>
         </p:txBody>
       </p:sp>
     </p:spTree>
     <p:extLst>
       <p:ext uri="{BB962C8B-B14F-4D97-AF65-F5344CB8AC3E}">
-        <p14:creationId xmlns:p14="http://schemas.microsoft.com/office/powerpoint/2010/main" val="529310518"/>
+        <p14:creationId xmlns:p14="http://schemas.microsoft.com/office/powerpoint/2010/main" val="3554303372"/>
       </p:ext>
     </p:extLst>
   </p:cSld>

--- a/books/refactoring_improve_the_design_of_existing_code/Refactoring.pptx
+++ b/books/refactoring_improve_the_design_of_existing_code/Refactoring.pptx
@@ -213,7 +213,7 @@
           <a:p>
             <a:fld id="{3D7383F5-6C25-4144-BB9C-7D6DC74B2771}" type="datetimeFigureOut">
               <a:rPr lang="en-CN" smtClean="0"/>
-              <a:t>2020/7/29</a:t>
+              <a:t>2020/7/30</a:t>
             </a:fld>
             <a:endParaRPr lang="en-CN"/>
           </a:p>
@@ -630,7 +630,7 @@
           <a:p>
             <a:fld id="{CE81EC24-67D7-F647-A9BD-542708036C5D}" type="datetimeFigureOut">
               <a:rPr lang="en-CN" smtClean="0"/>
-              <a:t>2020/7/29</a:t>
+              <a:t>2020/7/30</a:t>
             </a:fld>
             <a:endParaRPr lang="en-CN"/>
           </a:p>
@@ -830,7 +830,7 @@
           <a:p>
             <a:fld id="{CE81EC24-67D7-F647-A9BD-542708036C5D}" type="datetimeFigureOut">
               <a:rPr lang="en-CN" smtClean="0"/>
-              <a:t>2020/7/29</a:t>
+              <a:t>2020/7/30</a:t>
             </a:fld>
             <a:endParaRPr lang="en-CN"/>
           </a:p>
@@ -1040,7 +1040,7 @@
           <a:p>
             <a:fld id="{CE81EC24-67D7-F647-A9BD-542708036C5D}" type="datetimeFigureOut">
               <a:rPr lang="en-CN" smtClean="0"/>
-              <a:t>2020/7/29</a:t>
+              <a:t>2020/7/30</a:t>
             </a:fld>
             <a:endParaRPr lang="en-CN"/>
           </a:p>
@@ -1240,7 +1240,7 @@
           <a:p>
             <a:fld id="{CE81EC24-67D7-F647-A9BD-542708036C5D}" type="datetimeFigureOut">
               <a:rPr lang="en-CN" smtClean="0"/>
-              <a:t>2020/7/29</a:t>
+              <a:t>2020/7/30</a:t>
             </a:fld>
             <a:endParaRPr lang="en-CN"/>
           </a:p>
@@ -1516,7 +1516,7 @@
           <a:p>
             <a:fld id="{CE81EC24-67D7-F647-A9BD-542708036C5D}" type="datetimeFigureOut">
               <a:rPr lang="en-CN" smtClean="0"/>
-              <a:t>2020/7/29</a:t>
+              <a:t>2020/7/30</a:t>
             </a:fld>
             <a:endParaRPr lang="en-CN"/>
           </a:p>
@@ -1784,7 +1784,7 @@
           <a:p>
             <a:fld id="{CE81EC24-67D7-F647-A9BD-542708036C5D}" type="datetimeFigureOut">
               <a:rPr lang="en-CN" smtClean="0"/>
-              <a:t>2020/7/29</a:t>
+              <a:t>2020/7/30</a:t>
             </a:fld>
             <a:endParaRPr lang="en-CN"/>
           </a:p>
@@ -2199,7 +2199,7 @@
           <a:p>
             <a:fld id="{CE81EC24-67D7-F647-A9BD-542708036C5D}" type="datetimeFigureOut">
               <a:rPr lang="en-CN" smtClean="0"/>
-              <a:t>2020/7/29</a:t>
+              <a:t>2020/7/30</a:t>
             </a:fld>
             <a:endParaRPr lang="en-CN"/>
           </a:p>
@@ -2341,7 +2341,7 @@
           <a:p>
             <a:fld id="{CE81EC24-67D7-F647-A9BD-542708036C5D}" type="datetimeFigureOut">
               <a:rPr lang="en-CN" smtClean="0"/>
-              <a:t>2020/7/29</a:t>
+              <a:t>2020/7/30</a:t>
             </a:fld>
             <a:endParaRPr lang="en-CN"/>
           </a:p>
@@ -2454,7 +2454,7 @@
           <a:p>
             <a:fld id="{CE81EC24-67D7-F647-A9BD-542708036C5D}" type="datetimeFigureOut">
               <a:rPr lang="en-CN" smtClean="0"/>
-              <a:t>2020/7/29</a:t>
+              <a:t>2020/7/30</a:t>
             </a:fld>
             <a:endParaRPr lang="en-CN"/>
           </a:p>
@@ -2767,7 +2767,7 @@
           <a:p>
             <a:fld id="{CE81EC24-67D7-F647-A9BD-542708036C5D}" type="datetimeFigureOut">
               <a:rPr lang="en-CN" smtClean="0"/>
-              <a:t>2020/7/29</a:t>
+              <a:t>2020/7/30</a:t>
             </a:fld>
             <a:endParaRPr lang="en-CN"/>
           </a:p>
@@ -3056,7 +3056,7 @@
           <a:p>
             <a:fld id="{CE81EC24-67D7-F647-A9BD-542708036C5D}" type="datetimeFigureOut">
               <a:rPr lang="en-CN" smtClean="0"/>
-              <a:t>2020/7/29</a:t>
+              <a:t>2020/7/30</a:t>
             </a:fld>
             <a:endParaRPr lang="en-CN"/>
           </a:p>
@@ -3299,7 +3299,7 @@
           <a:p>
             <a:fld id="{CE81EC24-67D7-F647-A9BD-542708036C5D}" type="datetimeFigureOut">
               <a:rPr lang="en-CN" smtClean="0"/>
-              <a:t>2020/7/29</a:t>
+              <a:t>2020/7/30</a:t>
             </a:fld>
             <a:endParaRPr lang="en-CN"/>
           </a:p>
@@ -4119,13 +4119,24 @@
           </a:p>
           <a:p>
             <a:r>
-              <a:rPr lang="en-US" altLang="zh-CN" dirty="0"/>
+              <a:rPr lang="en-US" altLang="zh-CN" dirty="0">
+                <a:hlinkClick r:id="rId2"/>
+              </a:rPr>
               <a:t>Parallel Inheritance Hierarchies</a:t>
             </a:r>
             <a:r>
-              <a:rPr lang="zh-CN" altLang="en-US" dirty="0"/>
-              <a:t>（平行继承体系）</a:t>
-            </a:r>
+              <a:rPr lang="zh-CN" altLang="en-US" dirty="0">
+                <a:hlinkClick r:id="rId2"/>
+              </a:rPr>
+              <a:t>（平行继承体系</a:t>
+            </a:r>
+            <a:r>
+              <a:rPr lang="en-US" altLang="zh-CN" dirty="0">
+                <a:hlinkClick r:id="rId2"/>
+              </a:rPr>
+              <a:t>)</a:t>
+            </a:r>
+            <a:endParaRPr lang="zh-CN" altLang="en-US" dirty="0"/>
           </a:p>
           <a:p>
             <a:r>

--- a/books/refactoring_improve_the_design_of_existing_code/Refactoring.pptx
+++ b/books/refactoring_improve_the_design_of_existing_code/Refactoring.pptx
@@ -5,7 +5,7 @@
     <p:sldMasterId id="2147483648" r:id="rId1"/>
   </p:sldMasterIdLst>
   <p:notesMasterIdLst>
-    <p:notesMasterId r:id="rId19"/>
+    <p:notesMasterId r:id="rId20"/>
   </p:notesMasterIdLst>
   <p:sldIdLst>
     <p:sldId id="256" r:id="rId2"/>
@@ -25,6 +25,7 @@
     <p:sldId id="272" r:id="rId16"/>
     <p:sldId id="265" r:id="rId17"/>
     <p:sldId id="260" r:id="rId18"/>
+    <p:sldId id="277" r:id="rId19"/>
   </p:sldIdLst>
   <p:sldSz cx="12192000" cy="6858000"/>
   <p:notesSz cx="6858000" cy="9144000"/>
@@ -6703,6 +6704,940 @@
 </p:sld>
 </file>
 
+<file path=ppt/slides/slide18.xml><?xml version="1.0" encoding="utf-8"?>
+<p:sld xmlns:a="http://schemas.openxmlformats.org/drawingml/2006/main" xmlns:r="http://schemas.openxmlformats.org/officeDocument/2006/relationships" xmlns:p="http://schemas.openxmlformats.org/presentationml/2006/main">
+  <p:cSld>
+    <p:spTree>
+      <p:nvGrpSpPr>
+        <p:cNvPr id="1" name=""/>
+        <p:cNvGrpSpPr/>
+        <p:nvPr/>
+      </p:nvGrpSpPr>
+      <p:grpSpPr>
+        <a:xfrm>
+          <a:off x="0" y="0"/>
+          <a:ext cx="0" cy="0"/>
+          <a:chOff x="0" y="0"/>
+          <a:chExt cx="0" cy="0"/>
+        </a:xfrm>
+      </p:grpSpPr>
+      <p:sp>
+        <p:nvSpPr>
+          <p:cNvPr id="2" name="Title 1">
+            <a:extLst>
+              <a:ext uri="{FF2B5EF4-FFF2-40B4-BE49-F238E27FC236}">
+                <a16:creationId xmlns:a16="http://schemas.microsoft.com/office/drawing/2014/main" id="{8EBDA73D-AA5F-EB49-9F92-A8D27E4B6D62}"/>
+              </a:ext>
+            </a:extLst>
+          </p:cNvPr>
+          <p:cNvSpPr>
+            <a:spLocks noGrp="1"/>
+          </p:cNvSpPr>
+          <p:nvPr>
+            <p:ph type="title"/>
+          </p:nvPr>
+        </p:nvSpPr>
+        <p:spPr/>
+        <p:txBody>
+          <a:bodyPr/>
+          <a:lstStyle/>
+          <a:p>
+            <a:r>
+              <a:rPr lang="zh-CN" altLang="en-US" b="1" dirty="0"/>
+              <a:t>重构手法 </a:t>
+            </a:r>
+            <a:r>
+              <a:rPr lang="en-US" altLang="zh-CN" b="1" dirty="0"/>
+              <a:t>–</a:t>
+            </a:r>
+            <a:r>
+              <a:rPr lang="zh-CN" altLang="en-US" b="1" dirty="0"/>
+              <a:t> </a:t>
+            </a:r>
+            <a:r>
+              <a:rPr lang="en-US" altLang="zh-CN" b="1" dirty="0"/>
+              <a:t>C7 </a:t>
+            </a:r>
+            <a:r>
+              <a:rPr lang="zh-CN" altLang="en-US" b="1" dirty="0"/>
+              <a:t>在对象之间搬移特性</a:t>
+            </a:r>
+          </a:p>
+        </p:txBody>
+      </p:sp>
+      <p:graphicFrame>
+        <p:nvGraphicFramePr>
+          <p:cNvPr id="4" name="Content Placeholder 3">
+            <a:extLst>
+              <a:ext uri="{FF2B5EF4-FFF2-40B4-BE49-F238E27FC236}">
+                <a16:creationId xmlns:a16="http://schemas.microsoft.com/office/drawing/2014/main" id="{9EB49EEE-DB8D-7C4D-A7F4-BC05235C2F6C}"/>
+              </a:ext>
+            </a:extLst>
+          </p:cNvPr>
+          <p:cNvGraphicFramePr>
+            <a:graphicFrameLocks noGrp="1"/>
+          </p:cNvGraphicFramePr>
+          <p:nvPr>
+            <p:ph idx="1"/>
+            <p:extLst>
+              <p:ext uri="{D42A27DB-BD31-4B8C-83A1-F6EECF244321}">
+                <p14:modId xmlns:p14="http://schemas.microsoft.com/office/powerpoint/2010/main" val="1729869343"/>
+              </p:ext>
+            </p:extLst>
+          </p:nvPr>
+        </p:nvGraphicFramePr>
+        <p:xfrm>
+          <a:off x="838200" y="1825625"/>
+          <a:ext cx="10515600" cy="3708400"/>
+        </p:xfrm>
+        <a:graphic>
+          <a:graphicData uri="http://schemas.openxmlformats.org/drawingml/2006/table">
+            <a:tbl>
+              <a:tblPr firstRow="1" bandRow="1">
+                <a:tableStyleId>{5C22544A-7EE6-4342-B048-85BDC9FD1C3A}</a:tableStyleId>
+              </a:tblPr>
+              <a:tblGrid>
+                <a:gridCol w="428538">
+                  <a:extLst>
+                    <a:ext uri="{9D8B030D-6E8A-4147-A177-3AD203B41FA5}">
+                      <a16:colId xmlns:a16="http://schemas.microsoft.com/office/drawing/2014/main" val="1687716590"/>
+                    </a:ext>
+                  </a:extLst>
+                </a:gridCol>
+                <a:gridCol w="6581862">
+                  <a:extLst>
+                    <a:ext uri="{9D8B030D-6E8A-4147-A177-3AD203B41FA5}">
+                      <a16:colId xmlns:a16="http://schemas.microsoft.com/office/drawing/2014/main" val="1189903508"/>
+                    </a:ext>
+                  </a:extLst>
+                </a:gridCol>
+                <a:gridCol w="3505200">
+                  <a:extLst>
+                    <a:ext uri="{9D8B030D-6E8A-4147-A177-3AD203B41FA5}">
+                      <a16:colId xmlns:a16="http://schemas.microsoft.com/office/drawing/2014/main" val="4292055977"/>
+                    </a:ext>
+                  </a:extLst>
+                </a:gridCol>
+              </a:tblGrid>
+              <a:tr h="370840">
+                <a:tc>
+                  <a:txBody>
+                    <a:bodyPr/>
+                    <a:lstStyle/>
+                    <a:p>
+                      <a:endParaRPr lang="en-CN" dirty="0"/>
+                    </a:p>
+                  </a:txBody>
+                  <a:tcPr/>
+                </a:tc>
+                <a:tc>
+                  <a:txBody>
+                    <a:bodyPr/>
+                    <a:lstStyle/>
+                    <a:p>
+                      <a:r>
+                        <a:rPr lang="en-CN" dirty="0"/>
+                        <a:t>Name</a:t>
+                      </a:r>
+                    </a:p>
+                  </a:txBody>
+                  <a:tcPr/>
+                </a:tc>
+                <a:tc>
+                  <a:txBody>
+                    <a:bodyPr/>
+                    <a:lstStyle/>
+                    <a:p>
+                      <a:r>
+                        <a:rPr lang="en-CN" dirty="0"/>
+                        <a:t>Desc</a:t>
+                      </a:r>
+                    </a:p>
+                  </a:txBody>
+                  <a:tcPr/>
+                </a:tc>
+                <a:extLst>
+                  <a:ext uri="{0D108BD9-81ED-4DB2-BD59-A6C34878D82A}">
+                    <a16:rowId xmlns:a16="http://schemas.microsoft.com/office/drawing/2014/main" val="2721617781"/>
+                  </a:ext>
+                </a:extLst>
+              </a:tr>
+              <a:tr h="370840">
+                <a:tc>
+                  <a:txBody>
+                    <a:bodyPr/>
+                    <a:lstStyle/>
+                    <a:p>
+                      <a:pPr marL="0" marR="0" lvl="0" indent="0" algn="l" defTabSz="914400" rtl="0" eaLnBrk="1" fontAlgn="auto" latinLnBrk="0" hangingPunct="1">
+                        <a:lnSpc>
+                          <a:spcPct val="100000"/>
+                        </a:lnSpc>
+                        <a:spcBef>
+                          <a:spcPts val="0"/>
+                        </a:spcBef>
+                        <a:spcAft>
+                          <a:spcPts val="0"/>
+                        </a:spcAft>
+                        <a:buClrTx/>
+                        <a:buSzTx/>
+                        <a:buFontTx/>
+                        <a:buNone/>
+                        <a:tabLst/>
+                        <a:defRPr/>
+                      </a:pPr>
+                      <a:endParaRPr lang="en-US" sz="1800" b="1" i="0" kern="1200" dirty="0">
+                        <a:solidFill>
+                          <a:schemeClr val="dk1"/>
+                        </a:solidFill>
+                        <a:effectLst/>
+                        <a:latin typeface="+mn-lt"/>
+                        <a:ea typeface="+mn-ea"/>
+                        <a:cs typeface="+mn-cs"/>
+                      </a:endParaRPr>
+                    </a:p>
+                  </a:txBody>
+                  <a:tcPr/>
+                </a:tc>
+                <a:tc>
+                  <a:txBody>
+                    <a:bodyPr/>
+                    <a:lstStyle/>
+                    <a:p>
+                      <a:pPr marL="0" marR="0" lvl="0" indent="0" algn="l" defTabSz="914400" rtl="0" eaLnBrk="1" fontAlgn="auto" latinLnBrk="0" hangingPunct="1">
+                        <a:lnSpc>
+                          <a:spcPct val="100000"/>
+                        </a:lnSpc>
+                        <a:spcBef>
+                          <a:spcPts val="0"/>
+                        </a:spcBef>
+                        <a:spcAft>
+                          <a:spcPts val="0"/>
+                        </a:spcAft>
+                        <a:buClrTx/>
+                        <a:buSzTx/>
+                        <a:buFontTx/>
+                        <a:buNone/>
+                        <a:tabLst/>
+                        <a:defRPr/>
+                      </a:pPr>
+                      <a:r>
+                        <a:rPr lang="en-US" sz="1800" b="0" i="0" kern="1200" dirty="0">
+                          <a:solidFill>
+                            <a:schemeClr val="dk1"/>
+                          </a:solidFill>
+                          <a:effectLst/>
+                          <a:latin typeface="+mn-lt"/>
+                          <a:ea typeface="+mn-ea"/>
+                          <a:cs typeface="+mn-cs"/>
+                        </a:rPr>
+                        <a:t>Move Method (142)</a:t>
+                      </a:r>
+                    </a:p>
+                  </a:txBody>
+                  <a:tcPr/>
+                </a:tc>
+                <a:tc>
+                  <a:txBody>
+                    <a:bodyPr/>
+                    <a:lstStyle/>
+                    <a:p>
+                      <a:pPr marL="0" marR="0" lvl="0" indent="0" algn="l" defTabSz="914400" rtl="0" eaLnBrk="1" fontAlgn="auto" latinLnBrk="0" hangingPunct="1">
+                        <a:lnSpc>
+                          <a:spcPct val="100000"/>
+                        </a:lnSpc>
+                        <a:spcBef>
+                          <a:spcPts val="0"/>
+                        </a:spcBef>
+                        <a:spcAft>
+                          <a:spcPts val="0"/>
+                        </a:spcAft>
+                        <a:buClrTx/>
+                        <a:buSzTx/>
+                        <a:buFontTx/>
+                        <a:buNone/>
+                        <a:tabLst/>
+                        <a:defRPr/>
+                      </a:pPr>
+                      <a:r>
+                        <a:rPr lang="zh-CN" altLang="en-US" sz="1800" b="0" i="0" kern="1200" dirty="0">
+                          <a:solidFill>
+                            <a:schemeClr val="dk1"/>
+                          </a:solidFill>
+                          <a:effectLst/>
+                          <a:latin typeface="+mn-lt"/>
+                          <a:ea typeface="+mn-ea"/>
+                          <a:cs typeface="+mn-cs"/>
+                        </a:rPr>
+                        <a:t>搬移函数</a:t>
+                      </a:r>
+                      <a:endParaRPr lang="en-US" altLang="zh-CN" sz="1800" b="0" i="0" kern="1200" dirty="0">
+                        <a:solidFill>
+                          <a:schemeClr val="dk1"/>
+                        </a:solidFill>
+                        <a:effectLst/>
+                        <a:latin typeface="+mn-lt"/>
+                        <a:ea typeface="+mn-ea"/>
+                        <a:cs typeface="+mn-cs"/>
+                      </a:endParaRPr>
+                    </a:p>
+                  </a:txBody>
+                  <a:tcPr/>
+                </a:tc>
+                <a:extLst>
+                  <a:ext uri="{0D108BD9-81ED-4DB2-BD59-A6C34878D82A}">
+                    <a16:rowId xmlns:a16="http://schemas.microsoft.com/office/drawing/2014/main" val="1496861650"/>
+                  </a:ext>
+                </a:extLst>
+              </a:tr>
+              <a:tr h="370840">
+                <a:tc>
+                  <a:txBody>
+                    <a:bodyPr/>
+                    <a:lstStyle/>
+                    <a:p>
+                      <a:pPr marL="0" marR="0" lvl="0" indent="0" algn="l" defTabSz="914400" rtl="0" eaLnBrk="1" fontAlgn="auto" latinLnBrk="0" hangingPunct="1">
+                        <a:lnSpc>
+                          <a:spcPct val="100000"/>
+                        </a:lnSpc>
+                        <a:spcBef>
+                          <a:spcPts val="0"/>
+                        </a:spcBef>
+                        <a:spcAft>
+                          <a:spcPts val="0"/>
+                        </a:spcAft>
+                        <a:buClrTx/>
+                        <a:buSzTx/>
+                        <a:buFontTx/>
+                        <a:buNone/>
+                        <a:tabLst/>
+                        <a:defRPr/>
+                      </a:pPr>
+                      <a:endParaRPr lang="en-US" sz="1800" b="1" i="0" kern="1200" dirty="0">
+                        <a:solidFill>
+                          <a:schemeClr val="dk1"/>
+                        </a:solidFill>
+                        <a:effectLst/>
+                        <a:latin typeface="+mn-lt"/>
+                        <a:ea typeface="+mn-ea"/>
+                        <a:cs typeface="+mn-cs"/>
+                      </a:endParaRPr>
+                    </a:p>
+                  </a:txBody>
+                  <a:tcPr/>
+                </a:tc>
+                <a:tc>
+                  <a:txBody>
+                    <a:bodyPr/>
+                    <a:lstStyle/>
+                    <a:p>
+                      <a:pPr marL="0" marR="0" lvl="0" indent="0" algn="l" defTabSz="914400" rtl="0" eaLnBrk="1" fontAlgn="auto" latinLnBrk="0" hangingPunct="1">
+                        <a:lnSpc>
+                          <a:spcPct val="100000"/>
+                        </a:lnSpc>
+                        <a:spcBef>
+                          <a:spcPts val="0"/>
+                        </a:spcBef>
+                        <a:spcAft>
+                          <a:spcPts val="0"/>
+                        </a:spcAft>
+                        <a:buClrTx/>
+                        <a:buSzTx/>
+                        <a:buFontTx/>
+                        <a:buNone/>
+                        <a:tabLst/>
+                        <a:defRPr/>
+                      </a:pPr>
+                      <a:r>
+                        <a:rPr lang="en-US" sz="1800" b="0" i="0" kern="1200" dirty="0">
+                          <a:solidFill>
+                            <a:schemeClr val="dk1"/>
+                          </a:solidFill>
+                          <a:effectLst/>
+                          <a:latin typeface="+mn-lt"/>
+                          <a:ea typeface="+mn-ea"/>
+                          <a:cs typeface="+mn-cs"/>
+                        </a:rPr>
+                        <a:t>Move Field (146) </a:t>
+                      </a:r>
+                    </a:p>
+                  </a:txBody>
+                  <a:tcPr/>
+                </a:tc>
+                <a:tc>
+                  <a:txBody>
+                    <a:bodyPr/>
+                    <a:lstStyle/>
+                    <a:p>
+                      <a:pPr marL="0" marR="0" lvl="0" indent="0" algn="l" defTabSz="914400" rtl="0" eaLnBrk="1" fontAlgn="auto" latinLnBrk="0" hangingPunct="1">
+                        <a:lnSpc>
+                          <a:spcPct val="100000"/>
+                        </a:lnSpc>
+                        <a:spcBef>
+                          <a:spcPts val="0"/>
+                        </a:spcBef>
+                        <a:spcAft>
+                          <a:spcPts val="0"/>
+                        </a:spcAft>
+                        <a:buClrTx/>
+                        <a:buSzTx/>
+                        <a:buFontTx/>
+                        <a:buNone/>
+                        <a:tabLst/>
+                        <a:defRPr/>
+                      </a:pPr>
+                      <a:r>
+                        <a:rPr lang="zh-CN" altLang="en-US" sz="1800" b="0" i="0" kern="1200" dirty="0">
+                          <a:solidFill>
+                            <a:schemeClr val="dk1"/>
+                          </a:solidFill>
+                          <a:effectLst/>
+                          <a:latin typeface="+mn-lt"/>
+                          <a:ea typeface="+mn-ea"/>
+                          <a:cs typeface="+mn-cs"/>
+                        </a:rPr>
+                        <a:t>搬移字段</a:t>
+                      </a:r>
+                    </a:p>
+                  </a:txBody>
+                  <a:tcPr/>
+                </a:tc>
+                <a:extLst>
+                  <a:ext uri="{0D108BD9-81ED-4DB2-BD59-A6C34878D82A}">
+                    <a16:rowId xmlns:a16="http://schemas.microsoft.com/office/drawing/2014/main" val="3440323906"/>
+                  </a:ext>
+                </a:extLst>
+              </a:tr>
+              <a:tr h="370840">
+                <a:tc>
+                  <a:txBody>
+                    <a:bodyPr/>
+                    <a:lstStyle/>
+                    <a:p>
+                      <a:pPr marL="0" marR="0" lvl="0" indent="0" algn="l" defTabSz="914400" rtl="0" eaLnBrk="1" fontAlgn="auto" latinLnBrk="0" hangingPunct="1">
+                        <a:lnSpc>
+                          <a:spcPct val="100000"/>
+                        </a:lnSpc>
+                        <a:spcBef>
+                          <a:spcPts val="0"/>
+                        </a:spcBef>
+                        <a:spcAft>
+                          <a:spcPts val="0"/>
+                        </a:spcAft>
+                        <a:buClrTx/>
+                        <a:buSzTx/>
+                        <a:buFontTx/>
+                        <a:buNone/>
+                        <a:tabLst/>
+                        <a:defRPr/>
+                      </a:pPr>
+                      <a:endParaRPr lang="en-US" sz="1800" b="1" i="0" kern="1200" dirty="0">
+                        <a:solidFill>
+                          <a:schemeClr val="dk1"/>
+                        </a:solidFill>
+                        <a:effectLst/>
+                        <a:latin typeface="+mn-lt"/>
+                        <a:ea typeface="+mn-ea"/>
+                        <a:cs typeface="+mn-cs"/>
+                      </a:endParaRPr>
+                    </a:p>
+                  </a:txBody>
+                  <a:tcPr/>
+                </a:tc>
+                <a:tc>
+                  <a:txBody>
+                    <a:bodyPr/>
+                    <a:lstStyle/>
+                    <a:p>
+                      <a:pPr marL="0" marR="0" lvl="0" indent="0" algn="l" defTabSz="914400" rtl="0" eaLnBrk="1" fontAlgn="auto" latinLnBrk="0" hangingPunct="1">
+                        <a:lnSpc>
+                          <a:spcPct val="100000"/>
+                        </a:lnSpc>
+                        <a:spcBef>
+                          <a:spcPts val="0"/>
+                        </a:spcBef>
+                        <a:spcAft>
+                          <a:spcPts val="0"/>
+                        </a:spcAft>
+                        <a:buClrTx/>
+                        <a:buSzTx/>
+                        <a:buFontTx/>
+                        <a:buNone/>
+                        <a:tabLst/>
+                        <a:defRPr/>
+                      </a:pPr>
+                      <a:r>
+                        <a:rPr lang="en-US" sz="1800" b="0" i="0" kern="1200" dirty="0" err="1">
+                          <a:solidFill>
+                            <a:schemeClr val="dk1"/>
+                          </a:solidFill>
+                          <a:effectLst/>
+                          <a:latin typeface="+mn-lt"/>
+                          <a:ea typeface="+mn-ea"/>
+                          <a:cs typeface="+mn-cs"/>
+                        </a:rPr>
+                        <a:t>Extact</a:t>
+                      </a:r>
+                      <a:r>
+                        <a:rPr lang="en-US" sz="1800" b="0" i="0" kern="1200" dirty="0">
+                          <a:solidFill>
+                            <a:schemeClr val="dk1"/>
+                          </a:solidFill>
+                          <a:effectLst/>
+                          <a:latin typeface="+mn-lt"/>
+                          <a:ea typeface="+mn-ea"/>
+                          <a:cs typeface="+mn-cs"/>
+                        </a:rPr>
+                        <a:t> Class(149)</a:t>
+                      </a:r>
+                    </a:p>
+                  </a:txBody>
+                  <a:tcPr/>
+                </a:tc>
+                <a:tc>
+                  <a:txBody>
+                    <a:bodyPr/>
+                    <a:lstStyle/>
+                    <a:p>
+                      <a:pPr marL="0" marR="0" lvl="0" indent="0" algn="l" defTabSz="914400" rtl="0" eaLnBrk="1" fontAlgn="auto" latinLnBrk="0" hangingPunct="1">
+                        <a:lnSpc>
+                          <a:spcPct val="100000"/>
+                        </a:lnSpc>
+                        <a:spcBef>
+                          <a:spcPts val="0"/>
+                        </a:spcBef>
+                        <a:spcAft>
+                          <a:spcPts val="0"/>
+                        </a:spcAft>
+                        <a:buClrTx/>
+                        <a:buSzTx/>
+                        <a:buFontTx/>
+                        <a:buNone/>
+                        <a:tabLst/>
+                        <a:defRPr/>
+                      </a:pPr>
+                      <a:r>
+                        <a:rPr lang="zh-CN" altLang="en-US" sz="1800" b="0" i="0" kern="1200" dirty="0">
+                          <a:solidFill>
+                            <a:schemeClr val="dk1"/>
+                          </a:solidFill>
+                          <a:effectLst/>
+                          <a:latin typeface="+mn-lt"/>
+                          <a:ea typeface="+mn-ea"/>
+                          <a:cs typeface="+mn-cs"/>
+                        </a:rPr>
+                        <a:t>提炼类</a:t>
+                      </a:r>
+                    </a:p>
+                  </a:txBody>
+                  <a:tcPr/>
+                </a:tc>
+                <a:extLst>
+                  <a:ext uri="{0D108BD9-81ED-4DB2-BD59-A6C34878D82A}">
+                    <a16:rowId xmlns:a16="http://schemas.microsoft.com/office/drawing/2014/main" val="308874882"/>
+                  </a:ext>
+                </a:extLst>
+              </a:tr>
+              <a:tr h="370840">
+                <a:tc>
+                  <a:txBody>
+                    <a:bodyPr/>
+                    <a:lstStyle/>
+                    <a:p>
+                      <a:pPr marL="0" marR="0" lvl="0" indent="0" algn="l" defTabSz="914400" rtl="0" eaLnBrk="1" fontAlgn="auto" latinLnBrk="0" hangingPunct="1">
+                        <a:lnSpc>
+                          <a:spcPct val="100000"/>
+                        </a:lnSpc>
+                        <a:spcBef>
+                          <a:spcPts val="0"/>
+                        </a:spcBef>
+                        <a:spcAft>
+                          <a:spcPts val="0"/>
+                        </a:spcAft>
+                        <a:buClrTx/>
+                        <a:buSzTx/>
+                        <a:buFontTx/>
+                        <a:buNone/>
+                        <a:tabLst/>
+                        <a:defRPr/>
+                      </a:pPr>
+                      <a:endParaRPr lang="en-US" sz="1800" b="1" i="0" kern="1200" dirty="0">
+                        <a:solidFill>
+                          <a:schemeClr val="dk1"/>
+                        </a:solidFill>
+                        <a:effectLst/>
+                        <a:latin typeface="+mn-lt"/>
+                        <a:ea typeface="+mn-ea"/>
+                        <a:cs typeface="+mn-cs"/>
+                      </a:endParaRPr>
+                    </a:p>
+                  </a:txBody>
+                  <a:tcPr/>
+                </a:tc>
+                <a:tc>
+                  <a:txBody>
+                    <a:bodyPr/>
+                    <a:lstStyle/>
+                    <a:p>
+                      <a:pPr marL="0" marR="0" lvl="0" indent="0" algn="l" defTabSz="914400" rtl="0" eaLnBrk="1" fontAlgn="auto" latinLnBrk="0" hangingPunct="1">
+                        <a:lnSpc>
+                          <a:spcPct val="100000"/>
+                        </a:lnSpc>
+                        <a:spcBef>
+                          <a:spcPts val="0"/>
+                        </a:spcBef>
+                        <a:spcAft>
+                          <a:spcPts val="0"/>
+                        </a:spcAft>
+                        <a:buClrTx/>
+                        <a:buSzTx/>
+                        <a:buFontTx/>
+                        <a:buNone/>
+                        <a:tabLst/>
+                        <a:defRPr/>
+                      </a:pPr>
+                      <a:r>
+                        <a:rPr lang="en-US" sz="1800" b="0" i="0" kern="1200" dirty="0">
+                          <a:solidFill>
+                            <a:schemeClr val="dk1"/>
+                          </a:solidFill>
+                          <a:effectLst/>
+                          <a:latin typeface="+mn-lt"/>
+                          <a:ea typeface="+mn-ea"/>
+                          <a:cs typeface="+mn-cs"/>
+                        </a:rPr>
+                        <a:t>Inline Class Class(149)</a:t>
+                      </a:r>
+                    </a:p>
+                  </a:txBody>
+                  <a:tcPr/>
+                </a:tc>
+                <a:tc>
+                  <a:txBody>
+                    <a:bodyPr/>
+                    <a:lstStyle/>
+                    <a:p>
+                      <a:pPr marL="0" marR="0" lvl="0" indent="0" algn="l" defTabSz="914400" rtl="0" eaLnBrk="1" fontAlgn="auto" latinLnBrk="0" hangingPunct="1">
+                        <a:lnSpc>
+                          <a:spcPct val="100000"/>
+                        </a:lnSpc>
+                        <a:spcBef>
+                          <a:spcPts val="0"/>
+                        </a:spcBef>
+                        <a:spcAft>
+                          <a:spcPts val="0"/>
+                        </a:spcAft>
+                        <a:buClrTx/>
+                        <a:buSzTx/>
+                        <a:buFontTx/>
+                        <a:buNone/>
+                        <a:tabLst/>
+                        <a:defRPr/>
+                      </a:pPr>
+                      <a:r>
+                        <a:rPr lang="zh-CN" altLang="en-US" sz="1800" b="0" i="0" kern="1200" dirty="0">
+                          <a:solidFill>
+                            <a:schemeClr val="dk1"/>
+                          </a:solidFill>
+                          <a:effectLst/>
+                          <a:latin typeface="+mn-lt"/>
+                          <a:ea typeface="+mn-ea"/>
+                          <a:cs typeface="+mn-cs"/>
+                        </a:rPr>
+                        <a:t>提炼类</a:t>
+                      </a:r>
+                    </a:p>
+                  </a:txBody>
+                  <a:tcPr/>
+                </a:tc>
+                <a:extLst>
+                  <a:ext uri="{0D108BD9-81ED-4DB2-BD59-A6C34878D82A}">
+                    <a16:rowId xmlns:a16="http://schemas.microsoft.com/office/drawing/2014/main" val="3901429168"/>
+                  </a:ext>
+                </a:extLst>
+              </a:tr>
+              <a:tr h="370840">
+                <a:tc>
+                  <a:txBody>
+                    <a:bodyPr/>
+                    <a:lstStyle/>
+                    <a:p>
+                      <a:pPr marL="0" marR="0" lvl="0" indent="0" algn="l" defTabSz="914400" rtl="0" eaLnBrk="1" fontAlgn="auto" latinLnBrk="0" hangingPunct="1">
+                        <a:lnSpc>
+                          <a:spcPct val="100000"/>
+                        </a:lnSpc>
+                        <a:spcBef>
+                          <a:spcPts val="0"/>
+                        </a:spcBef>
+                        <a:spcAft>
+                          <a:spcPts val="0"/>
+                        </a:spcAft>
+                        <a:buClrTx/>
+                        <a:buSzTx/>
+                        <a:buFontTx/>
+                        <a:buNone/>
+                        <a:tabLst/>
+                        <a:defRPr/>
+                      </a:pPr>
+                      <a:endParaRPr lang="en-US" sz="1800" b="1" i="0" kern="1200" dirty="0">
+                        <a:solidFill>
+                          <a:schemeClr val="dk1"/>
+                        </a:solidFill>
+                        <a:effectLst/>
+                        <a:latin typeface="+mn-lt"/>
+                        <a:ea typeface="+mn-ea"/>
+                        <a:cs typeface="+mn-cs"/>
+                      </a:endParaRPr>
+                    </a:p>
+                  </a:txBody>
+                  <a:tcPr/>
+                </a:tc>
+                <a:tc>
+                  <a:txBody>
+                    <a:bodyPr/>
+                    <a:lstStyle/>
+                    <a:p>
+                      <a:pPr marL="0" marR="0" lvl="0" indent="0" algn="l" defTabSz="914400" rtl="0" eaLnBrk="1" fontAlgn="auto" latinLnBrk="0" hangingPunct="1">
+                        <a:lnSpc>
+                          <a:spcPct val="100000"/>
+                        </a:lnSpc>
+                        <a:spcBef>
+                          <a:spcPts val="0"/>
+                        </a:spcBef>
+                        <a:spcAft>
+                          <a:spcPts val="0"/>
+                        </a:spcAft>
+                        <a:buClrTx/>
+                        <a:buSzTx/>
+                        <a:buFontTx/>
+                        <a:buNone/>
+                        <a:tabLst/>
+                        <a:defRPr/>
+                      </a:pPr>
+                      <a:r>
+                        <a:rPr lang="en-US" sz="1800" b="0" i="0" kern="1200" dirty="0">
+                          <a:solidFill>
+                            <a:schemeClr val="dk1"/>
+                          </a:solidFill>
+                          <a:effectLst/>
+                          <a:latin typeface="+mn-lt"/>
+                          <a:ea typeface="+mn-ea"/>
+                          <a:cs typeface="+mn-cs"/>
+                        </a:rPr>
+                        <a:t>Hide Delegate(159)</a:t>
+                      </a:r>
+                    </a:p>
+                  </a:txBody>
+                  <a:tcPr/>
+                </a:tc>
+                <a:tc>
+                  <a:txBody>
+                    <a:bodyPr/>
+                    <a:lstStyle/>
+                    <a:p>
+                      <a:pPr marL="0" marR="0" lvl="0" indent="0" algn="l" defTabSz="914400" rtl="0" eaLnBrk="1" fontAlgn="auto" latinLnBrk="0" hangingPunct="1">
+                        <a:lnSpc>
+                          <a:spcPct val="100000"/>
+                        </a:lnSpc>
+                        <a:spcBef>
+                          <a:spcPts val="0"/>
+                        </a:spcBef>
+                        <a:spcAft>
+                          <a:spcPts val="0"/>
+                        </a:spcAft>
+                        <a:buClrTx/>
+                        <a:buSzTx/>
+                        <a:buFontTx/>
+                        <a:buNone/>
+                        <a:tabLst/>
+                        <a:defRPr/>
+                      </a:pPr>
+                      <a:r>
+                        <a:rPr lang="zh-CN" altLang="en-US" sz="1800" b="0" i="0" kern="1200" dirty="0">
+                          <a:solidFill>
+                            <a:schemeClr val="dk1"/>
+                          </a:solidFill>
+                          <a:effectLst/>
+                          <a:latin typeface="+mn-lt"/>
+                          <a:ea typeface="+mn-ea"/>
+                          <a:cs typeface="+mn-cs"/>
+                        </a:rPr>
+                        <a:t>隐藏“委托关系”</a:t>
+                      </a:r>
+                    </a:p>
+                  </a:txBody>
+                  <a:tcPr/>
+                </a:tc>
+                <a:extLst>
+                  <a:ext uri="{0D108BD9-81ED-4DB2-BD59-A6C34878D82A}">
+                    <a16:rowId xmlns:a16="http://schemas.microsoft.com/office/drawing/2014/main" val="3390769221"/>
+                  </a:ext>
+                </a:extLst>
+              </a:tr>
+              <a:tr h="370840">
+                <a:tc>
+                  <a:txBody>
+                    <a:bodyPr/>
+                    <a:lstStyle/>
+                    <a:p>
+                      <a:endParaRPr lang="en-CN" dirty="0"/>
+                    </a:p>
+                  </a:txBody>
+                  <a:tcPr/>
+                </a:tc>
+                <a:tc>
+                  <a:txBody>
+                    <a:bodyPr/>
+                    <a:lstStyle/>
+                    <a:p>
+                      <a:endParaRPr lang="en-CN" dirty="0"/>
+                    </a:p>
+                  </a:txBody>
+                  <a:tcPr/>
+                </a:tc>
+                <a:tc>
+                  <a:txBody>
+                    <a:bodyPr/>
+                    <a:lstStyle/>
+                    <a:p>
+                      <a:endParaRPr lang="en-CN"/>
+                    </a:p>
+                  </a:txBody>
+                  <a:tcPr/>
+                </a:tc>
+                <a:extLst>
+                  <a:ext uri="{0D108BD9-81ED-4DB2-BD59-A6C34878D82A}">
+                    <a16:rowId xmlns:a16="http://schemas.microsoft.com/office/drawing/2014/main" val="1351351612"/>
+                  </a:ext>
+                </a:extLst>
+              </a:tr>
+              <a:tr h="370840">
+                <a:tc>
+                  <a:txBody>
+                    <a:bodyPr/>
+                    <a:lstStyle/>
+                    <a:p>
+                      <a:endParaRPr lang="en-CN" dirty="0"/>
+                    </a:p>
+                  </a:txBody>
+                  <a:tcPr/>
+                </a:tc>
+                <a:tc>
+                  <a:txBody>
+                    <a:bodyPr/>
+                    <a:lstStyle/>
+                    <a:p>
+                      <a:endParaRPr lang="en-CN" dirty="0"/>
+                    </a:p>
+                  </a:txBody>
+                  <a:tcPr/>
+                </a:tc>
+                <a:tc>
+                  <a:txBody>
+                    <a:bodyPr/>
+                    <a:lstStyle/>
+                    <a:p>
+                      <a:endParaRPr lang="en-CN"/>
+                    </a:p>
+                  </a:txBody>
+                  <a:tcPr/>
+                </a:tc>
+                <a:extLst>
+                  <a:ext uri="{0D108BD9-81ED-4DB2-BD59-A6C34878D82A}">
+                    <a16:rowId xmlns:a16="http://schemas.microsoft.com/office/drawing/2014/main" val="2683910036"/>
+                  </a:ext>
+                </a:extLst>
+              </a:tr>
+              <a:tr h="370840">
+                <a:tc>
+                  <a:txBody>
+                    <a:bodyPr/>
+                    <a:lstStyle/>
+                    <a:p>
+                      <a:endParaRPr lang="en-CN"/>
+                    </a:p>
+                  </a:txBody>
+                  <a:tcPr/>
+                </a:tc>
+                <a:tc>
+                  <a:txBody>
+                    <a:bodyPr/>
+                    <a:lstStyle/>
+                    <a:p>
+                      <a:endParaRPr lang="en-CN"/>
+                    </a:p>
+                  </a:txBody>
+                  <a:tcPr/>
+                </a:tc>
+                <a:tc>
+                  <a:txBody>
+                    <a:bodyPr/>
+                    <a:lstStyle/>
+                    <a:p>
+                      <a:endParaRPr lang="en-CN"/>
+                    </a:p>
+                  </a:txBody>
+                  <a:tcPr/>
+                </a:tc>
+                <a:extLst>
+                  <a:ext uri="{0D108BD9-81ED-4DB2-BD59-A6C34878D82A}">
+                    <a16:rowId xmlns:a16="http://schemas.microsoft.com/office/drawing/2014/main" val="2263800640"/>
+                  </a:ext>
+                </a:extLst>
+              </a:tr>
+              <a:tr h="370840">
+                <a:tc>
+                  <a:txBody>
+                    <a:bodyPr/>
+                    <a:lstStyle/>
+                    <a:p>
+                      <a:endParaRPr lang="en-CN" dirty="0"/>
+                    </a:p>
+                  </a:txBody>
+                  <a:tcPr/>
+                </a:tc>
+                <a:tc>
+                  <a:txBody>
+                    <a:bodyPr/>
+                    <a:lstStyle/>
+                    <a:p>
+                      <a:endParaRPr lang="en-CN"/>
+                    </a:p>
+                  </a:txBody>
+                  <a:tcPr/>
+                </a:tc>
+                <a:tc>
+                  <a:txBody>
+                    <a:bodyPr/>
+                    <a:lstStyle/>
+                    <a:p>
+                      <a:endParaRPr lang="en-CN" dirty="0"/>
+                    </a:p>
+                  </a:txBody>
+                  <a:tcPr/>
+                </a:tc>
+                <a:extLst>
+                  <a:ext uri="{0D108BD9-81ED-4DB2-BD59-A6C34878D82A}">
+                    <a16:rowId xmlns:a16="http://schemas.microsoft.com/office/drawing/2014/main" val="1252342729"/>
+                  </a:ext>
+                </a:extLst>
+              </a:tr>
+            </a:tbl>
+          </a:graphicData>
+        </a:graphic>
+      </p:graphicFrame>
+    </p:spTree>
+    <p:extLst>
+      <p:ext uri="{BB962C8B-B14F-4D97-AF65-F5344CB8AC3E}">
+        <p14:creationId xmlns:p14="http://schemas.microsoft.com/office/powerpoint/2010/main" val="4166832878"/>
+      </p:ext>
+    </p:extLst>
+  </p:cSld>
+  <p:clrMapOvr>
+    <a:masterClrMapping/>
+  </p:clrMapOvr>
+</p:sld>
+</file>
+
 <file path=ppt/slides/slide2.xml><?xml version="1.0" encoding="utf-8"?>
 <p:sld xmlns:a="http://schemas.openxmlformats.org/drawingml/2006/main" xmlns:r="http://schemas.openxmlformats.org/officeDocument/2006/relationships" xmlns:p="http://schemas.openxmlformats.org/presentationml/2006/main">
   <p:cSld>
